--- a/media-kit/RVA-Builds-Media-Kit.pptx
+++ b/media-kit/RVA-Builds-Media-Kit.pptx
@@ -3778,7 +3778,7 @@
             <a:off x="868680" y="4251960"/>
             <a:ext cx="457200" cy="457200"/>
           </a:xfrm>
-          <a:prstGeom prst="ellipse">
+          <a:prstGeom prst="rect">
             <a:avLst/>
           </a:prstGeom>
         </p:spPr>
@@ -3968,7 +3968,7 @@
             <a:off x="4521098" y="4251960"/>
             <a:ext cx="457200" cy="457200"/>
           </a:xfrm>
-          <a:prstGeom prst="ellipse">
+          <a:prstGeom prst="rect">
             <a:avLst/>
           </a:prstGeom>
         </p:spPr>
@@ -4158,7 +4158,7 @@
             <a:off x="8173516" y="4251960"/>
             <a:ext cx="457200" cy="457200"/>
           </a:xfrm>
-          <a:prstGeom prst="ellipse">
+          <a:prstGeom prst="rect">
             <a:avLst/>
           </a:prstGeom>
         </p:spPr>

--- a/media-kit/RVA-Builds-Media-Kit.pptx
+++ b/media-kit/RVA-Builds-Media-Kit.pptx
@@ -3545,7 +3545,7 @@
                 </a:solidFill>
                 <a:latin typeface="Schibsted Grotesk"/>
               </a:rPr>
-              <a:t>Two contrasting typefaces: Space Grotesk for headlines, Schibsted Grotesk for body.</a:t>
+              <a:t>Two contrasting typefaces: Space Grotesk for headlines, Schibsted Grotesk for body. Weights can vary, as long as the text stays legible.</a:t>
             </a:r>
           </a:p>
         </p:txBody>
@@ -5857,7 +5857,7 @@
                 </a:solidFill>
                 <a:latin typeface="Schibsted Grotesk"/>
               </a:rPr>
-              <a:t>Real Richmond students, families, and workplaces — candid, warm, full of natural light.</a:t>
+              <a:t>Photography must represent real Richmond students and workers on the job — inclusive of diverse ethnicities, ages, and trades. Illustrations should not be used.</a:t>
             </a:r>
           </a:p>
         </p:txBody>
@@ -8731,7 +8731,7 @@
                 </a:solidFill>
                 <a:latin typeface="Schibsted Grotesk"/>
               </a:rPr>
-              <a:t>Keep the mark consistent everywhere it appears.</a:t>
+              <a:t>No image or background should ever compete with the mark's clarity, and it must always appear in an approved color combination.</a:t>
             </a:r>
           </a:p>
         </p:txBody>
@@ -9222,7 +9222,7 @@
                 </a:solidFill>
                 <a:latin typeface="Schibsted Grotesk"/>
               </a:rPr>
-              <a:t>These are the colors that represent the identity of RVA Builds.</a:t>
+              <a:t>These colors represent the identity of RVA Builds — meant to build trust between candidates and employers.</a:t>
             </a:r>
           </a:p>
         </p:txBody>
@@ -10040,7 +10040,7 @@
                 </a:solidFill>
                 <a:latin typeface="Schibsted Grotesk"/>
               </a:rPr>
-              <a:t>Neutrals and status colors used for surfaces, text, and system states.</a:t>
+              <a:t>These create contrast against the main palette and should be used sparingly, for text, surfaces, and system states.</a:t>
             </a:r>
           </a:p>
         </p:txBody>

--- a/media-kit/RVA-Builds-Media-Kit.pptx
+++ b/media-kit/RVA-Builds-Media-Kit.pptx
@@ -17,8 +17,6 @@
     <p:sldId id="265" r:id="rId16"/>
     <p:sldId id="266" r:id="rId17"/>
     <p:sldId id="267" r:id="rId18"/>
-    <p:sldId id="268" r:id="rId19"/>
-    <p:sldId id="269" r:id="rId20"/>
   </p:sldIdLst>
   <p:sldSz cx="12191695" cy="6858000" type="screen4x3"/>
   <p:notesSz cx="6858000" cy="9144000"/>
@@ -3116,7 +3114,7 @@
             <a:avLst/>
           </a:prstGeom>
           <a:solidFill>
-            <a:srgbClr val="F15C2C"/>
+            <a:srgbClr val="FFFFFF"/>
           </a:solidFill>
           <a:ln>
             <a:noFill/>
@@ -3145,104 +3143,60 @@
           </a:p>
         </p:txBody>
       </p:sp>
-      <p:pic>
-        <p:nvPicPr>
-          <p:cNvPr id="3" name="Picture 2" descr="hero-connection.jpg"/>
-          <p:cNvPicPr>
-            <a:picLocks noChangeAspect="1"/>
-          </p:cNvPicPr>
-          <p:nvPr/>
-        </p:nvPicPr>
-        <p:blipFill>
-          <a:blip r:embed="rId2"/>
-          <a:srcRect l="5561" r="5561"/>
-          <a:stretch>
-            <a:fillRect/>
-          </a:stretch>
-        </p:blipFill>
-        <p:spPr>
-          <a:xfrm>
-            <a:off x="4145176" y="0"/>
-            <a:ext cx="8046519" cy="6858000"/>
-          </a:xfrm>
-          <a:prstGeom prst="rect">
-            <a:avLst/>
-          </a:prstGeom>
-        </p:spPr>
-      </p:pic>
-      <p:pic>
-        <p:nvPicPr>
-          <p:cNvPr id="4" name="Picture 3" descr="rva-builds-icon.png"/>
-          <p:cNvPicPr>
-            <a:picLocks noChangeAspect="1"/>
-          </p:cNvPicPr>
-          <p:nvPr/>
-        </p:nvPicPr>
-        <p:blipFill>
-          <a:blip r:embed="rId3"/>
-          <a:stretch>
-            <a:fillRect/>
-          </a:stretch>
-        </p:blipFill>
-        <p:spPr>
-          <a:xfrm>
-            <a:off x="548640" y="4160520"/>
-            <a:ext cx="365760" cy="365760"/>
-          </a:xfrm>
-          <a:prstGeom prst="rect">
-            <a:avLst/>
-          </a:prstGeom>
-        </p:spPr>
-      </p:pic>
-      <p:sp>
-        <p:nvSpPr>
-          <p:cNvPr id="5" name="TextBox 4"/>
+      <p:sp>
+        <p:nvSpPr>
+          <p:cNvPr id="3" name="Rectangle 2"/>
+          <p:cNvSpPr/>
+          <p:nvPr/>
+        </p:nvSpPr>
+        <p:spPr>
+          <a:xfrm>
+            <a:off x="0" y="0"/>
+            <a:ext cx="4145176" cy="6858000"/>
+          </a:xfrm>
+          <a:prstGeom prst="rect">
+            <a:avLst/>
+          </a:prstGeom>
+          <a:solidFill>
+            <a:srgbClr val="1A1A1A"/>
+          </a:solidFill>
+          <a:ln>
+            <a:noFill/>
+          </a:ln>
+          <a:effectLst/>
+        </p:spPr>
+        <p:style>
+          <a:lnRef idx="1">
+            <a:schemeClr val="accent1"/>
+          </a:lnRef>
+          <a:fillRef idx="3">
+            <a:schemeClr val="accent1"/>
+          </a:fillRef>
+          <a:effectRef idx="2">
+            <a:schemeClr val="accent1"/>
+          </a:effectRef>
+          <a:fontRef idx="minor">
+            <a:schemeClr val="lt1"/>
+          </a:fontRef>
+        </p:style>
+        <p:txBody>
+          <a:bodyPr rtlCol="0" anchor="ctr"/>
+          <a:lstStyle/>
+          <a:p>
+            <a:pPr algn="ctr"/>
+          </a:p>
+        </p:txBody>
+      </p:sp>
+      <p:sp>
+        <p:nvSpPr>
+          <p:cNvPr id="4" name="TextBox 3"/>
           <p:cNvSpPr txBox="1"/>
           <p:nvPr/>
         </p:nvSpPr>
         <p:spPr>
           <a:xfrm>
-            <a:off x="960120" y="4160520"/>
-            <a:ext cx="3200400" cy="365760"/>
-          </a:xfrm>
-          <a:prstGeom prst="rect">
-            <a:avLst/>
-          </a:prstGeom>
-          <a:noFill/>
-        </p:spPr>
-        <p:txBody>
-          <a:bodyPr wrap="square" anchor="ctr" lIns="0" rIns="0" tIns="0" bIns="0">
-            <a:spAutoFit/>
-          </a:bodyPr>
-          <a:lstStyle/>
-          <a:p>
-            <a:pPr algn="l">
-              <a:lnSpc>
-                <a:spcPct val="100000"/>
-              </a:lnSpc>
-            </a:pPr>
-            <a:r>
-              <a:rPr sz="1500" b="0">
-                <a:solidFill>
-                  <a:srgbClr val="FFFFFF"/>
-                </a:solidFill>
-                <a:latin typeface="Space Grotesk"/>
-              </a:rPr>
-              <a:t>RVA Builds</a:t>
-            </a:r>
-          </a:p>
-        </p:txBody>
-      </p:sp>
-      <p:sp>
-        <p:nvSpPr>
-          <p:cNvPr id="6" name="TextBox 5"/>
-          <p:cNvSpPr txBox="1"/>
-          <p:nvPr/>
-        </p:nvSpPr>
-        <p:spPr>
-          <a:xfrm>
-            <a:off x="548640" y="4709160"/>
-            <a:ext cx="3657600" cy="457200"/>
+            <a:off x="411480" y="2331720"/>
+            <a:ext cx="3322216" cy="274320"/>
           </a:xfrm>
           <a:prstGeom prst="rect">
             <a:avLst/>
@@ -3255,33 +3209,33 @@
           </a:bodyPr>
           <a:lstStyle/>
           <a:p>
-            <a:pPr algn="l">
+            <a:pPr algn="ctr">
               <a:lnSpc>
                 <a:spcPct val="100000"/>
               </a:lnSpc>
             </a:pPr>
             <a:r>
-              <a:rPr sz="1050" b="1">
-                <a:solidFill>
-                  <a:srgbClr val="FFE3D8"/>
+              <a:rPr sz="1200" b="1">
+                <a:solidFill>
+                  <a:srgbClr val="F15C2C"/>
                 </a:solidFill>
                 <a:latin typeface="Space Grotesk"/>
               </a:rPr>
-              <a:t>RICHMOND ED FUND INITIATIVE</a:t>
-            </a:r>
-          </a:p>
-        </p:txBody>
-      </p:sp>
-      <p:sp>
-        <p:nvSpPr>
-          <p:cNvPr id="7" name="TextBox 6"/>
+              <a:t>01</a:t>
+            </a:r>
+          </a:p>
+        </p:txBody>
+      </p:sp>
+      <p:sp>
+        <p:nvSpPr>
+          <p:cNvPr id="5" name="TextBox 4"/>
           <p:cNvSpPr txBox="1"/>
           <p:nvPr/>
         </p:nvSpPr>
         <p:spPr>
           <a:xfrm>
-            <a:off x="548640" y="5074920"/>
-            <a:ext cx="3657600" cy="1280160"/>
+            <a:off x="411480" y="2651760"/>
+            <a:ext cx="3322216" cy="1005840"/>
           </a:xfrm>
           <a:prstGeom prst="rect">
             <a:avLst/>
@@ -3294,35 +3248,568 @@
           </a:bodyPr>
           <a:lstStyle/>
           <a:p>
+            <a:pPr algn="ctr">
+              <a:lnSpc>
+                <a:spcPct val="105000"/>
+              </a:lnSpc>
+            </a:pPr>
+            <a:r>
+              <a:rPr sz="2600" b="1">
+                <a:solidFill>
+                  <a:srgbClr val="FFFFFF"/>
+                </a:solidFill>
+                <a:latin typeface="Space Grotesk"/>
+              </a:rPr>
+              <a:t>What is</a:t>
+            </a:r>
+          </a:p>
+          <a:p>
+            <a:pPr algn="ctr">
+              <a:lnSpc>
+                <a:spcPct val="105000"/>
+              </a:lnSpc>
+            </a:pPr>
+            <a:r>
+              <a:rPr sz="2600" b="1">
+                <a:solidFill>
+                  <a:srgbClr val="FFFFFF"/>
+                </a:solidFill>
+                <a:latin typeface="Space Grotesk"/>
+              </a:rPr>
+              <a:t>RVA Builds?</a:t>
+            </a:r>
+          </a:p>
+        </p:txBody>
+      </p:sp>
+      <p:sp>
+        <p:nvSpPr>
+          <p:cNvPr id="6" name="TextBox 5"/>
+          <p:cNvSpPr txBox="1"/>
+          <p:nvPr/>
+        </p:nvSpPr>
+        <p:spPr>
+          <a:xfrm>
+            <a:off x="411480" y="3703320"/>
+            <a:ext cx="3322216" cy="1280160"/>
+          </a:xfrm>
+          <a:prstGeom prst="rect">
+            <a:avLst/>
+          </a:prstGeom>
+          <a:noFill/>
+        </p:spPr>
+        <p:txBody>
+          <a:bodyPr wrap="square" anchor="t" lIns="0" rIns="0" tIns="0" bIns="0">
+            <a:spAutoFit/>
+          </a:bodyPr>
+          <a:lstStyle/>
+          <a:p>
+            <a:pPr algn="ctr">
+              <a:lnSpc>
+                <a:spcPct val="135000"/>
+              </a:lnSpc>
+            </a:pPr>
+            <a:r>
+              <a:rPr sz="1300" b="0">
+                <a:solidFill>
+                  <a:srgbClr val="CCCCCC"/>
+                </a:solidFill>
+                <a:latin typeface="Schibsted Grotesk"/>
+              </a:rPr>
+              <a:t>RVA Builds connects Richmond Public Schools students with paid, hands-on careers in construction and the skilled trades — before they even graduate. A Richmond Ed Fund initiative, backed by Bloomberg Philanthropies.</a:t>
+            </a:r>
+          </a:p>
+        </p:txBody>
+      </p:sp>
+      <p:cxnSp>
+        <p:nvCxnSpPr>
+          <p:cNvPr id="7" name="Connector 6"/>
+          <p:cNvCxnSpPr/>
+          <p:nvPr/>
+        </p:nvCxnSpPr>
+        <p:spPr>
+          <a:xfrm>
+            <a:off x="5150915.5" y="2331720"/>
+            <a:ext cx="6035040.0" cy="0"/>
+          </a:xfrm>
+          <a:prstGeom prst="line">
+            <a:avLst/>
+          </a:prstGeom>
+          <a:ln w="12700">
+            <a:solidFill>
+              <a:srgbClr val="E4E4E4"/>
+            </a:solidFill>
+          </a:ln>
+        </p:spPr>
+        <p:style>
+          <a:lnRef idx="2">
+            <a:schemeClr val="accent1"/>
+          </a:lnRef>
+          <a:fillRef idx="0">
+            <a:schemeClr val="accent1"/>
+          </a:fillRef>
+          <a:effectRef idx="1">
+            <a:schemeClr val="accent1"/>
+          </a:effectRef>
+          <a:fontRef idx="minor">
+            <a:schemeClr val="tx1"/>
+          </a:fontRef>
+        </p:style>
+      </p:cxnSp>
+      <p:cxnSp>
+        <p:nvCxnSpPr>
+          <p:cNvPr id="8" name="Connector 7"/>
+          <p:cNvCxnSpPr/>
+          <p:nvPr/>
+        </p:nvCxnSpPr>
+        <p:spPr>
+          <a:xfrm>
+            <a:off x="5150915.5" y="3566160"/>
+            <a:ext cx="6035040.0" cy="0"/>
+          </a:xfrm>
+          <a:prstGeom prst="line">
+            <a:avLst/>
+          </a:prstGeom>
+          <a:ln w="12700">
+            <a:solidFill>
+              <a:srgbClr val="E4E4E4"/>
+            </a:solidFill>
+          </a:ln>
+        </p:spPr>
+        <p:style>
+          <a:lnRef idx="2">
+            <a:schemeClr val="accent1"/>
+          </a:lnRef>
+          <a:fillRef idx="0">
+            <a:schemeClr val="accent1"/>
+          </a:fillRef>
+          <a:effectRef idx="1">
+            <a:schemeClr val="accent1"/>
+          </a:effectRef>
+          <a:fontRef idx="minor">
+            <a:schemeClr val="tx1"/>
+          </a:fontRef>
+        </p:style>
+      </p:cxnSp>
+      <p:sp>
+        <p:nvSpPr>
+          <p:cNvPr id="9" name="TextBox 8"/>
+          <p:cNvSpPr txBox="1"/>
+          <p:nvPr/>
+        </p:nvSpPr>
+        <p:spPr>
+          <a:xfrm>
+            <a:off x="5150915" y="2514600"/>
+            <a:ext cx="1371600" cy="548640"/>
+          </a:xfrm>
+          <a:prstGeom prst="rect">
+            <a:avLst/>
+          </a:prstGeom>
+          <a:noFill/>
+        </p:spPr>
+        <p:txBody>
+          <a:bodyPr wrap="square" anchor="t" lIns="0" rIns="0" tIns="0" bIns="0">
+            <a:spAutoFit/>
+          </a:bodyPr>
+          <a:lstStyle/>
+          <a:p>
             <a:pPr algn="l">
               <a:lnSpc>
                 <a:spcPct val="100000"/>
               </a:lnSpc>
             </a:pPr>
             <a:r>
-              <a:rPr sz="4400" b="1">
-                <a:solidFill>
-                  <a:srgbClr val="FFFFFF"/>
+              <a:rPr sz="3200" b="1">
+                <a:solidFill>
+                  <a:srgbClr val="1A1A1A"/>
                 </a:solidFill>
                 <a:latin typeface="Space Grotesk"/>
               </a:rPr>
-              <a:t>MEDIA</a:t>
-            </a:r>
-          </a:p>
+              <a:t>150</a:t>
+            </a:r>
+          </a:p>
+        </p:txBody>
+      </p:sp>
+      <p:sp>
+        <p:nvSpPr>
+          <p:cNvPr id="10" name="TextBox 9"/>
+          <p:cNvSpPr txBox="1"/>
+          <p:nvPr/>
+        </p:nvSpPr>
+        <p:spPr>
+          <a:xfrm>
+            <a:off x="5150915" y="3108960"/>
+            <a:ext cx="1371600" cy="502920"/>
+          </a:xfrm>
+          <a:prstGeom prst="rect">
+            <a:avLst/>
+          </a:prstGeom>
+          <a:noFill/>
+        </p:spPr>
+        <p:txBody>
+          <a:bodyPr wrap="square" anchor="t" lIns="0" rIns="0" tIns="0" bIns="0">
+            <a:spAutoFit/>
+          </a:bodyPr>
+          <a:lstStyle/>
           <a:p>
             <a:pPr algn="l">
               <a:lnSpc>
+                <a:spcPct val="115000"/>
+              </a:lnSpc>
+            </a:pPr>
+            <a:r>
+              <a:rPr sz="1050" b="0">
+                <a:solidFill>
+                  <a:srgbClr val="5A5A5A"/>
+                </a:solidFill>
+                <a:latin typeface="Schibsted Grotesk"/>
+              </a:rPr>
+              <a:t>RPS grads aimed at registered</a:t>
+            </a:r>
+          </a:p>
+          <a:p>
+            <a:pPr algn="l">
+              <a:lnSpc>
+                <a:spcPct val="115000"/>
+              </a:lnSpc>
+            </a:pPr>
+            <a:r>
+              <a:rPr sz="1050" b="0">
+                <a:solidFill>
+                  <a:srgbClr val="5A5A5A"/>
+                </a:solidFill>
+                <a:latin typeface="Schibsted Grotesk"/>
+              </a:rPr>
+              <a:t>apprenticeships in 3 years</a:t>
+            </a:r>
+          </a:p>
+        </p:txBody>
+      </p:sp>
+      <p:sp>
+        <p:nvSpPr>
+          <p:cNvPr id="11" name="TextBox 10"/>
+          <p:cNvSpPr txBox="1"/>
+          <p:nvPr/>
+        </p:nvSpPr>
+        <p:spPr>
+          <a:xfrm>
+            <a:off x="6659675" y="2514600"/>
+            <a:ext cx="1371600" cy="548640"/>
+          </a:xfrm>
+          <a:prstGeom prst="rect">
+            <a:avLst/>
+          </a:prstGeom>
+          <a:noFill/>
+        </p:spPr>
+        <p:txBody>
+          <a:bodyPr wrap="square" anchor="t" lIns="0" rIns="0" tIns="0" bIns="0">
+            <a:spAutoFit/>
+          </a:bodyPr>
+          <a:lstStyle/>
+          <a:p>
+            <a:pPr algn="l">
+              <a:lnSpc>
                 <a:spcPct val="100000"/>
               </a:lnSpc>
             </a:pPr>
             <a:r>
-              <a:rPr sz="4400" b="1">
-                <a:solidFill>
-                  <a:srgbClr val="FFFFFF"/>
+              <a:rPr sz="3200" b="1">
+                <a:solidFill>
+                  <a:srgbClr val="1A1A1A"/>
                 </a:solidFill>
                 <a:latin typeface="Space Grotesk"/>
               </a:rPr>
-              <a:t>KIT</a:t>
+              <a:t>500</a:t>
+            </a:r>
+          </a:p>
+        </p:txBody>
+      </p:sp>
+      <p:sp>
+        <p:nvSpPr>
+          <p:cNvPr id="12" name="TextBox 11"/>
+          <p:cNvSpPr txBox="1"/>
+          <p:nvPr/>
+        </p:nvSpPr>
+        <p:spPr>
+          <a:xfrm>
+            <a:off x="6659675" y="3108960"/>
+            <a:ext cx="1371600" cy="502920"/>
+          </a:xfrm>
+          <a:prstGeom prst="rect">
+            <a:avLst/>
+          </a:prstGeom>
+          <a:noFill/>
+        </p:spPr>
+        <p:txBody>
+          <a:bodyPr wrap="square" anchor="t" lIns="0" rIns="0" tIns="0" bIns="0">
+            <a:spAutoFit/>
+          </a:bodyPr>
+          <a:lstStyle/>
+          <a:p>
+            <a:pPr algn="l">
+              <a:lnSpc>
+                <a:spcPct val="115000"/>
+              </a:lnSpc>
+            </a:pPr>
+            <a:r>
+              <a:rPr sz="1050" b="0">
+                <a:solidFill>
+                  <a:srgbClr val="5A5A5A"/>
+                </a:solidFill>
+                <a:latin typeface="Schibsted Grotesk"/>
+              </a:rPr>
+              <a:t>Students in paid trades</a:t>
+            </a:r>
+          </a:p>
+          <a:p>
+            <a:pPr algn="l">
+              <a:lnSpc>
+                <a:spcPct val="115000"/>
+              </a:lnSpc>
+            </a:pPr>
+            <a:r>
+              <a:rPr sz="1050" b="0">
+                <a:solidFill>
+                  <a:srgbClr val="5A5A5A"/>
+                </a:solidFill>
+                <a:latin typeface="Schibsted Grotesk"/>
+              </a:rPr>
+              <a:t>learning by 2028–29 (goal)</a:t>
+            </a:r>
+          </a:p>
+        </p:txBody>
+      </p:sp>
+      <p:sp>
+        <p:nvSpPr>
+          <p:cNvPr id="13" name="TextBox 12"/>
+          <p:cNvSpPr txBox="1"/>
+          <p:nvPr/>
+        </p:nvSpPr>
+        <p:spPr>
+          <a:xfrm>
+            <a:off x="8168435" y="2514600"/>
+            <a:ext cx="1371600" cy="548640"/>
+          </a:xfrm>
+          <a:prstGeom prst="rect">
+            <a:avLst/>
+          </a:prstGeom>
+          <a:noFill/>
+        </p:spPr>
+        <p:txBody>
+          <a:bodyPr wrap="square" anchor="t" lIns="0" rIns="0" tIns="0" bIns="0">
+            <a:spAutoFit/>
+          </a:bodyPr>
+          <a:lstStyle/>
+          <a:p>
+            <a:pPr algn="l">
+              <a:lnSpc>
+                <a:spcPct val="100000"/>
+              </a:lnSpc>
+            </a:pPr>
+            <a:r>
+              <a:rPr sz="3200" b="1">
+                <a:solidFill>
+                  <a:srgbClr val="1A1A1A"/>
+                </a:solidFill>
+                <a:latin typeface="Space Grotesk"/>
+              </a:rPr>
+              <a:t>17</a:t>
+            </a:r>
+          </a:p>
+        </p:txBody>
+      </p:sp>
+      <p:sp>
+        <p:nvSpPr>
+          <p:cNvPr id="14" name="TextBox 13"/>
+          <p:cNvSpPr txBox="1"/>
+          <p:nvPr/>
+        </p:nvSpPr>
+        <p:spPr>
+          <a:xfrm>
+            <a:off x="8168435" y="3108960"/>
+            <a:ext cx="1371600" cy="502920"/>
+          </a:xfrm>
+          <a:prstGeom prst="rect">
+            <a:avLst/>
+          </a:prstGeom>
+          <a:noFill/>
+        </p:spPr>
+        <p:txBody>
+          <a:bodyPr wrap="square" anchor="t" lIns="0" rIns="0" tIns="0" bIns="0">
+            <a:spAutoFit/>
+          </a:bodyPr>
+          <a:lstStyle/>
+          <a:p>
+            <a:pPr algn="l">
+              <a:lnSpc>
+                <a:spcPct val="115000"/>
+              </a:lnSpc>
+            </a:pPr>
+            <a:r>
+              <a:rPr sz="1050" b="0">
+                <a:solidFill>
+                  <a:srgbClr val="5A5A5A"/>
+                </a:solidFill>
+                <a:latin typeface="Schibsted Grotesk"/>
+              </a:rPr>
+              <a:t>Partners: schools, the city,</a:t>
+            </a:r>
+          </a:p>
+          <a:p>
+            <a:pPr algn="l">
+              <a:lnSpc>
+                <a:spcPct val="115000"/>
+              </a:lnSpc>
+            </a:pPr>
+            <a:r>
+              <a:rPr sz="1050" b="0">
+                <a:solidFill>
+                  <a:srgbClr val="5A5A5A"/>
+                </a:solidFill>
+                <a:latin typeface="Schibsted Grotesk"/>
+              </a:rPr>
+              <a:t>business &amp; unions</a:t>
+            </a:r>
+          </a:p>
+        </p:txBody>
+      </p:sp>
+      <p:sp>
+        <p:nvSpPr>
+          <p:cNvPr id="15" name="TextBox 14"/>
+          <p:cNvSpPr txBox="1"/>
+          <p:nvPr/>
+        </p:nvSpPr>
+        <p:spPr>
+          <a:xfrm>
+            <a:off x="9677195" y="2514600"/>
+            <a:ext cx="1371600" cy="548640"/>
+          </a:xfrm>
+          <a:prstGeom prst="rect">
+            <a:avLst/>
+          </a:prstGeom>
+          <a:noFill/>
+        </p:spPr>
+        <p:txBody>
+          <a:bodyPr wrap="square" anchor="t" lIns="0" rIns="0" tIns="0" bIns="0">
+            <a:spAutoFit/>
+          </a:bodyPr>
+          <a:lstStyle/>
+          <a:p>
+            <a:pPr algn="l">
+              <a:lnSpc>
+                <a:spcPct val="100000"/>
+              </a:lnSpc>
+            </a:pPr>
+            <a:r>
+              <a:rPr sz="3200" b="1">
+                <a:solidFill>
+                  <a:srgbClr val="1A1A1A"/>
+                </a:solidFill>
+                <a:latin typeface="Space Grotesk"/>
+              </a:rPr>
+              <a:t>120+</a:t>
+            </a:r>
+          </a:p>
+        </p:txBody>
+      </p:sp>
+      <p:sp>
+        <p:nvSpPr>
+          <p:cNvPr id="16" name="TextBox 15"/>
+          <p:cNvSpPr txBox="1"/>
+          <p:nvPr/>
+        </p:nvSpPr>
+        <p:spPr>
+          <a:xfrm>
+            <a:off x="9677195" y="3108960"/>
+            <a:ext cx="1371600" cy="502920"/>
+          </a:xfrm>
+          <a:prstGeom prst="rect">
+            <a:avLst/>
+          </a:prstGeom>
+          <a:noFill/>
+        </p:spPr>
+        <p:txBody>
+          <a:bodyPr wrap="square" anchor="t" lIns="0" rIns="0" tIns="0" bIns="0">
+            <a:spAutoFit/>
+          </a:bodyPr>
+          <a:lstStyle/>
+          <a:p>
+            <a:pPr algn="l">
+              <a:lnSpc>
+                <a:spcPct val="115000"/>
+              </a:lnSpc>
+            </a:pPr>
+            <a:r>
+              <a:rPr sz="1050" b="0">
+                <a:solidFill>
+                  <a:srgbClr val="5A5A5A"/>
+                </a:solidFill>
+                <a:latin typeface="Schibsted Grotesk"/>
+              </a:rPr>
+              <a:t>Paid work-based learning</a:t>
+            </a:r>
+          </a:p>
+          <a:p>
+            <a:pPr algn="l">
+              <a:lnSpc>
+                <a:spcPct val="115000"/>
+              </a:lnSpc>
+            </a:pPr>
+            <a:r>
+              <a:rPr sz="1050" b="0">
+                <a:solidFill>
+                  <a:srgbClr val="5A5A5A"/>
+                </a:solidFill>
+                <a:latin typeface="Schibsted Grotesk"/>
+              </a:rPr>
+              <a:t>hours per student</a:t>
+            </a:r>
+          </a:p>
+        </p:txBody>
+      </p:sp>
+      <p:sp>
+        <p:nvSpPr>
+          <p:cNvPr id="17" name="TextBox 16"/>
+          <p:cNvSpPr txBox="1"/>
+          <p:nvPr/>
+        </p:nvSpPr>
+        <p:spPr>
+          <a:xfrm>
+            <a:off x="4145176" y="4023360"/>
+            <a:ext cx="8046519" cy="548640"/>
+          </a:xfrm>
+          <a:prstGeom prst="rect">
+            <a:avLst/>
+          </a:prstGeom>
+          <a:noFill/>
+        </p:spPr>
+        <p:txBody>
+          <a:bodyPr wrap="square" anchor="t" lIns="0" rIns="0">
+            <a:spAutoFit/>
+          </a:bodyPr>
+          <a:lstStyle/>
+          <a:p>
+            <a:pPr algn="ctr">
+              <a:lnSpc>
+                <a:spcPct val="100000"/>
+              </a:lnSpc>
+            </a:pPr>
+            <a:r>
+              <a:rPr sz="1900" b="1">
+                <a:solidFill>
+                  <a:srgbClr val="1A1A1A"/>
+                </a:solidFill>
+                <a:latin typeface="Space Grotesk"/>
+              </a:rPr>
+              <a:t>Build a career in the trades, </a:t>
+            </a:r>
+            <a:r>
+              <a:rPr sz="1900" b="1">
+                <a:solidFill>
+                  <a:srgbClr val="F15C2C"/>
+                </a:solidFill>
+                <a:latin typeface="Space Grotesk"/>
+              </a:rPr>
+              <a:t>before you graduate.</a:t>
             </a:r>
           </a:p>
         </p:txBody>
@@ -3467,7 +3954,7 @@
                 </a:solidFill>
                 <a:latin typeface="Space Grotesk"/>
               </a:rPr>
-              <a:t>04</a:t>
+              <a:t>05</a:t>
             </a:r>
           </a:p>
         </p:txBody>
@@ -3506,7 +3993,23 @@
                 </a:solidFill>
                 <a:latin typeface="Space Grotesk"/>
               </a:rPr>
-              <a:t>Typography</a:t>
+              <a:t>Tone &amp;</a:t>
+            </a:r>
+          </a:p>
+          <a:p>
+            <a:pPr algn="ctr">
+              <a:lnSpc>
+                <a:spcPct val="105000"/>
+              </a:lnSpc>
+            </a:pPr>
+            <a:r>
+              <a:rPr sz="2600" b="1">
+                <a:solidFill>
+                  <a:srgbClr val="FFFFFF"/>
+                </a:solidFill>
+                <a:latin typeface="Space Grotesk"/>
+              </a:rPr>
+              <a:t>Voice</a:t>
             </a:r>
           </a:p>
         </p:txBody>
@@ -3545,7 +4048,7 @@
                 </a:solidFill>
                 <a:latin typeface="Schibsted Grotesk"/>
               </a:rPr>
-              <a:t>Two contrasting typefaces: Space Grotesk for headlines, Schibsted Grotesk for body. Weights can vary, as long as the text stays legible.</a:t>
+              <a:t>Hopeful, trustworthy, civic, warm, data-informed, editorial.</a:t>
             </a:r>
           </a:p>
         </p:txBody>
@@ -3558,8 +4061,8 @@
         </p:nvSpPr>
         <p:spPr>
           <a:xfrm>
-            <a:off x="5151016" y="1554480"/>
-            <a:ext cx="4572000" cy="457200"/>
+            <a:off x="4968136" y="1600200"/>
+            <a:ext cx="1554480" cy="365760"/>
           </a:xfrm>
           <a:prstGeom prst="rect">
             <a:avLst/>
@@ -3578,13 +4081,13 @@
               </a:lnSpc>
             </a:pPr>
             <a:r>
-              <a:rPr sz="2400" b="1">
+              <a:rPr sz="1350" b="1">
                 <a:solidFill>
                   <a:srgbClr val="1A1A1A"/>
                 </a:solidFill>
                 <a:latin typeface="Space Grotesk"/>
               </a:rPr>
-              <a:t>Space Grotesk</a:t>
+              <a:t>Hopeful</a:t>
             </a:r>
           </a:p>
         </p:txBody>
@@ -3597,8 +4100,8 @@
         </p:nvSpPr>
         <p:spPr>
           <a:xfrm>
-            <a:off x="5151016" y="2103120"/>
-            <a:ext cx="1097280" cy="548640"/>
+            <a:off x="6659776" y="1600200"/>
+            <a:ext cx="4892040" cy="365760"/>
           </a:xfrm>
           <a:prstGeom prst="rect">
             <a:avLst/>
@@ -3617,222 +4120,27 @@
               </a:lnSpc>
             </a:pPr>
             <a:r>
-              <a:rPr sz="3000" b="0">
-                <a:solidFill>
-                  <a:srgbClr val="1A1A1A"/>
-                </a:solidFill>
-                <a:latin typeface="Space Grotesk"/>
-              </a:rPr>
-              <a:t>Aa</a:t>
-            </a:r>
-          </a:p>
-        </p:txBody>
-      </p:sp>
-      <p:sp>
-        <p:nvSpPr>
-          <p:cNvPr id="9" name="TextBox 8"/>
-          <p:cNvSpPr txBox="1"/>
-          <p:nvPr/>
-        </p:nvSpPr>
-        <p:spPr>
-          <a:xfrm>
-            <a:off x="5151016" y="2743200"/>
-            <a:ext cx="1097280" cy="274320"/>
-          </a:xfrm>
-          <a:prstGeom prst="rect">
-            <a:avLst/>
-          </a:prstGeom>
-          <a:noFill/>
-        </p:spPr>
-        <p:txBody>
-          <a:bodyPr wrap="square" anchor="t" lIns="0" rIns="0" tIns="0" bIns="0">
-            <a:spAutoFit/>
-          </a:bodyPr>
-          <a:lstStyle/>
-          <a:p>
-            <a:pPr algn="l">
-              <a:lnSpc>
-                <a:spcPct val="100000"/>
-              </a:lnSpc>
-            </a:pPr>
-            <a:r>
-              <a:rPr sz="1050" b="0">
+              <a:rPr sz="1250" b="0">
                 <a:solidFill>
                   <a:srgbClr val="5A5A5A"/>
                 </a:solidFill>
                 <a:latin typeface="Schibsted Grotesk"/>
               </a:rPr>
-              <a:t>Medium</a:t>
-            </a:r>
-          </a:p>
-        </p:txBody>
-      </p:sp>
-      <p:sp>
-        <p:nvSpPr>
-          <p:cNvPr id="10" name="TextBox 9"/>
-          <p:cNvSpPr txBox="1"/>
-          <p:nvPr/>
-        </p:nvSpPr>
-        <p:spPr>
-          <a:xfrm>
-            <a:off x="6431176" y="2103120"/>
-            <a:ext cx="1097280" cy="548640"/>
-          </a:xfrm>
-          <a:prstGeom prst="rect">
-            <a:avLst/>
-          </a:prstGeom>
-          <a:noFill/>
-        </p:spPr>
-        <p:txBody>
-          <a:bodyPr wrap="square" anchor="t" lIns="0" rIns="0" tIns="0" bIns="0">
-            <a:spAutoFit/>
-          </a:bodyPr>
-          <a:lstStyle/>
-          <a:p>
-            <a:pPr algn="l">
-              <a:lnSpc>
-                <a:spcPct val="100000"/>
-              </a:lnSpc>
-            </a:pPr>
-            <a:r>
-              <a:rPr sz="3000" b="1">
-                <a:solidFill>
-                  <a:srgbClr val="1A1A1A"/>
-                </a:solidFill>
-                <a:latin typeface="Space Grotesk"/>
-              </a:rPr>
-              <a:t>Aa</a:t>
-            </a:r>
-          </a:p>
-        </p:txBody>
-      </p:sp>
-      <p:sp>
-        <p:nvSpPr>
-          <p:cNvPr id="11" name="TextBox 10"/>
-          <p:cNvSpPr txBox="1"/>
-          <p:nvPr/>
-        </p:nvSpPr>
-        <p:spPr>
-          <a:xfrm>
-            <a:off x="6431176" y="2743200"/>
-            <a:ext cx="1097280" cy="274320"/>
-          </a:xfrm>
-          <a:prstGeom prst="rect">
-            <a:avLst/>
-          </a:prstGeom>
-          <a:noFill/>
-        </p:spPr>
-        <p:txBody>
-          <a:bodyPr wrap="square" anchor="t" lIns="0" rIns="0" tIns="0" bIns="0">
-            <a:spAutoFit/>
-          </a:bodyPr>
-          <a:lstStyle/>
-          <a:p>
-            <a:pPr algn="l">
-              <a:lnSpc>
-                <a:spcPct val="100000"/>
-              </a:lnSpc>
-            </a:pPr>
-            <a:r>
-              <a:rPr sz="1050" b="0">
-                <a:solidFill>
-                  <a:srgbClr val="5A5A5A"/>
-                </a:solidFill>
-                <a:latin typeface="Schibsted Grotesk"/>
-              </a:rPr>
-              <a:t>SemiBold</a:t>
-            </a:r>
-          </a:p>
-        </p:txBody>
-      </p:sp>
-      <p:sp>
-        <p:nvSpPr>
-          <p:cNvPr id="12" name="TextBox 11"/>
-          <p:cNvSpPr txBox="1"/>
-          <p:nvPr/>
-        </p:nvSpPr>
-        <p:spPr>
-          <a:xfrm>
-            <a:off x="7711336" y="2103120"/>
-            <a:ext cx="1097280" cy="548640"/>
-          </a:xfrm>
-          <a:prstGeom prst="rect">
-            <a:avLst/>
-          </a:prstGeom>
-          <a:noFill/>
-        </p:spPr>
-        <p:txBody>
-          <a:bodyPr wrap="square" anchor="t" lIns="0" rIns="0" tIns="0" bIns="0">
-            <a:spAutoFit/>
-          </a:bodyPr>
-          <a:lstStyle/>
-          <a:p>
-            <a:pPr algn="l">
-              <a:lnSpc>
-                <a:spcPct val="100000"/>
-              </a:lnSpc>
-            </a:pPr>
-            <a:r>
-              <a:rPr sz="3000" b="1">
-                <a:solidFill>
-                  <a:srgbClr val="1A1A1A"/>
-                </a:solidFill>
-                <a:latin typeface="Space Grotesk"/>
-              </a:rPr>
-              <a:t>Aa</a:t>
-            </a:r>
-          </a:p>
-        </p:txBody>
-      </p:sp>
-      <p:sp>
-        <p:nvSpPr>
-          <p:cNvPr id="13" name="TextBox 12"/>
-          <p:cNvSpPr txBox="1"/>
-          <p:nvPr/>
-        </p:nvSpPr>
-        <p:spPr>
-          <a:xfrm>
-            <a:off x="7711336" y="2743200"/>
-            <a:ext cx="1097280" cy="274320"/>
-          </a:xfrm>
-          <a:prstGeom prst="rect">
-            <a:avLst/>
-          </a:prstGeom>
-          <a:noFill/>
-        </p:spPr>
-        <p:txBody>
-          <a:bodyPr wrap="square" anchor="t" lIns="0" rIns="0" tIns="0" bIns="0">
-            <a:spAutoFit/>
-          </a:bodyPr>
-          <a:lstStyle/>
-          <a:p>
-            <a:pPr algn="l">
-              <a:lnSpc>
-                <a:spcPct val="100000"/>
-              </a:lnSpc>
-            </a:pPr>
-            <a:r>
-              <a:rPr sz="1050" b="0">
-                <a:solidFill>
-                  <a:srgbClr val="5A5A5A"/>
-                </a:solidFill>
-                <a:latin typeface="Schibsted Grotesk"/>
-              </a:rPr>
-              <a:t>Bold</a:t>
+              <a:t>“A choice-filled life is the standard.”</a:t>
             </a:r>
           </a:p>
         </p:txBody>
       </p:sp>
       <p:cxnSp>
         <p:nvCxnSpPr>
-          <p:cNvPr id="14" name="Connector 13"/>
+          <p:cNvPr id="9" name="Connector 8"/>
           <p:cNvCxnSpPr/>
           <p:nvPr/>
         </p:nvCxnSpPr>
         <p:spPr>
           <a:xfrm>
-            <a:off x="5151016" y="3246120"/>
-            <a:ext cx="6035040" cy="0"/>
+            <a:off x="4968136" y="2057400"/>
+            <a:ext cx="6583680" cy="0"/>
           </a:xfrm>
           <a:prstGeom prst="line">
             <a:avLst/>
@@ -3860,14 +4168,14 @@
       </p:cxnSp>
       <p:sp>
         <p:nvSpPr>
-          <p:cNvPr id="15" name="TextBox 14"/>
+          <p:cNvPr id="10" name="TextBox 9"/>
           <p:cNvSpPr txBox="1"/>
           <p:nvPr/>
         </p:nvSpPr>
         <p:spPr>
           <a:xfrm>
-            <a:off x="5151016" y="3429000"/>
-            <a:ext cx="4572000" cy="457200"/>
+            <a:off x="4968136" y="2221992"/>
+            <a:ext cx="1554480" cy="365760"/>
           </a:xfrm>
           <a:prstGeom prst="rect">
             <a:avLst/>
@@ -3886,27 +4194,27 @@
               </a:lnSpc>
             </a:pPr>
             <a:r>
-              <a:rPr sz="2400" b="1">
+              <a:rPr sz="1350" b="1">
                 <a:solidFill>
                   <a:srgbClr val="1A1A1A"/>
                 </a:solidFill>
-                <a:latin typeface="Schibsted Grotesk"/>
-              </a:rPr>
-              <a:t>Schibsted Grotesk</a:t>
-            </a:r>
-          </a:p>
-        </p:txBody>
-      </p:sp>
-      <p:sp>
-        <p:nvSpPr>
-          <p:cNvPr id="16" name="TextBox 15"/>
+                <a:latin typeface="Space Grotesk"/>
+              </a:rPr>
+              <a:t>Trustworthy</a:t>
+            </a:r>
+          </a:p>
+        </p:txBody>
+      </p:sp>
+      <p:sp>
+        <p:nvSpPr>
+          <p:cNvPr id="11" name="TextBox 10"/>
           <p:cNvSpPr txBox="1"/>
           <p:nvPr/>
         </p:nvSpPr>
         <p:spPr>
           <a:xfrm>
-            <a:off x="5151016" y="3977639"/>
-            <a:ext cx="1097280" cy="548640"/>
+            <a:off x="6659776" y="2221992"/>
+            <a:ext cx="4892040" cy="365760"/>
           </a:xfrm>
           <a:prstGeom prst="rect">
             <a:avLst/>
@@ -3925,27 +4233,62 @@
               </a:lnSpc>
             </a:pPr>
             <a:r>
-              <a:rPr sz="3000" b="0">
-                <a:solidFill>
-                  <a:srgbClr val="1A1A1A"/>
+              <a:rPr sz="1250" b="0">
+                <a:solidFill>
+                  <a:srgbClr val="5A5A5A"/>
                 </a:solidFill>
                 <a:latin typeface="Schibsted Grotesk"/>
               </a:rPr>
-              <a:t>Aa</a:t>
-            </a:r>
-          </a:p>
-        </p:txBody>
-      </p:sp>
-      <p:sp>
-        <p:nvSpPr>
-          <p:cNvPr id="17" name="TextBox 16"/>
+              <a:t>“500 students, 17 partners, by 2028–29.”</a:t>
+            </a:r>
+          </a:p>
+        </p:txBody>
+      </p:sp>
+      <p:cxnSp>
+        <p:nvCxnSpPr>
+          <p:cNvPr id="12" name="Connector 11"/>
+          <p:cNvCxnSpPr/>
+          <p:nvPr/>
+        </p:nvCxnSpPr>
+        <p:spPr>
+          <a:xfrm>
+            <a:off x="4968136" y="2679192"/>
+            <a:ext cx="6583680" cy="0"/>
+          </a:xfrm>
+          <a:prstGeom prst="line">
+            <a:avLst/>
+          </a:prstGeom>
+          <a:ln w="12700">
+            <a:solidFill>
+              <a:srgbClr val="E4E4E4"/>
+            </a:solidFill>
+          </a:ln>
+        </p:spPr>
+        <p:style>
+          <a:lnRef idx="2">
+            <a:schemeClr val="accent1"/>
+          </a:lnRef>
+          <a:fillRef idx="0">
+            <a:schemeClr val="accent1"/>
+          </a:fillRef>
+          <a:effectRef idx="1">
+            <a:schemeClr val="accent1"/>
+          </a:effectRef>
+          <a:fontRef idx="minor">
+            <a:schemeClr val="tx1"/>
+          </a:fontRef>
+        </p:style>
+      </p:cxnSp>
+      <p:sp>
+        <p:nvSpPr>
+          <p:cNvPr id="13" name="TextBox 12"/>
           <p:cNvSpPr txBox="1"/>
           <p:nvPr/>
         </p:nvSpPr>
         <p:spPr>
           <a:xfrm>
-            <a:off x="5151016" y="4617720"/>
-            <a:ext cx="1097280" cy="274320"/>
+            <a:off x="4968136" y="2843784"/>
+            <a:ext cx="1554480" cy="365760"/>
           </a:xfrm>
           <a:prstGeom prst="rect">
             <a:avLst/>
@@ -3964,27 +4307,27 @@
               </a:lnSpc>
             </a:pPr>
             <a:r>
-              <a:rPr sz="1050" b="0">
-                <a:solidFill>
-                  <a:srgbClr val="5A5A5A"/>
-                </a:solidFill>
-                <a:latin typeface="Schibsted Grotesk"/>
-              </a:rPr>
-              <a:t>Regular</a:t>
-            </a:r>
-          </a:p>
-        </p:txBody>
-      </p:sp>
-      <p:sp>
-        <p:nvSpPr>
-          <p:cNvPr id="18" name="TextBox 17"/>
+              <a:rPr sz="1350" b="1">
+                <a:solidFill>
+                  <a:srgbClr val="1A1A1A"/>
+                </a:solidFill>
+                <a:latin typeface="Space Grotesk"/>
+              </a:rPr>
+              <a:t>Civic</a:t>
+            </a:r>
+          </a:p>
+        </p:txBody>
+      </p:sp>
+      <p:sp>
+        <p:nvSpPr>
+          <p:cNvPr id="14" name="TextBox 13"/>
           <p:cNvSpPr txBox="1"/>
           <p:nvPr/>
         </p:nvSpPr>
         <p:spPr>
           <a:xfrm>
-            <a:off x="6431176" y="3977639"/>
-            <a:ext cx="1097280" cy="548640"/>
+            <a:off x="6659776" y="2843784"/>
+            <a:ext cx="4892040" cy="365760"/>
           </a:xfrm>
           <a:prstGeom prst="rect">
             <a:avLst/>
@@ -4003,27 +4346,62 @@
               </a:lnSpc>
             </a:pPr>
             <a:r>
-              <a:rPr sz="3000" b="1">
-                <a:solidFill>
-                  <a:srgbClr val="1A1A1A"/>
+              <a:rPr sz="1250" b="0">
+                <a:solidFill>
+                  <a:srgbClr val="5A5A5A"/>
                 </a:solidFill>
                 <a:latin typeface="Schibsted Grotesk"/>
               </a:rPr>
-              <a:t>Aa</a:t>
-            </a:r>
-          </a:p>
-        </p:txBody>
-      </p:sp>
-      <p:sp>
-        <p:nvSpPr>
-          <p:cNvPr id="19" name="TextBox 18"/>
+              <a:t>“Right here in Richmond, Virginia.”</a:t>
+            </a:r>
+          </a:p>
+        </p:txBody>
+      </p:sp>
+      <p:cxnSp>
+        <p:nvCxnSpPr>
+          <p:cNvPr id="15" name="Connector 14"/>
+          <p:cNvCxnSpPr/>
+          <p:nvPr/>
+        </p:nvCxnSpPr>
+        <p:spPr>
+          <a:xfrm>
+            <a:off x="4968136" y="3300984"/>
+            <a:ext cx="6583680" cy="0"/>
+          </a:xfrm>
+          <a:prstGeom prst="line">
+            <a:avLst/>
+          </a:prstGeom>
+          <a:ln w="12700">
+            <a:solidFill>
+              <a:srgbClr val="E4E4E4"/>
+            </a:solidFill>
+          </a:ln>
+        </p:spPr>
+        <p:style>
+          <a:lnRef idx="2">
+            <a:schemeClr val="accent1"/>
+          </a:lnRef>
+          <a:fillRef idx="0">
+            <a:schemeClr val="accent1"/>
+          </a:fillRef>
+          <a:effectRef idx="1">
+            <a:schemeClr val="accent1"/>
+          </a:effectRef>
+          <a:fontRef idx="minor">
+            <a:schemeClr val="tx1"/>
+          </a:fontRef>
+        </p:style>
+      </p:cxnSp>
+      <p:sp>
+        <p:nvSpPr>
+          <p:cNvPr id="16" name="TextBox 15"/>
           <p:cNvSpPr txBox="1"/>
           <p:nvPr/>
         </p:nvSpPr>
         <p:spPr>
           <a:xfrm>
-            <a:off x="6431176" y="4617720"/>
-            <a:ext cx="1097280" cy="274320"/>
+            <a:off x="4968136" y="3465576"/>
+            <a:ext cx="1554480" cy="365760"/>
           </a:xfrm>
           <a:prstGeom prst="rect">
             <a:avLst/>
@@ -4042,17 +4420,317 @@
               </a:lnSpc>
             </a:pPr>
             <a:r>
-              <a:rPr sz="1050" b="0">
+              <a:rPr sz="1350" b="1">
+                <a:solidFill>
+                  <a:srgbClr val="1A1A1A"/>
+                </a:solidFill>
+                <a:latin typeface="Space Grotesk"/>
+              </a:rPr>
+              <a:t>Warm</a:t>
+            </a:r>
+          </a:p>
+        </p:txBody>
+      </p:sp>
+      <p:sp>
+        <p:nvSpPr>
+          <p:cNvPr id="17" name="TextBox 16"/>
+          <p:cNvSpPr txBox="1"/>
+          <p:nvPr/>
+        </p:nvSpPr>
+        <p:spPr>
+          <a:xfrm>
+            <a:off x="6659776" y="3465576"/>
+            <a:ext cx="4892040" cy="365760"/>
+          </a:xfrm>
+          <a:prstGeom prst="rect">
+            <a:avLst/>
+          </a:prstGeom>
+          <a:noFill/>
+        </p:spPr>
+        <p:txBody>
+          <a:bodyPr wrap="square" anchor="t" lIns="0" rIns="0" tIns="0" bIns="0">
+            <a:spAutoFit/>
+          </a:bodyPr>
+          <a:lstStyle/>
+          <a:p>
+            <a:pPr algn="l">
+              <a:lnSpc>
+                <a:spcPct val="100000"/>
+              </a:lnSpc>
+            </a:pPr>
+            <a:r>
+              <a:rPr sz="1250" b="0">
                 <a:solidFill>
                   <a:srgbClr val="5A5A5A"/>
                 </a:solidFill>
                 <a:latin typeface="Schibsted Grotesk"/>
               </a:rPr>
-              <a:t>Bold</a:t>
-            </a:r>
-          </a:p>
-        </p:txBody>
-      </p:sp>
+              <a:t>“A student earning a paycheck and a future.”</a:t>
+            </a:r>
+          </a:p>
+        </p:txBody>
+      </p:sp>
+      <p:cxnSp>
+        <p:nvCxnSpPr>
+          <p:cNvPr id="18" name="Connector 17"/>
+          <p:cNvCxnSpPr/>
+          <p:nvPr/>
+        </p:nvCxnSpPr>
+        <p:spPr>
+          <a:xfrm>
+            <a:off x="4968136" y="3922776"/>
+            <a:ext cx="6583680" cy="0"/>
+          </a:xfrm>
+          <a:prstGeom prst="line">
+            <a:avLst/>
+          </a:prstGeom>
+          <a:ln w="12700">
+            <a:solidFill>
+              <a:srgbClr val="E4E4E4"/>
+            </a:solidFill>
+          </a:ln>
+        </p:spPr>
+        <p:style>
+          <a:lnRef idx="2">
+            <a:schemeClr val="accent1"/>
+          </a:lnRef>
+          <a:fillRef idx="0">
+            <a:schemeClr val="accent1"/>
+          </a:fillRef>
+          <a:effectRef idx="1">
+            <a:schemeClr val="accent1"/>
+          </a:effectRef>
+          <a:fontRef idx="minor">
+            <a:schemeClr val="tx1"/>
+          </a:fontRef>
+        </p:style>
+      </p:cxnSp>
+      <p:sp>
+        <p:nvSpPr>
+          <p:cNvPr id="19" name="TextBox 18"/>
+          <p:cNvSpPr txBox="1"/>
+          <p:nvPr/>
+        </p:nvSpPr>
+        <p:spPr>
+          <a:xfrm>
+            <a:off x="4968136" y="4087368"/>
+            <a:ext cx="1554480" cy="365760"/>
+          </a:xfrm>
+          <a:prstGeom prst="rect">
+            <a:avLst/>
+          </a:prstGeom>
+          <a:noFill/>
+        </p:spPr>
+        <p:txBody>
+          <a:bodyPr wrap="square" anchor="t" lIns="0" rIns="0" tIns="0" bIns="0">
+            <a:spAutoFit/>
+          </a:bodyPr>
+          <a:lstStyle/>
+          <a:p>
+            <a:pPr algn="l">
+              <a:lnSpc>
+                <a:spcPct val="100000"/>
+              </a:lnSpc>
+            </a:pPr>
+            <a:r>
+              <a:rPr sz="1350" b="1">
+                <a:solidFill>
+                  <a:srgbClr val="1A1A1A"/>
+                </a:solidFill>
+                <a:latin typeface="Space Grotesk"/>
+              </a:rPr>
+              <a:t>Data-informed</a:t>
+            </a:r>
+          </a:p>
+        </p:txBody>
+      </p:sp>
+      <p:sp>
+        <p:nvSpPr>
+          <p:cNvPr id="20" name="TextBox 19"/>
+          <p:cNvSpPr txBox="1"/>
+          <p:nvPr/>
+        </p:nvSpPr>
+        <p:spPr>
+          <a:xfrm>
+            <a:off x="6659776" y="4087368"/>
+            <a:ext cx="4892040" cy="365760"/>
+          </a:xfrm>
+          <a:prstGeom prst="rect">
+            <a:avLst/>
+          </a:prstGeom>
+          <a:noFill/>
+        </p:spPr>
+        <p:txBody>
+          <a:bodyPr wrap="square" anchor="t" lIns="0" rIns="0" tIns="0" bIns="0">
+            <a:spAutoFit/>
+          </a:bodyPr>
+          <a:lstStyle/>
+          <a:p>
+            <a:pPr algn="l">
+              <a:lnSpc>
+                <a:spcPct val="100000"/>
+              </a:lnSpc>
+            </a:pPr>
+            <a:r>
+              <a:rPr sz="1250" b="0">
+                <a:solidFill>
+                  <a:srgbClr val="5A5A5A"/>
+                </a:solidFill>
+                <a:latin typeface="Schibsted Grotesk"/>
+              </a:rPr>
+              <a:t>“$23/hour minimum after graduation.”</a:t>
+            </a:r>
+          </a:p>
+        </p:txBody>
+      </p:sp>
+      <p:cxnSp>
+        <p:nvCxnSpPr>
+          <p:cNvPr id="21" name="Connector 20"/>
+          <p:cNvCxnSpPr/>
+          <p:nvPr/>
+        </p:nvCxnSpPr>
+        <p:spPr>
+          <a:xfrm>
+            <a:off x="4968136" y="4544568"/>
+            <a:ext cx="6583680" cy="0"/>
+          </a:xfrm>
+          <a:prstGeom prst="line">
+            <a:avLst/>
+          </a:prstGeom>
+          <a:ln w="12700">
+            <a:solidFill>
+              <a:srgbClr val="E4E4E4"/>
+            </a:solidFill>
+          </a:ln>
+        </p:spPr>
+        <p:style>
+          <a:lnRef idx="2">
+            <a:schemeClr val="accent1"/>
+          </a:lnRef>
+          <a:fillRef idx="0">
+            <a:schemeClr val="accent1"/>
+          </a:fillRef>
+          <a:effectRef idx="1">
+            <a:schemeClr val="accent1"/>
+          </a:effectRef>
+          <a:fontRef idx="minor">
+            <a:schemeClr val="tx1"/>
+          </a:fontRef>
+        </p:style>
+      </p:cxnSp>
+      <p:sp>
+        <p:nvSpPr>
+          <p:cNvPr id="22" name="TextBox 21"/>
+          <p:cNvSpPr txBox="1"/>
+          <p:nvPr/>
+        </p:nvSpPr>
+        <p:spPr>
+          <a:xfrm>
+            <a:off x="4968136" y="4709160"/>
+            <a:ext cx="1554480" cy="365760"/>
+          </a:xfrm>
+          <a:prstGeom prst="rect">
+            <a:avLst/>
+          </a:prstGeom>
+          <a:noFill/>
+        </p:spPr>
+        <p:txBody>
+          <a:bodyPr wrap="square" anchor="t" lIns="0" rIns="0" tIns="0" bIns="0">
+            <a:spAutoFit/>
+          </a:bodyPr>
+          <a:lstStyle/>
+          <a:p>
+            <a:pPr algn="l">
+              <a:lnSpc>
+                <a:spcPct val="100000"/>
+              </a:lnSpc>
+            </a:pPr>
+            <a:r>
+              <a:rPr sz="1350" b="1">
+                <a:solidFill>
+                  <a:srgbClr val="1A1A1A"/>
+                </a:solidFill>
+                <a:latin typeface="Space Grotesk"/>
+              </a:rPr>
+              <a:t>Editorial</a:t>
+            </a:r>
+          </a:p>
+        </p:txBody>
+      </p:sp>
+      <p:sp>
+        <p:nvSpPr>
+          <p:cNvPr id="23" name="TextBox 22"/>
+          <p:cNvSpPr txBox="1"/>
+          <p:nvPr/>
+        </p:nvSpPr>
+        <p:spPr>
+          <a:xfrm>
+            <a:off x="6659776" y="4709160"/>
+            <a:ext cx="4892040" cy="365760"/>
+          </a:xfrm>
+          <a:prstGeom prst="rect">
+            <a:avLst/>
+          </a:prstGeom>
+          <a:noFill/>
+        </p:spPr>
+        <p:txBody>
+          <a:bodyPr wrap="square" anchor="t" lIns="0" rIns="0" tIns="0" bIns="0">
+            <a:spAutoFit/>
+          </a:bodyPr>
+          <a:lstStyle/>
+          <a:p>
+            <a:pPr algn="l">
+              <a:lnSpc>
+                <a:spcPct val="100000"/>
+              </a:lnSpc>
+            </a:pPr>
+            <a:r>
+              <a:rPr sz="1250" b="0">
+                <a:solidFill>
+                  <a:srgbClr val="5A5A5A"/>
+                </a:solidFill>
+                <a:latin typeface="Schibsted Grotesk"/>
+              </a:rPr>
+              <a:t>Full sentences, active voice, real quotes.</a:t>
+            </a:r>
+          </a:p>
+        </p:txBody>
+      </p:sp>
+      <p:cxnSp>
+        <p:nvCxnSpPr>
+          <p:cNvPr id="24" name="Connector 23"/>
+          <p:cNvCxnSpPr/>
+          <p:nvPr/>
+        </p:nvCxnSpPr>
+        <p:spPr>
+          <a:xfrm>
+            <a:off x="4968136" y="5166360"/>
+            <a:ext cx="6583680" cy="0"/>
+          </a:xfrm>
+          <a:prstGeom prst="line">
+            <a:avLst/>
+          </a:prstGeom>
+          <a:ln w="12700">
+            <a:solidFill>
+              <a:srgbClr val="E4E4E4"/>
+            </a:solidFill>
+          </a:ln>
+        </p:spPr>
+        <p:style>
+          <a:lnRef idx="2">
+            <a:schemeClr val="accent1"/>
+          </a:lnRef>
+          <a:fillRef idx="0">
+            <a:schemeClr val="accent1"/>
+          </a:fillRef>
+          <a:effectRef idx="1">
+            <a:schemeClr val="accent1"/>
+          </a:effectRef>
+          <a:fontRef idx="minor">
+            <a:schemeClr val="tx1"/>
+          </a:fontRef>
+        </p:style>
+      </p:cxnSp>
     </p:spTree>
   </p:cSld>
   <p:clrMapOvr>
@@ -4193,7 +4871,7 @@
                 </a:solidFill>
                 <a:latin typeface="Space Grotesk"/>
               </a:rPr>
-              <a:t>05</a:t>
+              <a:t>06</a:t>
             </a:r>
           </a:p>
         </p:txBody>
@@ -4232,7 +4910,7 @@
                 </a:solidFill>
                 <a:latin typeface="Space Grotesk"/>
               </a:rPr>
-              <a:t>Tone &amp;</a:t>
+              <a:t>Voices &amp;</a:t>
             </a:r>
           </a:p>
           <a:p>
@@ -4248,7 +4926,7 @@
                 </a:solidFill>
                 <a:latin typeface="Space Grotesk"/>
               </a:rPr>
-              <a:t>Voice</a:t>
+              <a:t>Leadership</a:t>
             </a:r>
           </a:p>
         </p:txBody>
@@ -4287,21 +4965,46 @@
                 </a:solidFill>
                 <a:latin typeface="Schibsted Grotesk"/>
               </a:rPr>
-              <a:t>Hopeful, trustworthy, civic, warm, data-informed, editorial.</a:t>
-            </a:r>
-          </a:p>
-        </p:txBody>
-      </p:sp>
-      <p:sp>
-        <p:nvSpPr>
-          <p:cNvPr id="7" name="TextBox 6"/>
+              <a:t>Approved leadership quotes, paired with headshots for editorial and press use.</a:t>
+            </a:r>
+          </a:p>
+        </p:txBody>
+      </p:sp>
+      <p:pic>
+        <p:nvPicPr>
+          <p:cNvPr id="7" name="Picture 6" descr="jason-kamras.jpg"/>
+          <p:cNvPicPr>
+            <a:picLocks noChangeAspect="1"/>
+          </p:cNvPicPr>
+          <p:nvPr/>
+        </p:nvPicPr>
+        <p:blipFill>
+          <a:blip r:embed="rId2"/>
+          <a:srcRect/>
+          <a:stretch>
+            <a:fillRect/>
+          </a:stretch>
+        </p:blipFill>
+        <p:spPr>
+          <a:xfrm>
+            <a:off x="4785256" y="1417320"/>
+            <a:ext cx="384048" cy="384048"/>
+          </a:xfrm>
+          <a:prstGeom prst="rect">
+            <a:avLst/>
+          </a:prstGeom>
+        </p:spPr>
+      </p:pic>
+      <p:sp>
+        <p:nvSpPr>
+          <p:cNvPr id="8" name="TextBox 7"/>
           <p:cNvSpPr txBox="1"/>
           <p:nvPr/>
         </p:nvSpPr>
         <p:spPr>
           <a:xfrm>
-            <a:off x="4968136" y="1600200"/>
-            <a:ext cx="1554480" cy="365760"/>
+            <a:off x="5352184" y="1371600"/>
+            <a:ext cx="6748272" cy="914400"/>
           </a:xfrm>
           <a:prstGeom prst="rect">
             <a:avLst/>
@@ -4316,31 +5019,31 @@
           <a:p>
             <a:pPr algn="l">
               <a:lnSpc>
-                <a:spcPct val="100000"/>
-              </a:lnSpc>
-            </a:pPr>
-            <a:r>
-              <a:rPr sz="1350" b="1">
+                <a:spcPct val="130000"/>
+              </a:lnSpc>
+            </a:pPr>
+            <a:r>
+              <a:rPr sz="1200" b="0">
                 <a:solidFill>
                   <a:srgbClr val="1A1A1A"/>
                 </a:solidFill>
-                <a:latin typeface="Space Grotesk"/>
-              </a:rPr>
-              <a:t>Hopeful</a:t>
-            </a:r>
-          </a:p>
-        </p:txBody>
-      </p:sp>
-      <p:sp>
-        <p:nvSpPr>
-          <p:cNvPr id="8" name="TextBox 7"/>
+                <a:latin typeface="Schibsted Grotesk"/>
+              </a:rPr>
+              <a:t>Our students deserve to graduate with real options. A choice-filled life is not a slogan; it's a standard we hold ourselves to.</a:t>
+            </a:r>
+          </a:p>
+        </p:txBody>
+      </p:sp>
+      <p:sp>
+        <p:nvSpPr>
+          <p:cNvPr id="9" name="TextBox 8"/>
           <p:cNvSpPr txBox="1"/>
           <p:nvPr/>
         </p:nvSpPr>
         <p:spPr>
           <a:xfrm>
-            <a:off x="6659776" y="1600200"/>
-            <a:ext cx="4892040" cy="365760"/>
+            <a:off x="5352184" y="2075688"/>
+            <a:ext cx="6748272" cy="274320"/>
           </a:xfrm>
           <a:prstGeom prst="rect">
             <a:avLst/>
@@ -4359,27 +5062,27 @@
               </a:lnSpc>
             </a:pPr>
             <a:r>
-              <a:rPr sz="1250" b="0">
+              <a:rPr sz="1050" b="1">
                 <a:solidFill>
                   <a:srgbClr val="5A5A5A"/>
                 </a:solidFill>
-                <a:latin typeface="Schibsted Grotesk"/>
-              </a:rPr>
-              <a:t>“A choice-filled life is the standard.”</a:t>
+                <a:latin typeface="Space Grotesk"/>
+              </a:rPr>
+              <a:t>Jason Kamras — Superintendent, Richmond Public Schools</a:t>
             </a:r>
           </a:p>
         </p:txBody>
       </p:sp>
       <p:cxnSp>
         <p:nvCxnSpPr>
-          <p:cNvPr id="9" name="Connector 8"/>
+          <p:cNvPr id="10" name="Connector 9"/>
           <p:cNvCxnSpPr/>
           <p:nvPr/>
         </p:nvCxnSpPr>
         <p:spPr>
           <a:xfrm>
-            <a:off x="4968136" y="2057400"/>
-            <a:ext cx="6583680" cy="0"/>
+            <a:off x="4785256" y="2468880"/>
+            <a:ext cx="7315200" cy="0"/>
           </a:xfrm>
           <a:prstGeom prst="line">
             <a:avLst/>
@@ -4405,16 +5108,41 @@
           </a:fontRef>
         </p:style>
       </p:cxnSp>
-      <p:sp>
-        <p:nvSpPr>
-          <p:cNvPr id="10" name="TextBox 9"/>
+      <p:pic>
+        <p:nvPicPr>
+          <p:cNvPr id="11" name="Picture 10" descr="danny-avula.jpg"/>
+          <p:cNvPicPr>
+            <a:picLocks noChangeAspect="1"/>
+          </p:cNvPicPr>
+          <p:nvPr/>
+        </p:nvPicPr>
+        <p:blipFill>
+          <a:blip r:embed="rId3"/>
+          <a:srcRect/>
+          <a:stretch>
+            <a:fillRect/>
+          </a:stretch>
+        </p:blipFill>
+        <p:spPr>
+          <a:xfrm>
+            <a:off x="4785256" y="2651760"/>
+            <a:ext cx="384048" cy="384048"/>
+          </a:xfrm>
+          <a:prstGeom prst="rect">
+            <a:avLst/>
+          </a:prstGeom>
+        </p:spPr>
+      </p:pic>
+      <p:sp>
+        <p:nvSpPr>
+          <p:cNvPr id="12" name="TextBox 11"/>
           <p:cNvSpPr txBox="1"/>
           <p:nvPr/>
         </p:nvSpPr>
         <p:spPr>
           <a:xfrm>
-            <a:off x="4968136" y="2221992"/>
-            <a:ext cx="1554480" cy="365760"/>
+            <a:off x="5352184" y="2606040"/>
+            <a:ext cx="6748272" cy="914400"/>
           </a:xfrm>
           <a:prstGeom prst="rect">
             <a:avLst/>
@@ -4429,31 +5157,31 @@
           <a:p>
             <a:pPr algn="l">
               <a:lnSpc>
-                <a:spcPct val="100000"/>
-              </a:lnSpc>
-            </a:pPr>
-            <a:r>
-              <a:rPr sz="1350" b="1">
+                <a:spcPct val="130000"/>
+              </a:lnSpc>
+            </a:pPr>
+            <a:r>
+              <a:rPr sz="1200" b="0">
                 <a:solidFill>
                   <a:srgbClr val="1A1A1A"/>
                 </a:solidFill>
-                <a:latin typeface="Space Grotesk"/>
-              </a:rPr>
-              <a:t>Trustworthy</a:t>
-            </a:r>
-          </a:p>
-        </p:txBody>
-      </p:sp>
-      <p:sp>
-        <p:nvSpPr>
-          <p:cNvPr id="11" name="TextBox 10"/>
+                <a:latin typeface="Schibsted Grotesk"/>
+              </a:rPr>
+              <a:t>By building direct pipelines from the classroom to local employers, we ensure young people have a clear path to stable careers.</a:t>
+            </a:r>
+          </a:p>
+        </p:txBody>
+      </p:sp>
+      <p:sp>
+        <p:nvSpPr>
+          <p:cNvPr id="13" name="TextBox 12"/>
           <p:cNvSpPr txBox="1"/>
           <p:nvPr/>
         </p:nvSpPr>
         <p:spPr>
           <a:xfrm>
-            <a:off x="6659776" y="2221992"/>
-            <a:ext cx="4892040" cy="365760"/>
+            <a:off x="5352184" y="3310128"/>
+            <a:ext cx="6748272" cy="274320"/>
           </a:xfrm>
           <a:prstGeom prst="rect">
             <a:avLst/>
@@ -4472,27 +5200,27 @@
               </a:lnSpc>
             </a:pPr>
             <a:r>
-              <a:rPr sz="1250" b="0">
+              <a:rPr sz="1050" b="1">
                 <a:solidFill>
                   <a:srgbClr val="5A5A5A"/>
                 </a:solidFill>
-                <a:latin typeface="Schibsted Grotesk"/>
-              </a:rPr>
-              <a:t>“500 students, 17 partners, by 2028–29.”</a:t>
+                <a:latin typeface="Space Grotesk"/>
+              </a:rPr>
+              <a:t>Danny Avula — Mayor of Richmond</a:t>
             </a:r>
           </a:p>
         </p:txBody>
       </p:sp>
       <p:cxnSp>
         <p:nvCxnSpPr>
-          <p:cNvPr id="12" name="Connector 11"/>
+          <p:cNvPr id="14" name="Connector 13"/>
           <p:cNvCxnSpPr/>
           <p:nvPr/>
         </p:nvCxnSpPr>
         <p:spPr>
           <a:xfrm>
-            <a:off x="4968136" y="2679192"/>
-            <a:ext cx="6583680" cy="0"/>
+            <a:off x="4785256" y="3703320"/>
+            <a:ext cx="7315200" cy="0"/>
           </a:xfrm>
           <a:prstGeom prst="line">
             <a:avLst/>
@@ -4518,16 +5246,41 @@
           </a:fontRef>
         </p:style>
       </p:cxnSp>
-      <p:sp>
-        <p:nvSpPr>
-          <p:cNvPr id="13" name="TextBox 12"/>
+      <p:pic>
+        <p:nvPicPr>
+          <p:cNvPr id="15" name="Picture 14" descr="taikein-cooper.jpg"/>
+          <p:cNvPicPr>
+            <a:picLocks noChangeAspect="1"/>
+          </p:cNvPicPr>
+          <p:nvPr/>
+        </p:nvPicPr>
+        <p:blipFill>
+          <a:blip r:embed="rId4"/>
+          <a:srcRect/>
+          <a:stretch>
+            <a:fillRect/>
+          </a:stretch>
+        </p:blipFill>
+        <p:spPr>
+          <a:xfrm>
+            <a:off x="4785256" y="3886200"/>
+            <a:ext cx="384048" cy="384048"/>
+          </a:xfrm>
+          <a:prstGeom prst="rect">
+            <a:avLst/>
+          </a:prstGeom>
+        </p:spPr>
+      </p:pic>
+      <p:sp>
+        <p:nvSpPr>
+          <p:cNvPr id="16" name="TextBox 15"/>
           <p:cNvSpPr txBox="1"/>
           <p:nvPr/>
         </p:nvSpPr>
         <p:spPr>
           <a:xfrm>
-            <a:off x="4968136" y="2843784"/>
-            <a:ext cx="1554480" cy="365760"/>
+            <a:off x="5352184" y="3840480"/>
+            <a:ext cx="6748272" cy="914400"/>
           </a:xfrm>
           <a:prstGeom prst="rect">
             <a:avLst/>
@@ -4542,31 +5295,31 @@
           <a:p>
             <a:pPr algn="l">
               <a:lnSpc>
-                <a:spcPct val="100000"/>
-              </a:lnSpc>
-            </a:pPr>
-            <a:r>
-              <a:rPr sz="1350" b="1">
+                <a:spcPct val="130000"/>
+              </a:lnSpc>
+            </a:pPr>
+            <a:r>
+              <a:rPr sz="1200" b="0">
                 <a:solidFill>
                   <a:srgbClr val="1A1A1A"/>
                 </a:solidFill>
-                <a:latin typeface="Space Grotesk"/>
-              </a:rPr>
-              <a:t>Civic</a:t>
-            </a:r>
-          </a:p>
-        </p:txBody>
-      </p:sp>
-      <p:sp>
-        <p:nvSpPr>
-          <p:cNvPr id="14" name="TextBox 13"/>
+                <a:latin typeface="Schibsted Grotesk"/>
+              </a:rPr>
+              <a:t>Too many of our students leave high school without a real path to a career that can support a family. RVA Builds changes that.</a:t>
+            </a:r>
+          </a:p>
+        </p:txBody>
+      </p:sp>
+      <p:sp>
+        <p:nvSpPr>
+          <p:cNvPr id="17" name="TextBox 16"/>
           <p:cNvSpPr txBox="1"/>
           <p:nvPr/>
         </p:nvSpPr>
         <p:spPr>
           <a:xfrm>
-            <a:off x="6659776" y="2843784"/>
-            <a:ext cx="4892040" cy="365760"/>
+            <a:off x="5352184" y="4544568"/>
+            <a:ext cx="6748272" cy="274320"/>
           </a:xfrm>
           <a:prstGeom prst="rect">
             <a:avLst/>
@@ -4585,126 +5338,13 @@
               </a:lnSpc>
             </a:pPr>
             <a:r>
-              <a:rPr sz="1250" b="0">
+              <a:rPr sz="1050" b="1">
                 <a:solidFill>
                   <a:srgbClr val="5A5A5A"/>
                 </a:solidFill>
-                <a:latin typeface="Schibsted Grotesk"/>
-              </a:rPr>
-              <a:t>“Right here in Richmond, Virginia.”</a:t>
-            </a:r>
-          </a:p>
-        </p:txBody>
-      </p:sp>
-      <p:cxnSp>
-        <p:nvCxnSpPr>
-          <p:cNvPr id="15" name="Connector 14"/>
-          <p:cNvCxnSpPr/>
-          <p:nvPr/>
-        </p:nvCxnSpPr>
-        <p:spPr>
-          <a:xfrm>
-            <a:off x="4968136" y="3300984"/>
-            <a:ext cx="6583680" cy="0"/>
-          </a:xfrm>
-          <a:prstGeom prst="line">
-            <a:avLst/>
-          </a:prstGeom>
-          <a:ln w="12700">
-            <a:solidFill>
-              <a:srgbClr val="E4E4E4"/>
-            </a:solidFill>
-          </a:ln>
-        </p:spPr>
-        <p:style>
-          <a:lnRef idx="2">
-            <a:schemeClr val="accent1"/>
-          </a:lnRef>
-          <a:fillRef idx="0">
-            <a:schemeClr val="accent1"/>
-          </a:fillRef>
-          <a:effectRef idx="1">
-            <a:schemeClr val="accent1"/>
-          </a:effectRef>
-          <a:fontRef idx="minor">
-            <a:schemeClr val="tx1"/>
-          </a:fontRef>
-        </p:style>
-      </p:cxnSp>
-      <p:sp>
-        <p:nvSpPr>
-          <p:cNvPr id="16" name="TextBox 15"/>
-          <p:cNvSpPr txBox="1"/>
-          <p:nvPr/>
-        </p:nvSpPr>
-        <p:spPr>
-          <a:xfrm>
-            <a:off x="4968136" y="3465576"/>
-            <a:ext cx="1554480" cy="365760"/>
-          </a:xfrm>
-          <a:prstGeom prst="rect">
-            <a:avLst/>
-          </a:prstGeom>
-          <a:noFill/>
-        </p:spPr>
-        <p:txBody>
-          <a:bodyPr wrap="square" anchor="t" lIns="0" rIns="0" tIns="0" bIns="0">
-            <a:spAutoFit/>
-          </a:bodyPr>
-          <a:lstStyle/>
-          <a:p>
-            <a:pPr algn="l">
-              <a:lnSpc>
-                <a:spcPct val="100000"/>
-              </a:lnSpc>
-            </a:pPr>
-            <a:r>
-              <a:rPr sz="1350" b="1">
-                <a:solidFill>
-                  <a:srgbClr val="1A1A1A"/>
-                </a:solidFill>
                 <a:latin typeface="Space Grotesk"/>
               </a:rPr>
-              <a:t>Warm</a:t>
-            </a:r>
-          </a:p>
-        </p:txBody>
-      </p:sp>
-      <p:sp>
-        <p:nvSpPr>
-          <p:cNvPr id="17" name="TextBox 16"/>
-          <p:cNvSpPr txBox="1"/>
-          <p:nvPr/>
-        </p:nvSpPr>
-        <p:spPr>
-          <a:xfrm>
-            <a:off x="6659776" y="3465576"/>
-            <a:ext cx="4892040" cy="365760"/>
-          </a:xfrm>
-          <a:prstGeom prst="rect">
-            <a:avLst/>
-          </a:prstGeom>
-          <a:noFill/>
-        </p:spPr>
-        <p:txBody>
-          <a:bodyPr wrap="square" anchor="t" lIns="0" rIns="0" tIns="0" bIns="0">
-            <a:spAutoFit/>
-          </a:bodyPr>
-          <a:lstStyle/>
-          <a:p>
-            <a:pPr algn="l">
-              <a:lnSpc>
-                <a:spcPct val="100000"/>
-              </a:lnSpc>
-            </a:pPr>
-            <a:r>
-              <a:rPr sz="1250" b="0">
-                <a:solidFill>
-                  <a:srgbClr val="5A5A5A"/>
-                </a:solidFill>
-                <a:latin typeface="Schibsted Grotesk"/>
-              </a:rPr>
-              <a:t>“A student earning a paycheck and a future.”</a:t>
+              <a:t>Taikein Cooper — CEO, Richmond Ed Fund</a:t>
             </a:r>
           </a:p>
         </p:txBody>
@@ -4717,234 +5357,8 @@
         </p:nvCxnSpPr>
         <p:spPr>
           <a:xfrm>
-            <a:off x="4968136" y="3922776"/>
-            <a:ext cx="6583680" cy="0"/>
-          </a:xfrm>
-          <a:prstGeom prst="line">
-            <a:avLst/>
-          </a:prstGeom>
-          <a:ln w="12700">
-            <a:solidFill>
-              <a:srgbClr val="E4E4E4"/>
-            </a:solidFill>
-          </a:ln>
-        </p:spPr>
-        <p:style>
-          <a:lnRef idx="2">
-            <a:schemeClr val="accent1"/>
-          </a:lnRef>
-          <a:fillRef idx="0">
-            <a:schemeClr val="accent1"/>
-          </a:fillRef>
-          <a:effectRef idx="1">
-            <a:schemeClr val="accent1"/>
-          </a:effectRef>
-          <a:fontRef idx="minor">
-            <a:schemeClr val="tx1"/>
-          </a:fontRef>
-        </p:style>
-      </p:cxnSp>
-      <p:sp>
-        <p:nvSpPr>
-          <p:cNvPr id="19" name="TextBox 18"/>
-          <p:cNvSpPr txBox="1"/>
-          <p:nvPr/>
-        </p:nvSpPr>
-        <p:spPr>
-          <a:xfrm>
-            <a:off x="4968136" y="4087368"/>
-            <a:ext cx="1554480" cy="365760"/>
-          </a:xfrm>
-          <a:prstGeom prst="rect">
-            <a:avLst/>
-          </a:prstGeom>
-          <a:noFill/>
-        </p:spPr>
-        <p:txBody>
-          <a:bodyPr wrap="square" anchor="t" lIns="0" rIns="0" tIns="0" bIns="0">
-            <a:spAutoFit/>
-          </a:bodyPr>
-          <a:lstStyle/>
-          <a:p>
-            <a:pPr algn="l">
-              <a:lnSpc>
-                <a:spcPct val="100000"/>
-              </a:lnSpc>
-            </a:pPr>
-            <a:r>
-              <a:rPr sz="1350" b="1">
-                <a:solidFill>
-                  <a:srgbClr val="1A1A1A"/>
-                </a:solidFill>
-                <a:latin typeface="Space Grotesk"/>
-              </a:rPr>
-              <a:t>Data-informed</a:t>
-            </a:r>
-          </a:p>
-        </p:txBody>
-      </p:sp>
-      <p:sp>
-        <p:nvSpPr>
-          <p:cNvPr id="20" name="TextBox 19"/>
-          <p:cNvSpPr txBox="1"/>
-          <p:nvPr/>
-        </p:nvSpPr>
-        <p:spPr>
-          <a:xfrm>
-            <a:off x="6659776" y="4087368"/>
-            <a:ext cx="4892040" cy="365760"/>
-          </a:xfrm>
-          <a:prstGeom prst="rect">
-            <a:avLst/>
-          </a:prstGeom>
-          <a:noFill/>
-        </p:spPr>
-        <p:txBody>
-          <a:bodyPr wrap="square" anchor="t" lIns="0" rIns="0" tIns="0" bIns="0">
-            <a:spAutoFit/>
-          </a:bodyPr>
-          <a:lstStyle/>
-          <a:p>
-            <a:pPr algn="l">
-              <a:lnSpc>
-                <a:spcPct val="100000"/>
-              </a:lnSpc>
-            </a:pPr>
-            <a:r>
-              <a:rPr sz="1250" b="0">
-                <a:solidFill>
-                  <a:srgbClr val="5A5A5A"/>
-                </a:solidFill>
-                <a:latin typeface="Schibsted Grotesk"/>
-              </a:rPr>
-              <a:t>“$23/hour minimum after graduation.”</a:t>
-            </a:r>
-          </a:p>
-        </p:txBody>
-      </p:sp>
-      <p:cxnSp>
-        <p:nvCxnSpPr>
-          <p:cNvPr id="21" name="Connector 20"/>
-          <p:cNvCxnSpPr/>
-          <p:nvPr/>
-        </p:nvCxnSpPr>
-        <p:spPr>
-          <a:xfrm>
-            <a:off x="4968136" y="4544568"/>
-            <a:ext cx="6583680" cy="0"/>
-          </a:xfrm>
-          <a:prstGeom prst="line">
-            <a:avLst/>
-          </a:prstGeom>
-          <a:ln w="12700">
-            <a:solidFill>
-              <a:srgbClr val="E4E4E4"/>
-            </a:solidFill>
-          </a:ln>
-        </p:spPr>
-        <p:style>
-          <a:lnRef idx="2">
-            <a:schemeClr val="accent1"/>
-          </a:lnRef>
-          <a:fillRef idx="0">
-            <a:schemeClr val="accent1"/>
-          </a:fillRef>
-          <a:effectRef idx="1">
-            <a:schemeClr val="accent1"/>
-          </a:effectRef>
-          <a:fontRef idx="minor">
-            <a:schemeClr val="tx1"/>
-          </a:fontRef>
-        </p:style>
-      </p:cxnSp>
-      <p:sp>
-        <p:nvSpPr>
-          <p:cNvPr id="22" name="TextBox 21"/>
-          <p:cNvSpPr txBox="1"/>
-          <p:nvPr/>
-        </p:nvSpPr>
-        <p:spPr>
-          <a:xfrm>
-            <a:off x="4968136" y="4709160"/>
-            <a:ext cx="1554480" cy="365760"/>
-          </a:xfrm>
-          <a:prstGeom prst="rect">
-            <a:avLst/>
-          </a:prstGeom>
-          <a:noFill/>
-        </p:spPr>
-        <p:txBody>
-          <a:bodyPr wrap="square" anchor="t" lIns="0" rIns="0" tIns="0" bIns="0">
-            <a:spAutoFit/>
-          </a:bodyPr>
-          <a:lstStyle/>
-          <a:p>
-            <a:pPr algn="l">
-              <a:lnSpc>
-                <a:spcPct val="100000"/>
-              </a:lnSpc>
-            </a:pPr>
-            <a:r>
-              <a:rPr sz="1350" b="1">
-                <a:solidFill>
-                  <a:srgbClr val="1A1A1A"/>
-                </a:solidFill>
-                <a:latin typeface="Space Grotesk"/>
-              </a:rPr>
-              <a:t>Editorial</a:t>
-            </a:r>
-          </a:p>
-        </p:txBody>
-      </p:sp>
-      <p:sp>
-        <p:nvSpPr>
-          <p:cNvPr id="23" name="TextBox 22"/>
-          <p:cNvSpPr txBox="1"/>
-          <p:nvPr/>
-        </p:nvSpPr>
-        <p:spPr>
-          <a:xfrm>
-            <a:off x="6659776" y="4709160"/>
-            <a:ext cx="4892040" cy="365760"/>
-          </a:xfrm>
-          <a:prstGeom prst="rect">
-            <a:avLst/>
-          </a:prstGeom>
-          <a:noFill/>
-        </p:spPr>
-        <p:txBody>
-          <a:bodyPr wrap="square" anchor="t" lIns="0" rIns="0" tIns="0" bIns="0">
-            <a:spAutoFit/>
-          </a:bodyPr>
-          <a:lstStyle/>
-          <a:p>
-            <a:pPr algn="l">
-              <a:lnSpc>
-                <a:spcPct val="100000"/>
-              </a:lnSpc>
-            </a:pPr>
-            <a:r>
-              <a:rPr sz="1250" b="0">
-                <a:solidFill>
-                  <a:srgbClr val="5A5A5A"/>
-                </a:solidFill>
-                <a:latin typeface="Schibsted Grotesk"/>
-              </a:rPr>
-              <a:t>Full sentences, active voice, real quotes.</a:t>
-            </a:r>
-          </a:p>
-        </p:txBody>
-      </p:sp>
-      <p:cxnSp>
-        <p:nvCxnSpPr>
-          <p:cNvPr id="24" name="Connector 23"/>
-          <p:cNvCxnSpPr/>
-          <p:nvPr/>
-        </p:nvCxnSpPr>
-        <p:spPr>
-          <a:xfrm>
-            <a:off x="4968136" y="5166360"/>
-            <a:ext cx="6583680" cy="0"/>
+            <a:off x="4785256" y="4937760"/>
+            <a:ext cx="7315200" cy="0"/>
           </a:xfrm>
           <a:prstGeom prst="line">
             <a:avLst/>
@@ -5110,7 +5524,7 @@
                 </a:solidFill>
                 <a:latin typeface="Space Grotesk"/>
               </a:rPr>
-              <a:t>06</a:t>
+              <a:t>07</a:t>
             </a:r>
           </a:p>
         </p:txBody>
@@ -5149,23 +5563,7 @@
                 </a:solidFill>
                 <a:latin typeface="Space Grotesk"/>
               </a:rPr>
-              <a:t>Voices &amp;</a:t>
-            </a:r>
-          </a:p>
-          <a:p>
-            <a:pPr algn="ctr">
-              <a:lnSpc>
-                <a:spcPct val="105000"/>
-              </a:lnSpc>
-            </a:pPr>
-            <a:r>
-              <a:rPr sz="2600" b="1">
-                <a:solidFill>
-                  <a:srgbClr val="FFFFFF"/>
-                </a:solidFill>
-                <a:latin typeface="Space Grotesk"/>
-              </a:rPr>
-              <a:t>Leadership</a:t>
+              <a:t>Photography</a:t>
             </a:r>
           </a:p>
         </p:txBody>
@@ -5204,660 +5602,39 @@
                 </a:solidFill>
                 <a:latin typeface="Schibsted Grotesk"/>
               </a:rPr>
-              <a:t>Approved leadership quotes, paired with headshots for editorial and press use.</a:t>
-            </a:r>
-          </a:p>
-        </p:txBody>
-      </p:sp>
-      <p:pic>
-        <p:nvPicPr>
-          <p:cNvPr id="7" name="Picture 6" descr="jason-kamras.jpg"/>
-          <p:cNvPicPr>
-            <a:picLocks noChangeAspect="1"/>
-          </p:cNvPicPr>
-          <p:nvPr/>
-        </p:nvPicPr>
-        <p:blipFill>
-          <a:blip r:embed="rId2"/>
-          <a:srcRect/>
-          <a:stretch>
-            <a:fillRect/>
-          </a:stretch>
-        </p:blipFill>
-        <p:spPr>
-          <a:xfrm>
-            <a:off x="4785256" y="1417320"/>
-            <a:ext cx="384048" cy="384048"/>
-          </a:xfrm>
-          <a:prstGeom prst="rect">
-            <a:avLst/>
-          </a:prstGeom>
-        </p:spPr>
-      </p:pic>
-      <p:sp>
-        <p:nvSpPr>
-          <p:cNvPr id="8" name="TextBox 7"/>
-          <p:cNvSpPr txBox="1"/>
-          <p:nvPr/>
-        </p:nvSpPr>
-        <p:spPr>
-          <a:xfrm>
-            <a:off x="5352184" y="1371600"/>
-            <a:ext cx="6748272" cy="914400"/>
-          </a:xfrm>
-          <a:prstGeom prst="rect">
-            <a:avLst/>
-          </a:prstGeom>
-          <a:noFill/>
-        </p:spPr>
-        <p:txBody>
-          <a:bodyPr wrap="square" anchor="t" lIns="0" rIns="0" tIns="0" bIns="0">
-            <a:spAutoFit/>
-          </a:bodyPr>
-          <a:lstStyle/>
-          <a:p>
-            <a:pPr algn="l">
-              <a:lnSpc>
-                <a:spcPct val="130000"/>
-              </a:lnSpc>
-            </a:pPr>
-            <a:r>
-              <a:rPr sz="1200" b="0">
-                <a:solidFill>
-                  <a:srgbClr val="1A1A1A"/>
+              <a:t>Every photo used in RVA Builds materials should show real working people, with genuine range in age, background, and trade.</a:t>
+            </a:r>
+          </a:p>
+          <a:p>
+            <a:pPr algn="ctr">
+              <a:lnSpc>
+                <a:spcPct val="135000"/>
+              </a:lnSpc>
+            </a:pPr>
+            <a:r>
+              <a:rPr sz="1300" b="0">
+                <a:solidFill>
+                  <a:srgbClr val="CCCCCC"/>
                 </a:solidFill>
                 <a:latin typeface="Schibsted Grotesk"/>
               </a:rPr>
-              <a:t>Our students deserve to graduate with real options. A choice-filled life is not a slogan; it's a standard we hold ourselves to.</a:t>
-            </a:r>
-          </a:p>
-        </p:txBody>
-      </p:sp>
-      <p:sp>
-        <p:nvSpPr>
-          <p:cNvPr id="9" name="TextBox 8"/>
-          <p:cNvSpPr txBox="1"/>
-          <p:nvPr/>
-        </p:nvSpPr>
-        <p:spPr>
-          <a:xfrm>
-            <a:off x="5352184" y="2075688"/>
-            <a:ext cx="6748272" cy="274320"/>
-          </a:xfrm>
-          <a:prstGeom prst="rect">
-            <a:avLst/>
-          </a:prstGeom>
-          <a:noFill/>
-        </p:spPr>
-        <p:txBody>
-          <a:bodyPr wrap="square" anchor="t" lIns="0" rIns="0" tIns="0" bIns="0">
-            <a:spAutoFit/>
-          </a:bodyPr>
-          <a:lstStyle/>
-          <a:p>
-            <a:pPr algn="l">
-              <a:lnSpc>
-                <a:spcPct val="100000"/>
-              </a:lnSpc>
-            </a:pPr>
-            <a:r>
-              <a:rPr sz="1050" b="1">
-                <a:solidFill>
-                  <a:srgbClr val="5A5A5A"/>
-                </a:solidFill>
-                <a:latin typeface="Space Grotesk"/>
-              </a:rPr>
-              <a:t>Jason Kamras — Superintendent, Richmond Public Schools</a:t>
-            </a:r>
-          </a:p>
-        </p:txBody>
-      </p:sp>
-      <p:cxnSp>
-        <p:nvCxnSpPr>
-          <p:cNvPr id="10" name="Connector 9"/>
-          <p:cNvCxnSpPr/>
-          <p:nvPr/>
-        </p:nvCxnSpPr>
-        <p:spPr>
-          <a:xfrm>
-            <a:off x="4785256" y="2468880"/>
-            <a:ext cx="7315200" cy="0"/>
-          </a:xfrm>
-          <a:prstGeom prst="line">
-            <a:avLst/>
-          </a:prstGeom>
-          <a:ln w="12700">
-            <a:solidFill>
-              <a:srgbClr val="E4E4E4"/>
-            </a:solidFill>
-          </a:ln>
-        </p:spPr>
-        <p:style>
-          <a:lnRef idx="2">
-            <a:schemeClr val="accent1"/>
-          </a:lnRef>
-          <a:fillRef idx="0">
-            <a:schemeClr val="accent1"/>
-          </a:fillRef>
-          <a:effectRef idx="1">
-            <a:schemeClr val="accent1"/>
-          </a:effectRef>
-          <a:fontRef idx="minor">
-            <a:schemeClr val="tx1"/>
-          </a:fontRef>
-        </p:style>
-      </p:cxnSp>
-      <p:pic>
-        <p:nvPicPr>
-          <p:cNvPr id="11" name="Picture 10" descr="danny-avula.jpg"/>
-          <p:cNvPicPr>
-            <a:picLocks noChangeAspect="1"/>
-          </p:cNvPicPr>
-          <p:nvPr/>
-        </p:nvPicPr>
-        <p:blipFill>
-          <a:blip r:embed="rId3"/>
-          <a:srcRect/>
-          <a:stretch>
-            <a:fillRect/>
-          </a:stretch>
-        </p:blipFill>
-        <p:spPr>
-          <a:xfrm>
-            <a:off x="4785256" y="2651760"/>
-            <a:ext cx="384048" cy="384048"/>
-          </a:xfrm>
-          <a:prstGeom prst="rect">
-            <a:avLst/>
-          </a:prstGeom>
-        </p:spPr>
-      </p:pic>
-      <p:sp>
-        <p:nvSpPr>
-          <p:cNvPr id="12" name="TextBox 11"/>
-          <p:cNvSpPr txBox="1"/>
-          <p:nvPr/>
-        </p:nvSpPr>
-        <p:spPr>
-          <a:xfrm>
-            <a:off x="5352184" y="2606040"/>
-            <a:ext cx="6748272" cy="914400"/>
-          </a:xfrm>
-          <a:prstGeom prst="rect">
-            <a:avLst/>
-          </a:prstGeom>
-          <a:noFill/>
-        </p:spPr>
-        <p:txBody>
-          <a:bodyPr wrap="square" anchor="t" lIns="0" rIns="0" tIns="0" bIns="0">
-            <a:spAutoFit/>
-          </a:bodyPr>
-          <a:lstStyle/>
-          <a:p>
-            <a:pPr algn="l">
-              <a:lnSpc>
-                <a:spcPct val="130000"/>
-              </a:lnSpc>
-            </a:pPr>
-            <a:r>
-              <a:rPr sz="1200" b="0">
-                <a:solidFill>
-                  <a:srgbClr val="1A1A1A"/>
+              <a:t/>
+            </a:r>
+          </a:p>
+          <a:p>
+            <a:pPr algn="ctr">
+              <a:lnSpc>
+                <a:spcPct val="135000"/>
+              </a:lnSpc>
+            </a:pPr>
+            <a:r>
+              <a:rPr sz="1300" b="0">
+                <a:solidFill>
+                  <a:srgbClr val="CCCCCC"/>
                 </a:solidFill>
                 <a:latin typeface="Schibsted Grotesk"/>
               </a:rPr>
-              <a:t>By building direct pipelines from the classroom to local employers, we ensure young people have a clear path to stable careers.</a:t>
-            </a:r>
-          </a:p>
-        </p:txBody>
-      </p:sp>
-      <p:sp>
-        <p:nvSpPr>
-          <p:cNvPr id="13" name="TextBox 12"/>
-          <p:cNvSpPr txBox="1"/>
-          <p:nvPr/>
-        </p:nvSpPr>
-        <p:spPr>
-          <a:xfrm>
-            <a:off x="5352184" y="3310128"/>
-            <a:ext cx="6748272" cy="274320"/>
-          </a:xfrm>
-          <a:prstGeom prst="rect">
-            <a:avLst/>
-          </a:prstGeom>
-          <a:noFill/>
-        </p:spPr>
-        <p:txBody>
-          <a:bodyPr wrap="square" anchor="t" lIns="0" rIns="0" tIns="0" bIns="0">
-            <a:spAutoFit/>
-          </a:bodyPr>
-          <a:lstStyle/>
-          <a:p>
-            <a:pPr algn="l">
-              <a:lnSpc>
-                <a:spcPct val="100000"/>
-              </a:lnSpc>
-            </a:pPr>
-            <a:r>
-              <a:rPr sz="1050" b="1">
-                <a:solidFill>
-                  <a:srgbClr val="5A5A5A"/>
-                </a:solidFill>
-                <a:latin typeface="Space Grotesk"/>
-              </a:rPr>
-              <a:t>Danny Avula — Mayor of Richmond</a:t>
-            </a:r>
-          </a:p>
-        </p:txBody>
-      </p:sp>
-      <p:cxnSp>
-        <p:nvCxnSpPr>
-          <p:cNvPr id="14" name="Connector 13"/>
-          <p:cNvCxnSpPr/>
-          <p:nvPr/>
-        </p:nvCxnSpPr>
-        <p:spPr>
-          <a:xfrm>
-            <a:off x="4785256" y="3703320"/>
-            <a:ext cx="7315200" cy="0"/>
-          </a:xfrm>
-          <a:prstGeom prst="line">
-            <a:avLst/>
-          </a:prstGeom>
-          <a:ln w="12700">
-            <a:solidFill>
-              <a:srgbClr val="E4E4E4"/>
-            </a:solidFill>
-          </a:ln>
-        </p:spPr>
-        <p:style>
-          <a:lnRef idx="2">
-            <a:schemeClr val="accent1"/>
-          </a:lnRef>
-          <a:fillRef idx="0">
-            <a:schemeClr val="accent1"/>
-          </a:fillRef>
-          <a:effectRef idx="1">
-            <a:schemeClr val="accent1"/>
-          </a:effectRef>
-          <a:fontRef idx="minor">
-            <a:schemeClr val="tx1"/>
-          </a:fontRef>
-        </p:style>
-      </p:cxnSp>
-      <p:pic>
-        <p:nvPicPr>
-          <p:cNvPr id="15" name="Picture 14" descr="taikein-cooper.jpg"/>
-          <p:cNvPicPr>
-            <a:picLocks noChangeAspect="1"/>
-          </p:cNvPicPr>
-          <p:nvPr/>
-        </p:nvPicPr>
-        <p:blipFill>
-          <a:blip r:embed="rId4"/>
-          <a:srcRect/>
-          <a:stretch>
-            <a:fillRect/>
-          </a:stretch>
-        </p:blipFill>
-        <p:spPr>
-          <a:xfrm>
-            <a:off x="4785256" y="3886200"/>
-            <a:ext cx="384048" cy="384048"/>
-          </a:xfrm>
-          <a:prstGeom prst="rect">
-            <a:avLst/>
-          </a:prstGeom>
-        </p:spPr>
-      </p:pic>
-      <p:sp>
-        <p:nvSpPr>
-          <p:cNvPr id="16" name="TextBox 15"/>
-          <p:cNvSpPr txBox="1"/>
-          <p:nvPr/>
-        </p:nvSpPr>
-        <p:spPr>
-          <a:xfrm>
-            <a:off x="5352184" y="3840480"/>
-            <a:ext cx="6748272" cy="914400"/>
-          </a:xfrm>
-          <a:prstGeom prst="rect">
-            <a:avLst/>
-          </a:prstGeom>
-          <a:noFill/>
-        </p:spPr>
-        <p:txBody>
-          <a:bodyPr wrap="square" anchor="t" lIns="0" rIns="0" tIns="0" bIns="0">
-            <a:spAutoFit/>
-          </a:bodyPr>
-          <a:lstStyle/>
-          <a:p>
-            <a:pPr algn="l">
-              <a:lnSpc>
-                <a:spcPct val="130000"/>
-              </a:lnSpc>
-            </a:pPr>
-            <a:r>
-              <a:rPr sz="1200" b="0">
-                <a:solidFill>
-                  <a:srgbClr val="1A1A1A"/>
-                </a:solidFill>
-                <a:latin typeface="Schibsted Grotesk"/>
-              </a:rPr>
-              <a:t>Too many of our students leave high school without a real path to a career that can support a family. RVA Builds changes that.</a:t>
-            </a:r>
-          </a:p>
-        </p:txBody>
-      </p:sp>
-      <p:sp>
-        <p:nvSpPr>
-          <p:cNvPr id="17" name="TextBox 16"/>
-          <p:cNvSpPr txBox="1"/>
-          <p:nvPr/>
-        </p:nvSpPr>
-        <p:spPr>
-          <a:xfrm>
-            <a:off x="5352184" y="4544568"/>
-            <a:ext cx="6748272" cy="274320"/>
-          </a:xfrm>
-          <a:prstGeom prst="rect">
-            <a:avLst/>
-          </a:prstGeom>
-          <a:noFill/>
-        </p:spPr>
-        <p:txBody>
-          <a:bodyPr wrap="square" anchor="t" lIns="0" rIns="0" tIns="0" bIns="0">
-            <a:spAutoFit/>
-          </a:bodyPr>
-          <a:lstStyle/>
-          <a:p>
-            <a:pPr algn="l">
-              <a:lnSpc>
-                <a:spcPct val="100000"/>
-              </a:lnSpc>
-            </a:pPr>
-            <a:r>
-              <a:rPr sz="1050" b="1">
-                <a:solidFill>
-                  <a:srgbClr val="5A5A5A"/>
-                </a:solidFill>
-                <a:latin typeface="Space Grotesk"/>
-              </a:rPr>
-              <a:t>Taikein Cooper — CEO, Richmond Ed Fund</a:t>
-            </a:r>
-          </a:p>
-        </p:txBody>
-      </p:sp>
-      <p:cxnSp>
-        <p:nvCxnSpPr>
-          <p:cNvPr id="18" name="Connector 17"/>
-          <p:cNvCxnSpPr/>
-          <p:nvPr/>
-        </p:nvCxnSpPr>
-        <p:spPr>
-          <a:xfrm>
-            <a:off x="4785256" y="4937760"/>
-            <a:ext cx="7315200" cy="0"/>
-          </a:xfrm>
-          <a:prstGeom prst="line">
-            <a:avLst/>
-          </a:prstGeom>
-          <a:ln w="12700">
-            <a:solidFill>
-              <a:srgbClr val="E4E4E4"/>
-            </a:solidFill>
-          </a:ln>
-        </p:spPr>
-        <p:style>
-          <a:lnRef idx="2">
-            <a:schemeClr val="accent1"/>
-          </a:lnRef>
-          <a:fillRef idx="0">
-            <a:schemeClr val="accent1"/>
-          </a:fillRef>
-          <a:effectRef idx="1">
-            <a:schemeClr val="accent1"/>
-          </a:effectRef>
-          <a:fontRef idx="minor">
-            <a:schemeClr val="tx1"/>
-          </a:fontRef>
-        </p:style>
-      </p:cxnSp>
-    </p:spTree>
-  </p:cSld>
-  <p:clrMapOvr>
-    <a:masterClrMapping/>
-  </p:clrMapOvr>
-</p:sld>
-</file>
-
-<file path=ppt/slides/slide13.xml><?xml version="1.0" encoding="utf-8"?>
-<p:sld xmlns:a="http://schemas.openxmlformats.org/drawingml/2006/main" xmlns:p="http://schemas.openxmlformats.org/presentationml/2006/main" xmlns:r="http://schemas.openxmlformats.org/officeDocument/2006/relationships">
-  <p:cSld>
-    <p:spTree>
-      <p:nvGrpSpPr>
-        <p:cNvPr id="1" name=""/>
-        <p:cNvGrpSpPr/>
-        <p:nvPr/>
-      </p:nvGrpSpPr>
-      <p:grpSpPr/>
-      <p:sp>
-        <p:nvSpPr>
-          <p:cNvPr id="2" name="Rectangle 1"/>
-          <p:cNvSpPr/>
-          <p:nvPr/>
-        </p:nvSpPr>
-        <p:spPr>
-          <a:xfrm>
-            <a:off x="0" y="0"/>
-            <a:ext cx="12191695" cy="6858000"/>
-          </a:xfrm>
-          <a:prstGeom prst="rect">
-            <a:avLst/>
-          </a:prstGeom>
-          <a:solidFill>
-            <a:srgbClr val="FFFFFF"/>
-          </a:solidFill>
-          <a:ln>
-            <a:noFill/>
-          </a:ln>
-          <a:effectLst/>
-        </p:spPr>
-        <p:style>
-          <a:lnRef idx="1">
-            <a:schemeClr val="accent1"/>
-          </a:lnRef>
-          <a:fillRef idx="3">
-            <a:schemeClr val="accent1"/>
-          </a:fillRef>
-          <a:effectRef idx="2">
-            <a:schemeClr val="accent1"/>
-          </a:effectRef>
-          <a:fontRef idx="minor">
-            <a:schemeClr val="lt1"/>
-          </a:fontRef>
-        </p:style>
-        <p:txBody>
-          <a:bodyPr rtlCol="0" anchor="ctr"/>
-          <a:lstStyle/>
-          <a:p>
-            <a:pPr algn="ctr"/>
-          </a:p>
-        </p:txBody>
-      </p:sp>
-      <p:sp>
-        <p:nvSpPr>
-          <p:cNvPr id="3" name="Rectangle 2"/>
-          <p:cNvSpPr/>
-          <p:nvPr/>
-        </p:nvSpPr>
-        <p:spPr>
-          <a:xfrm>
-            <a:off x="0" y="0"/>
-            <a:ext cx="4145176" cy="6858000"/>
-          </a:xfrm>
-          <a:prstGeom prst="rect">
-            <a:avLst/>
-          </a:prstGeom>
-          <a:solidFill>
-            <a:srgbClr val="1A1A1A"/>
-          </a:solidFill>
-          <a:ln>
-            <a:noFill/>
-          </a:ln>
-          <a:effectLst/>
-        </p:spPr>
-        <p:style>
-          <a:lnRef idx="1">
-            <a:schemeClr val="accent1"/>
-          </a:lnRef>
-          <a:fillRef idx="3">
-            <a:schemeClr val="accent1"/>
-          </a:fillRef>
-          <a:effectRef idx="2">
-            <a:schemeClr val="accent1"/>
-          </a:effectRef>
-          <a:fontRef idx="minor">
-            <a:schemeClr val="lt1"/>
-          </a:fontRef>
-        </p:style>
-        <p:txBody>
-          <a:bodyPr rtlCol="0" anchor="ctr"/>
-          <a:lstStyle/>
-          <a:p>
-            <a:pPr algn="ctr"/>
-          </a:p>
-        </p:txBody>
-      </p:sp>
-      <p:sp>
-        <p:nvSpPr>
-          <p:cNvPr id="4" name="TextBox 3"/>
-          <p:cNvSpPr txBox="1"/>
-          <p:nvPr/>
-        </p:nvSpPr>
-        <p:spPr>
-          <a:xfrm>
-            <a:off x="411480" y="2331720"/>
-            <a:ext cx="3322216" cy="274320"/>
-          </a:xfrm>
-          <a:prstGeom prst="rect">
-            <a:avLst/>
-          </a:prstGeom>
-          <a:noFill/>
-        </p:spPr>
-        <p:txBody>
-          <a:bodyPr wrap="square" anchor="t" lIns="0" rIns="0" tIns="0" bIns="0">
-            <a:spAutoFit/>
-          </a:bodyPr>
-          <a:lstStyle/>
-          <a:p>
-            <a:pPr algn="ctr">
-              <a:lnSpc>
-                <a:spcPct val="100000"/>
-              </a:lnSpc>
-            </a:pPr>
-            <a:r>
-              <a:rPr sz="1200" b="1">
-                <a:solidFill>
-                  <a:srgbClr val="F15C2C"/>
-                </a:solidFill>
-                <a:latin typeface="Space Grotesk"/>
-              </a:rPr>
-              <a:t>07</a:t>
-            </a:r>
-          </a:p>
-        </p:txBody>
-      </p:sp>
-      <p:sp>
-        <p:nvSpPr>
-          <p:cNvPr id="5" name="TextBox 4"/>
-          <p:cNvSpPr txBox="1"/>
-          <p:nvPr/>
-        </p:nvSpPr>
-        <p:spPr>
-          <a:xfrm>
-            <a:off x="411480" y="2651760"/>
-            <a:ext cx="3322216" cy="1005840"/>
-          </a:xfrm>
-          <a:prstGeom prst="rect">
-            <a:avLst/>
-          </a:prstGeom>
-          <a:noFill/>
-        </p:spPr>
-        <p:txBody>
-          <a:bodyPr wrap="square" anchor="t" lIns="0" rIns="0" tIns="0" bIns="0">
-            <a:spAutoFit/>
-          </a:bodyPr>
-          <a:lstStyle/>
-          <a:p>
-            <a:pPr algn="ctr">
-              <a:lnSpc>
-                <a:spcPct val="105000"/>
-              </a:lnSpc>
-            </a:pPr>
-            <a:r>
-              <a:rPr sz="2600" b="1">
-                <a:solidFill>
-                  <a:srgbClr val="FFFFFF"/>
-                </a:solidFill>
-                <a:latin typeface="Space Grotesk"/>
-              </a:rPr>
-              <a:t>Photo-</a:t>
-            </a:r>
-          </a:p>
-          <a:p>
-            <a:pPr algn="ctr">
-              <a:lnSpc>
-                <a:spcPct val="105000"/>
-              </a:lnSpc>
-            </a:pPr>
-            <a:r>
-              <a:rPr sz="2600" b="1">
-                <a:solidFill>
-                  <a:srgbClr val="FFFFFF"/>
-                </a:solidFill>
-                <a:latin typeface="Space Grotesk"/>
-              </a:rPr>
-              <a:t>graphy</a:t>
-            </a:r>
-          </a:p>
-        </p:txBody>
-      </p:sp>
-      <p:sp>
-        <p:nvSpPr>
-          <p:cNvPr id="6" name="TextBox 5"/>
-          <p:cNvSpPr txBox="1"/>
-          <p:nvPr/>
-        </p:nvSpPr>
-        <p:spPr>
-          <a:xfrm>
-            <a:off x="411480" y="3703320"/>
-            <a:ext cx="3322216" cy="1280160"/>
-          </a:xfrm>
-          <a:prstGeom prst="rect">
-            <a:avLst/>
-          </a:prstGeom>
-          <a:noFill/>
-        </p:spPr>
-        <p:txBody>
-          <a:bodyPr wrap="square" anchor="t" lIns="0" rIns="0" tIns="0" bIns="0">
-            <a:spAutoFit/>
-          </a:bodyPr>
-          <a:lstStyle/>
-          <a:p>
-            <a:pPr algn="ctr">
-              <a:lnSpc>
-                <a:spcPct val="135000"/>
-              </a:lnSpc>
-            </a:pPr>
-            <a:r>
-              <a:rPr sz="1300" b="0">
-                <a:solidFill>
-                  <a:srgbClr val="CCCCCC"/>
-                </a:solidFill>
-                <a:latin typeface="Schibsted Grotesk"/>
-              </a:rPr>
-              <a:t>Photography must represent real Richmond students and workers on the job — inclusive of diverse ethnicities, ages, and trades. Illustrations should not be used.</a:t>
+              <a:t>Stock imagery and illustration should not be used.</a:t>
             </a:r>
           </a:p>
         </p:txBody>
@@ -5987,371 +5764,6 @@
           </a:prstGeom>
         </p:spPr>
       </p:pic>
-    </p:spTree>
-  </p:cSld>
-  <p:clrMapOvr>
-    <a:masterClrMapping/>
-  </p:clrMapOvr>
-</p:sld>
-</file>
-
-<file path=ppt/slides/slide14.xml><?xml version="1.0" encoding="utf-8"?>
-<p:sld xmlns:a="http://schemas.openxmlformats.org/drawingml/2006/main" xmlns:p="http://schemas.openxmlformats.org/presentationml/2006/main" xmlns:r="http://schemas.openxmlformats.org/officeDocument/2006/relationships">
-  <p:cSld>
-    <p:spTree>
-      <p:nvGrpSpPr>
-        <p:cNvPr id="1" name=""/>
-        <p:cNvGrpSpPr/>
-        <p:nvPr/>
-      </p:nvGrpSpPr>
-      <p:grpSpPr/>
-      <p:sp>
-        <p:nvSpPr>
-          <p:cNvPr id="2" name="Rectangle 1"/>
-          <p:cNvSpPr/>
-          <p:nvPr/>
-        </p:nvSpPr>
-        <p:spPr>
-          <a:xfrm>
-            <a:off x="0" y="0"/>
-            <a:ext cx="12191695" cy="6858000"/>
-          </a:xfrm>
-          <a:prstGeom prst="rect">
-            <a:avLst/>
-          </a:prstGeom>
-          <a:solidFill>
-            <a:srgbClr val="FFFFFF"/>
-          </a:solidFill>
-          <a:ln>
-            <a:noFill/>
-          </a:ln>
-          <a:effectLst/>
-        </p:spPr>
-        <p:style>
-          <a:lnRef idx="1">
-            <a:schemeClr val="accent1"/>
-          </a:lnRef>
-          <a:fillRef idx="3">
-            <a:schemeClr val="accent1"/>
-          </a:fillRef>
-          <a:effectRef idx="2">
-            <a:schemeClr val="accent1"/>
-          </a:effectRef>
-          <a:fontRef idx="minor">
-            <a:schemeClr val="lt1"/>
-          </a:fontRef>
-        </p:style>
-        <p:txBody>
-          <a:bodyPr rtlCol="0" anchor="ctr"/>
-          <a:lstStyle/>
-          <a:p>
-            <a:pPr algn="ctr"/>
-          </a:p>
-        </p:txBody>
-      </p:sp>
-      <p:sp>
-        <p:nvSpPr>
-          <p:cNvPr id="3" name="Rectangle 2"/>
-          <p:cNvSpPr/>
-          <p:nvPr/>
-        </p:nvSpPr>
-        <p:spPr>
-          <a:xfrm>
-            <a:off x="0" y="0"/>
-            <a:ext cx="4145176" cy="6858000"/>
-          </a:xfrm>
-          <a:prstGeom prst="rect">
-            <a:avLst/>
-          </a:prstGeom>
-          <a:solidFill>
-            <a:srgbClr val="1A1A1A"/>
-          </a:solidFill>
-          <a:ln>
-            <a:noFill/>
-          </a:ln>
-          <a:effectLst/>
-        </p:spPr>
-        <p:style>
-          <a:lnRef idx="1">
-            <a:schemeClr val="accent1"/>
-          </a:lnRef>
-          <a:fillRef idx="3">
-            <a:schemeClr val="accent1"/>
-          </a:fillRef>
-          <a:effectRef idx="2">
-            <a:schemeClr val="accent1"/>
-          </a:effectRef>
-          <a:fontRef idx="minor">
-            <a:schemeClr val="lt1"/>
-          </a:fontRef>
-        </p:style>
-        <p:txBody>
-          <a:bodyPr rtlCol="0" anchor="ctr"/>
-          <a:lstStyle/>
-          <a:p>
-            <a:pPr algn="ctr"/>
-          </a:p>
-        </p:txBody>
-      </p:sp>
-      <p:sp>
-        <p:nvSpPr>
-          <p:cNvPr id="4" name="TextBox 3"/>
-          <p:cNvSpPr txBox="1"/>
-          <p:nvPr/>
-        </p:nvSpPr>
-        <p:spPr>
-          <a:xfrm>
-            <a:off x="411480" y="2331720"/>
-            <a:ext cx="3322216" cy="274320"/>
-          </a:xfrm>
-          <a:prstGeom prst="rect">
-            <a:avLst/>
-          </a:prstGeom>
-          <a:noFill/>
-        </p:spPr>
-        <p:txBody>
-          <a:bodyPr wrap="square" anchor="t" lIns="0" rIns="0" tIns="0" bIns="0">
-            <a:spAutoFit/>
-          </a:bodyPr>
-          <a:lstStyle/>
-          <a:p>
-            <a:pPr algn="ctr">
-              <a:lnSpc>
-                <a:spcPct val="100000"/>
-              </a:lnSpc>
-            </a:pPr>
-            <a:r>
-              <a:rPr sz="1200" b="1">
-                <a:solidFill>
-                  <a:srgbClr val="F15C2C"/>
-                </a:solidFill>
-                <a:latin typeface="Space Grotesk"/>
-              </a:rPr>
-              <a:t>08</a:t>
-            </a:r>
-          </a:p>
-        </p:txBody>
-      </p:sp>
-      <p:sp>
-        <p:nvSpPr>
-          <p:cNvPr id="5" name="TextBox 4"/>
-          <p:cNvSpPr txBox="1"/>
-          <p:nvPr/>
-        </p:nvSpPr>
-        <p:spPr>
-          <a:xfrm>
-            <a:off x="411480" y="2651760"/>
-            <a:ext cx="3322216" cy="1005840"/>
-          </a:xfrm>
-          <a:prstGeom prst="rect">
-            <a:avLst/>
-          </a:prstGeom>
-          <a:noFill/>
-        </p:spPr>
-        <p:txBody>
-          <a:bodyPr wrap="square" anchor="t" lIns="0" rIns="0" tIns="0" bIns="0">
-            <a:spAutoFit/>
-          </a:bodyPr>
-          <a:lstStyle/>
-          <a:p>
-            <a:pPr algn="ctr">
-              <a:lnSpc>
-                <a:spcPct val="105000"/>
-              </a:lnSpc>
-            </a:pPr>
-            <a:r>
-              <a:rPr sz="2600" b="1">
-                <a:solidFill>
-                  <a:srgbClr val="FFFFFF"/>
-                </a:solidFill>
-                <a:latin typeface="Space Grotesk"/>
-              </a:rPr>
-              <a:t>Media</a:t>
-            </a:r>
-          </a:p>
-          <a:p>
-            <a:pPr algn="ctr">
-              <a:lnSpc>
-                <a:spcPct val="105000"/>
-              </a:lnSpc>
-            </a:pPr>
-            <a:r>
-              <a:rPr sz="2600" b="1">
-                <a:solidFill>
-                  <a:srgbClr val="FFFFFF"/>
-                </a:solidFill>
-                <a:latin typeface="Space Grotesk"/>
-              </a:rPr>
-              <a:t>Contact</a:t>
-            </a:r>
-          </a:p>
-        </p:txBody>
-      </p:sp>
-      <p:sp>
-        <p:nvSpPr>
-          <p:cNvPr id="6" name="TextBox 5"/>
-          <p:cNvSpPr txBox="1"/>
-          <p:nvPr/>
-        </p:nvSpPr>
-        <p:spPr>
-          <a:xfrm>
-            <a:off x="411480" y="3703320"/>
-            <a:ext cx="3322216" cy="1280160"/>
-          </a:xfrm>
-          <a:prstGeom prst="rect">
-            <a:avLst/>
-          </a:prstGeom>
-          <a:noFill/>
-        </p:spPr>
-        <p:txBody>
-          <a:bodyPr wrap="square" anchor="t" lIns="0" rIns="0" tIns="0" bIns="0">
-            <a:spAutoFit/>
-          </a:bodyPr>
-          <a:lstStyle/>
-          <a:p>
-            <a:pPr algn="ctr">
-              <a:lnSpc>
-                <a:spcPct val="135000"/>
-              </a:lnSpc>
-            </a:pPr>
-            <a:r>
-              <a:rPr sz="1300" b="0">
-                <a:solidFill>
-                  <a:srgbClr val="CCCCCC"/>
-                </a:solidFill>
-                <a:latin typeface="Schibsted Grotesk"/>
-              </a:rPr>
-              <a:t>Add the client's designated media contact — name, title, email, phone — before this kit is distributed outside the organization.</a:t>
-            </a:r>
-          </a:p>
-        </p:txBody>
-      </p:sp>
-      <p:sp>
-        <p:nvSpPr>
-          <p:cNvPr id="7" name="TextBox 6"/>
-          <p:cNvSpPr txBox="1"/>
-          <p:nvPr/>
-        </p:nvSpPr>
-        <p:spPr>
-          <a:xfrm>
-            <a:off x="5059576" y="2377440"/>
-            <a:ext cx="6400800" cy="1463040"/>
-          </a:xfrm>
-          <a:prstGeom prst="rect">
-            <a:avLst/>
-          </a:prstGeom>
-          <a:noFill/>
-        </p:spPr>
-        <p:txBody>
-          <a:bodyPr wrap="square" anchor="t" lIns="0" rIns="0" tIns="0" bIns="0">
-            <a:spAutoFit/>
-          </a:bodyPr>
-          <a:lstStyle/>
-          <a:p>
-            <a:pPr algn="l">
-              <a:lnSpc>
-                <a:spcPct val="160000"/>
-              </a:lnSpc>
-            </a:pPr>
-            <a:r>
-              <a:rPr sz="1250" b="0">
-                <a:solidFill>
-                  <a:srgbClr val="5A5A5A"/>
-                </a:solidFill>
-                <a:latin typeface="Consolas"/>
-              </a:rPr>
-              <a:t>docs/palette.md  ·  docs/brand-tokens.css</a:t>
-            </a:r>
-          </a:p>
-          <a:p>
-            <a:pPr algn="l">
-              <a:lnSpc>
-                <a:spcPct val="160000"/>
-              </a:lnSpc>
-            </a:pPr>
-            <a:r>
-              <a:rPr sz="1250" b="0">
-                <a:solidFill>
-                  <a:srgbClr val="5A5A5A"/>
-                </a:solidFill>
-                <a:latin typeface="Consolas"/>
-              </a:rPr>
-              <a:t>docs/typography.md</a:t>
-            </a:r>
-          </a:p>
-          <a:p>
-            <a:pPr algn="l">
-              <a:lnSpc>
-                <a:spcPct val="160000"/>
-              </a:lnSpc>
-            </a:pPr>
-            <a:r>
-              <a:rPr sz="1250" b="0">
-                <a:solidFill>
-                  <a:srgbClr val="5A5A5A"/>
-                </a:solidFill>
-                <a:latin typeface="Consolas"/>
-              </a:rPr>
-              <a:t>docs/tone-and-voice.md</a:t>
-            </a:r>
-          </a:p>
-          <a:p>
-            <a:pPr algn="l">
-              <a:lnSpc>
-                <a:spcPct val="160000"/>
-              </a:lnSpc>
-            </a:pPr>
-            <a:r>
-              <a:rPr sz="1250" b="0">
-                <a:solidFill>
-                  <a:srgbClr val="5A5A5A"/>
-                </a:solidFill>
-                <a:latin typeface="Consolas"/>
-              </a:rPr>
-              <a:t>docs/boilerplate.md — key facts, quotes, media contact</a:t>
-            </a:r>
-          </a:p>
-        </p:txBody>
-      </p:sp>
-      <p:sp>
-        <p:nvSpPr>
-          <p:cNvPr id="8" name="TextBox 7"/>
-          <p:cNvSpPr txBox="1"/>
-          <p:nvPr/>
-        </p:nvSpPr>
-        <p:spPr>
-          <a:xfrm>
-            <a:off x="5059576" y="3931920"/>
-            <a:ext cx="7315200" cy="365760"/>
-          </a:xfrm>
-          <a:prstGeom prst="rect">
-            <a:avLst/>
-          </a:prstGeom>
-          <a:noFill/>
-        </p:spPr>
-        <p:txBody>
-          <a:bodyPr wrap="square" anchor="t" lIns="0" rIns="0" tIns="0" bIns="0">
-            <a:spAutoFit/>
-          </a:bodyPr>
-          <a:lstStyle/>
-          <a:p>
-            <a:pPr algn="l">
-              <a:lnSpc>
-                <a:spcPct val="100000"/>
-              </a:lnSpc>
-            </a:pPr>
-            <a:r>
-              <a:rPr sz="1150" b="0">
-                <a:solidFill>
-                  <a:srgbClr val="5A5A5A"/>
-                </a:solidFill>
-                <a:latin typeface="Schibsted Grotesk"/>
-              </a:rPr>
-              <a:t>A program of the Richmond Ed Fund  ·  Program site: rvabuilds.us</a:t>
-            </a:r>
-          </a:p>
-        </p:txBody>
-      </p:sp>
     </p:spTree>
   </p:cSld>
   <p:clrMapOvr>
@@ -6385,7 +5797,7 @@
             <a:avLst/>
           </a:prstGeom>
           <a:solidFill>
-            <a:srgbClr val="FFFFFF"/>
+            <a:srgbClr val="F15C2C"/>
           </a:solidFill>
           <a:ln>
             <a:noFill/>
@@ -6414,60 +5826,104 @@
           </a:p>
         </p:txBody>
       </p:sp>
-      <p:sp>
-        <p:nvSpPr>
-          <p:cNvPr id="3" name="Rectangle 2"/>
-          <p:cNvSpPr/>
-          <p:nvPr/>
-        </p:nvSpPr>
-        <p:spPr>
-          <a:xfrm>
-            <a:off x="0" y="0"/>
-            <a:ext cx="4145176" cy="6858000"/>
-          </a:xfrm>
-          <a:prstGeom prst="rect">
-            <a:avLst/>
-          </a:prstGeom>
-          <a:solidFill>
-            <a:srgbClr val="1A1A1A"/>
-          </a:solidFill>
-          <a:ln>
-            <a:noFill/>
-          </a:ln>
-          <a:effectLst/>
-        </p:spPr>
-        <p:style>
-          <a:lnRef idx="1">
-            <a:schemeClr val="accent1"/>
-          </a:lnRef>
-          <a:fillRef idx="3">
-            <a:schemeClr val="accent1"/>
-          </a:fillRef>
-          <a:effectRef idx="2">
-            <a:schemeClr val="accent1"/>
-          </a:effectRef>
-          <a:fontRef idx="minor">
-            <a:schemeClr val="lt1"/>
-          </a:fontRef>
-        </p:style>
-        <p:txBody>
-          <a:bodyPr rtlCol="0" anchor="ctr"/>
-          <a:lstStyle/>
-          <a:p>
-            <a:pPr algn="ctr"/>
-          </a:p>
-        </p:txBody>
-      </p:sp>
-      <p:sp>
-        <p:nvSpPr>
-          <p:cNvPr id="4" name="TextBox 3"/>
+      <p:pic>
+        <p:nvPicPr>
+          <p:cNvPr id="3" name="Picture 2" descr="hero-connection.jpg"/>
+          <p:cNvPicPr>
+            <a:picLocks noChangeAspect="1"/>
+          </p:cNvPicPr>
+          <p:nvPr/>
+        </p:nvPicPr>
+        <p:blipFill>
+          <a:blip r:embed="rId2"/>
+          <a:srcRect l="5561" r="5561"/>
+          <a:stretch>
+            <a:fillRect/>
+          </a:stretch>
+        </p:blipFill>
+        <p:spPr>
+          <a:xfrm>
+            <a:off x="4145176" y="0"/>
+            <a:ext cx="8046519" cy="6858000"/>
+          </a:xfrm>
+          <a:prstGeom prst="rect">
+            <a:avLst/>
+          </a:prstGeom>
+        </p:spPr>
+      </p:pic>
+      <p:pic>
+        <p:nvPicPr>
+          <p:cNvPr id="4" name="Picture 3" descr="rva-builds-icon.png"/>
+          <p:cNvPicPr>
+            <a:picLocks noChangeAspect="1"/>
+          </p:cNvPicPr>
+          <p:nvPr/>
+        </p:nvPicPr>
+        <p:blipFill>
+          <a:blip r:embed="rId3"/>
+          <a:stretch>
+            <a:fillRect/>
+          </a:stretch>
+        </p:blipFill>
+        <p:spPr>
+          <a:xfrm>
+            <a:off x="548640" y="4160520"/>
+            <a:ext cx="365760" cy="365760"/>
+          </a:xfrm>
+          <a:prstGeom prst="rect">
+            <a:avLst/>
+          </a:prstGeom>
+        </p:spPr>
+      </p:pic>
+      <p:sp>
+        <p:nvSpPr>
+          <p:cNvPr id="5" name="TextBox 4"/>
           <p:cNvSpPr txBox="1"/>
           <p:nvPr/>
         </p:nvSpPr>
         <p:spPr>
           <a:xfrm>
-            <a:off x="411480" y="2331720"/>
-            <a:ext cx="3322216" cy="274320"/>
+            <a:off x="960120" y="4160520"/>
+            <a:ext cx="3200400" cy="365760"/>
+          </a:xfrm>
+          <a:prstGeom prst="rect">
+            <a:avLst/>
+          </a:prstGeom>
+          <a:noFill/>
+        </p:spPr>
+        <p:txBody>
+          <a:bodyPr wrap="square" anchor="ctr" lIns="0" rIns="0" tIns="0" bIns="0">
+            <a:spAutoFit/>
+          </a:bodyPr>
+          <a:lstStyle/>
+          <a:p>
+            <a:pPr algn="l">
+              <a:lnSpc>
+                <a:spcPct val="100000"/>
+              </a:lnSpc>
+            </a:pPr>
+            <a:r>
+              <a:rPr sz="1500" b="0">
+                <a:solidFill>
+                  <a:srgbClr val="FFFFFF"/>
+                </a:solidFill>
+                <a:latin typeface="Space Grotesk"/>
+              </a:rPr>
+              <a:t>RVA Builds</a:t>
+            </a:r>
+          </a:p>
+        </p:txBody>
+      </p:sp>
+      <p:sp>
+        <p:nvSpPr>
+          <p:cNvPr id="6" name="TextBox 5"/>
+          <p:cNvSpPr txBox="1"/>
+          <p:nvPr/>
+        </p:nvSpPr>
+        <p:spPr>
+          <a:xfrm>
+            <a:off x="548640" y="4709160"/>
+            <a:ext cx="3657600" cy="457200"/>
           </a:xfrm>
           <a:prstGeom prst="rect">
             <a:avLst/>
@@ -6480,33 +5936,33 @@
           </a:bodyPr>
           <a:lstStyle/>
           <a:p>
-            <a:pPr algn="ctr">
+            <a:pPr algn="l">
               <a:lnSpc>
                 <a:spcPct val="100000"/>
               </a:lnSpc>
             </a:pPr>
             <a:r>
-              <a:rPr sz="1200" b="1">
-                <a:solidFill>
-                  <a:srgbClr val="F15C2C"/>
+              <a:rPr sz="1050" b="1">
+                <a:solidFill>
+                  <a:srgbClr val="FFE3D8"/>
                 </a:solidFill>
                 <a:latin typeface="Space Grotesk"/>
               </a:rPr>
-              <a:t>01</a:t>
-            </a:r>
-          </a:p>
-        </p:txBody>
-      </p:sp>
-      <p:sp>
-        <p:nvSpPr>
-          <p:cNvPr id="5" name="TextBox 4"/>
+              <a:t>RICHMOND ED FUND INITIATIVE</a:t>
+            </a:r>
+          </a:p>
+        </p:txBody>
+      </p:sp>
+      <p:sp>
+        <p:nvSpPr>
+          <p:cNvPr id="7" name="TextBox 6"/>
           <p:cNvSpPr txBox="1"/>
           <p:nvPr/>
         </p:nvSpPr>
         <p:spPr>
           <a:xfrm>
-            <a:off x="411480" y="2651760"/>
-            <a:ext cx="3322216" cy="1005840"/>
+            <a:off x="548640" y="5074920"/>
+            <a:ext cx="3657600" cy="1280160"/>
           </a:xfrm>
           <a:prstGeom prst="rect">
             <a:avLst/>
@@ -6519,568 +5975,35 @@
           </a:bodyPr>
           <a:lstStyle/>
           <a:p>
-            <a:pPr algn="ctr">
-              <a:lnSpc>
-                <a:spcPct val="105000"/>
-              </a:lnSpc>
-            </a:pPr>
-            <a:r>
-              <a:rPr sz="2600" b="1">
+            <a:pPr algn="l">
+              <a:lnSpc>
+                <a:spcPct val="100000"/>
+              </a:lnSpc>
+            </a:pPr>
+            <a:r>
+              <a:rPr sz="4400" b="1">
                 <a:solidFill>
                   <a:srgbClr val="FFFFFF"/>
                 </a:solidFill>
                 <a:latin typeface="Space Grotesk"/>
               </a:rPr>
-              <a:t>What is</a:t>
-            </a:r>
-          </a:p>
-          <a:p>
-            <a:pPr algn="ctr">
-              <a:lnSpc>
-                <a:spcPct val="105000"/>
-              </a:lnSpc>
-            </a:pPr>
-            <a:r>
-              <a:rPr sz="2600" b="1">
+              <a:t>MEDIA</a:t>
+            </a:r>
+          </a:p>
+          <a:p>
+            <a:pPr algn="l">
+              <a:lnSpc>
+                <a:spcPct val="100000"/>
+              </a:lnSpc>
+            </a:pPr>
+            <a:r>
+              <a:rPr sz="4400" b="1">
                 <a:solidFill>
                   <a:srgbClr val="FFFFFF"/>
                 </a:solidFill>
                 <a:latin typeface="Space Grotesk"/>
               </a:rPr>
-              <a:t>RVA Builds?</a:t>
-            </a:r>
-          </a:p>
-        </p:txBody>
-      </p:sp>
-      <p:sp>
-        <p:nvSpPr>
-          <p:cNvPr id="6" name="TextBox 5"/>
-          <p:cNvSpPr txBox="1"/>
-          <p:nvPr/>
-        </p:nvSpPr>
-        <p:spPr>
-          <a:xfrm>
-            <a:off x="411480" y="3703320"/>
-            <a:ext cx="3322216" cy="1280160"/>
-          </a:xfrm>
-          <a:prstGeom prst="rect">
-            <a:avLst/>
-          </a:prstGeom>
-          <a:noFill/>
-        </p:spPr>
-        <p:txBody>
-          <a:bodyPr wrap="square" anchor="t" lIns="0" rIns="0" tIns="0" bIns="0">
-            <a:spAutoFit/>
-          </a:bodyPr>
-          <a:lstStyle/>
-          <a:p>
-            <a:pPr algn="ctr">
-              <a:lnSpc>
-                <a:spcPct val="135000"/>
-              </a:lnSpc>
-            </a:pPr>
-            <a:r>
-              <a:rPr sz="1300" b="0">
-                <a:solidFill>
-                  <a:srgbClr val="CCCCCC"/>
-                </a:solidFill>
-                <a:latin typeface="Schibsted Grotesk"/>
-              </a:rPr>
-              <a:t>RVA Builds connects Richmond Public Schools students with paid, hands-on careers in construction and the skilled trades — before they even graduate. A Richmond Ed Fund initiative, backed by Bloomberg Philanthropies.</a:t>
-            </a:r>
-          </a:p>
-        </p:txBody>
-      </p:sp>
-      <p:cxnSp>
-        <p:nvCxnSpPr>
-          <p:cNvPr id="7" name="Connector 6"/>
-          <p:cNvCxnSpPr/>
-          <p:nvPr/>
-        </p:nvCxnSpPr>
-        <p:spPr>
-          <a:xfrm>
-            <a:off x="5150915.5" y="2331720"/>
-            <a:ext cx="6035040.0" cy="0"/>
-          </a:xfrm>
-          <a:prstGeom prst="line">
-            <a:avLst/>
-          </a:prstGeom>
-          <a:ln w="12700">
-            <a:solidFill>
-              <a:srgbClr val="E4E4E4"/>
-            </a:solidFill>
-          </a:ln>
-        </p:spPr>
-        <p:style>
-          <a:lnRef idx="2">
-            <a:schemeClr val="accent1"/>
-          </a:lnRef>
-          <a:fillRef idx="0">
-            <a:schemeClr val="accent1"/>
-          </a:fillRef>
-          <a:effectRef idx="1">
-            <a:schemeClr val="accent1"/>
-          </a:effectRef>
-          <a:fontRef idx="minor">
-            <a:schemeClr val="tx1"/>
-          </a:fontRef>
-        </p:style>
-      </p:cxnSp>
-      <p:cxnSp>
-        <p:nvCxnSpPr>
-          <p:cNvPr id="8" name="Connector 7"/>
-          <p:cNvCxnSpPr/>
-          <p:nvPr/>
-        </p:nvCxnSpPr>
-        <p:spPr>
-          <a:xfrm>
-            <a:off x="5150915.5" y="3566160"/>
-            <a:ext cx="6035040.0" cy="0"/>
-          </a:xfrm>
-          <a:prstGeom prst="line">
-            <a:avLst/>
-          </a:prstGeom>
-          <a:ln w="12700">
-            <a:solidFill>
-              <a:srgbClr val="E4E4E4"/>
-            </a:solidFill>
-          </a:ln>
-        </p:spPr>
-        <p:style>
-          <a:lnRef idx="2">
-            <a:schemeClr val="accent1"/>
-          </a:lnRef>
-          <a:fillRef idx="0">
-            <a:schemeClr val="accent1"/>
-          </a:fillRef>
-          <a:effectRef idx="1">
-            <a:schemeClr val="accent1"/>
-          </a:effectRef>
-          <a:fontRef idx="minor">
-            <a:schemeClr val="tx1"/>
-          </a:fontRef>
-        </p:style>
-      </p:cxnSp>
-      <p:sp>
-        <p:nvSpPr>
-          <p:cNvPr id="9" name="TextBox 8"/>
-          <p:cNvSpPr txBox="1"/>
-          <p:nvPr/>
-        </p:nvSpPr>
-        <p:spPr>
-          <a:xfrm>
-            <a:off x="5150915" y="2514600"/>
-            <a:ext cx="1371600" cy="548640"/>
-          </a:xfrm>
-          <a:prstGeom prst="rect">
-            <a:avLst/>
-          </a:prstGeom>
-          <a:noFill/>
-        </p:spPr>
-        <p:txBody>
-          <a:bodyPr wrap="square" anchor="t" lIns="0" rIns="0" tIns="0" bIns="0">
-            <a:spAutoFit/>
-          </a:bodyPr>
-          <a:lstStyle/>
-          <a:p>
-            <a:pPr algn="l">
-              <a:lnSpc>
-                <a:spcPct val="100000"/>
-              </a:lnSpc>
-            </a:pPr>
-            <a:r>
-              <a:rPr sz="3200" b="1">
-                <a:solidFill>
-                  <a:srgbClr val="1A1A1A"/>
-                </a:solidFill>
-                <a:latin typeface="Space Grotesk"/>
-              </a:rPr>
-              <a:t>150</a:t>
-            </a:r>
-          </a:p>
-        </p:txBody>
-      </p:sp>
-      <p:sp>
-        <p:nvSpPr>
-          <p:cNvPr id="10" name="TextBox 9"/>
-          <p:cNvSpPr txBox="1"/>
-          <p:nvPr/>
-        </p:nvSpPr>
-        <p:spPr>
-          <a:xfrm>
-            <a:off x="5150915" y="3108960"/>
-            <a:ext cx="1371600" cy="502920"/>
-          </a:xfrm>
-          <a:prstGeom prst="rect">
-            <a:avLst/>
-          </a:prstGeom>
-          <a:noFill/>
-        </p:spPr>
-        <p:txBody>
-          <a:bodyPr wrap="square" anchor="t" lIns="0" rIns="0" tIns="0" bIns="0">
-            <a:spAutoFit/>
-          </a:bodyPr>
-          <a:lstStyle/>
-          <a:p>
-            <a:pPr algn="l">
-              <a:lnSpc>
-                <a:spcPct val="115000"/>
-              </a:lnSpc>
-            </a:pPr>
-            <a:r>
-              <a:rPr sz="1050" b="0">
-                <a:solidFill>
-                  <a:srgbClr val="5A5A5A"/>
-                </a:solidFill>
-                <a:latin typeface="Schibsted Grotesk"/>
-              </a:rPr>
-              <a:t>RPS grads aimed at registered</a:t>
-            </a:r>
-          </a:p>
-          <a:p>
-            <a:pPr algn="l">
-              <a:lnSpc>
-                <a:spcPct val="115000"/>
-              </a:lnSpc>
-            </a:pPr>
-            <a:r>
-              <a:rPr sz="1050" b="0">
-                <a:solidFill>
-                  <a:srgbClr val="5A5A5A"/>
-                </a:solidFill>
-                <a:latin typeface="Schibsted Grotesk"/>
-              </a:rPr>
-              <a:t>apprenticeships in 3 years</a:t>
-            </a:r>
-          </a:p>
-        </p:txBody>
-      </p:sp>
-      <p:sp>
-        <p:nvSpPr>
-          <p:cNvPr id="11" name="TextBox 10"/>
-          <p:cNvSpPr txBox="1"/>
-          <p:nvPr/>
-        </p:nvSpPr>
-        <p:spPr>
-          <a:xfrm>
-            <a:off x="6659675" y="2514600"/>
-            <a:ext cx="1371600" cy="548640"/>
-          </a:xfrm>
-          <a:prstGeom prst="rect">
-            <a:avLst/>
-          </a:prstGeom>
-          <a:noFill/>
-        </p:spPr>
-        <p:txBody>
-          <a:bodyPr wrap="square" anchor="t" lIns="0" rIns="0" tIns="0" bIns="0">
-            <a:spAutoFit/>
-          </a:bodyPr>
-          <a:lstStyle/>
-          <a:p>
-            <a:pPr algn="l">
-              <a:lnSpc>
-                <a:spcPct val="100000"/>
-              </a:lnSpc>
-            </a:pPr>
-            <a:r>
-              <a:rPr sz="3200" b="1">
-                <a:solidFill>
-                  <a:srgbClr val="1A1A1A"/>
-                </a:solidFill>
-                <a:latin typeface="Space Grotesk"/>
-              </a:rPr>
-              <a:t>500</a:t>
-            </a:r>
-          </a:p>
-        </p:txBody>
-      </p:sp>
-      <p:sp>
-        <p:nvSpPr>
-          <p:cNvPr id="12" name="TextBox 11"/>
-          <p:cNvSpPr txBox="1"/>
-          <p:nvPr/>
-        </p:nvSpPr>
-        <p:spPr>
-          <a:xfrm>
-            <a:off x="6659675" y="3108960"/>
-            <a:ext cx="1371600" cy="502920"/>
-          </a:xfrm>
-          <a:prstGeom prst="rect">
-            <a:avLst/>
-          </a:prstGeom>
-          <a:noFill/>
-        </p:spPr>
-        <p:txBody>
-          <a:bodyPr wrap="square" anchor="t" lIns="0" rIns="0" tIns="0" bIns="0">
-            <a:spAutoFit/>
-          </a:bodyPr>
-          <a:lstStyle/>
-          <a:p>
-            <a:pPr algn="l">
-              <a:lnSpc>
-                <a:spcPct val="115000"/>
-              </a:lnSpc>
-            </a:pPr>
-            <a:r>
-              <a:rPr sz="1050" b="0">
-                <a:solidFill>
-                  <a:srgbClr val="5A5A5A"/>
-                </a:solidFill>
-                <a:latin typeface="Schibsted Grotesk"/>
-              </a:rPr>
-              <a:t>Students in paid trades</a:t>
-            </a:r>
-          </a:p>
-          <a:p>
-            <a:pPr algn="l">
-              <a:lnSpc>
-                <a:spcPct val="115000"/>
-              </a:lnSpc>
-            </a:pPr>
-            <a:r>
-              <a:rPr sz="1050" b="0">
-                <a:solidFill>
-                  <a:srgbClr val="5A5A5A"/>
-                </a:solidFill>
-                <a:latin typeface="Schibsted Grotesk"/>
-              </a:rPr>
-              <a:t>learning by 2028–29 (goal)</a:t>
-            </a:r>
-          </a:p>
-        </p:txBody>
-      </p:sp>
-      <p:sp>
-        <p:nvSpPr>
-          <p:cNvPr id="13" name="TextBox 12"/>
-          <p:cNvSpPr txBox="1"/>
-          <p:nvPr/>
-        </p:nvSpPr>
-        <p:spPr>
-          <a:xfrm>
-            <a:off x="8168435" y="2514600"/>
-            <a:ext cx="1371600" cy="548640"/>
-          </a:xfrm>
-          <a:prstGeom prst="rect">
-            <a:avLst/>
-          </a:prstGeom>
-          <a:noFill/>
-        </p:spPr>
-        <p:txBody>
-          <a:bodyPr wrap="square" anchor="t" lIns="0" rIns="0" tIns="0" bIns="0">
-            <a:spAutoFit/>
-          </a:bodyPr>
-          <a:lstStyle/>
-          <a:p>
-            <a:pPr algn="l">
-              <a:lnSpc>
-                <a:spcPct val="100000"/>
-              </a:lnSpc>
-            </a:pPr>
-            <a:r>
-              <a:rPr sz="3200" b="1">
-                <a:solidFill>
-                  <a:srgbClr val="1A1A1A"/>
-                </a:solidFill>
-                <a:latin typeface="Space Grotesk"/>
-              </a:rPr>
-              <a:t>17</a:t>
-            </a:r>
-          </a:p>
-        </p:txBody>
-      </p:sp>
-      <p:sp>
-        <p:nvSpPr>
-          <p:cNvPr id="14" name="TextBox 13"/>
-          <p:cNvSpPr txBox="1"/>
-          <p:nvPr/>
-        </p:nvSpPr>
-        <p:spPr>
-          <a:xfrm>
-            <a:off x="8168435" y="3108960"/>
-            <a:ext cx="1371600" cy="502920"/>
-          </a:xfrm>
-          <a:prstGeom prst="rect">
-            <a:avLst/>
-          </a:prstGeom>
-          <a:noFill/>
-        </p:spPr>
-        <p:txBody>
-          <a:bodyPr wrap="square" anchor="t" lIns="0" rIns="0" tIns="0" bIns="0">
-            <a:spAutoFit/>
-          </a:bodyPr>
-          <a:lstStyle/>
-          <a:p>
-            <a:pPr algn="l">
-              <a:lnSpc>
-                <a:spcPct val="115000"/>
-              </a:lnSpc>
-            </a:pPr>
-            <a:r>
-              <a:rPr sz="1050" b="0">
-                <a:solidFill>
-                  <a:srgbClr val="5A5A5A"/>
-                </a:solidFill>
-                <a:latin typeface="Schibsted Grotesk"/>
-              </a:rPr>
-              <a:t>Partners: schools, the city,</a:t>
-            </a:r>
-          </a:p>
-          <a:p>
-            <a:pPr algn="l">
-              <a:lnSpc>
-                <a:spcPct val="115000"/>
-              </a:lnSpc>
-            </a:pPr>
-            <a:r>
-              <a:rPr sz="1050" b="0">
-                <a:solidFill>
-                  <a:srgbClr val="5A5A5A"/>
-                </a:solidFill>
-                <a:latin typeface="Schibsted Grotesk"/>
-              </a:rPr>
-              <a:t>business &amp; unions</a:t>
-            </a:r>
-          </a:p>
-        </p:txBody>
-      </p:sp>
-      <p:sp>
-        <p:nvSpPr>
-          <p:cNvPr id="15" name="TextBox 14"/>
-          <p:cNvSpPr txBox="1"/>
-          <p:nvPr/>
-        </p:nvSpPr>
-        <p:spPr>
-          <a:xfrm>
-            <a:off x="9677195" y="2514600"/>
-            <a:ext cx="1371600" cy="548640"/>
-          </a:xfrm>
-          <a:prstGeom prst="rect">
-            <a:avLst/>
-          </a:prstGeom>
-          <a:noFill/>
-        </p:spPr>
-        <p:txBody>
-          <a:bodyPr wrap="square" anchor="t" lIns="0" rIns="0" tIns="0" bIns="0">
-            <a:spAutoFit/>
-          </a:bodyPr>
-          <a:lstStyle/>
-          <a:p>
-            <a:pPr algn="l">
-              <a:lnSpc>
-                <a:spcPct val="100000"/>
-              </a:lnSpc>
-            </a:pPr>
-            <a:r>
-              <a:rPr sz="3200" b="1">
-                <a:solidFill>
-                  <a:srgbClr val="1A1A1A"/>
-                </a:solidFill>
-                <a:latin typeface="Space Grotesk"/>
-              </a:rPr>
-              <a:t>120+</a:t>
-            </a:r>
-          </a:p>
-        </p:txBody>
-      </p:sp>
-      <p:sp>
-        <p:nvSpPr>
-          <p:cNvPr id="16" name="TextBox 15"/>
-          <p:cNvSpPr txBox="1"/>
-          <p:nvPr/>
-        </p:nvSpPr>
-        <p:spPr>
-          <a:xfrm>
-            <a:off x="9677195" y="3108960"/>
-            <a:ext cx="1371600" cy="502920"/>
-          </a:xfrm>
-          <a:prstGeom prst="rect">
-            <a:avLst/>
-          </a:prstGeom>
-          <a:noFill/>
-        </p:spPr>
-        <p:txBody>
-          <a:bodyPr wrap="square" anchor="t" lIns="0" rIns="0" tIns="0" bIns="0">
-            <a:spAutoFit/>
-          </a:bodyPr>
-          <a:lstStyle/>
-          <a:p>
-            <a:pPr algn="l">
-              <a:lnSpc>
-                <a:spcPct val="115000"/>
-              </a:lnSpc>
-            </a:pPr>
-            <a:r>
-              <a:rPr sz="1050" b="0">
-                <a:solidFill>
-                  <a:srgbClr val="5A5A5A"/>
-                </a:solidFill>
-                <a:latin typeface="Schibsted Grotesk"/>
-              </a:rPr>
-              <a:t>Paid work-based learning</a:t>
-            </a:r>
-          </a:p>
-          <a:p>
-            <a:pPr algn="l">
-              <a:lnSpc>
-                <a:spcPct val="115000"/>
-              </a:lnSpc>
-            </a:pPr>
-            <a:r>
-              <a:rPr sz="1050" b="0">
-                <a:solidFill>
-                  <a:srgbClr val="5A5A5A"/>
-                </a:solidFill>
-                <a:latin typeface="Schibsted Grotesk"/>
-              </a:rPr>
-              <a:t>hours per student</a:t>
-            </a:r>
-          </a:p>
-        </p:txBody>
-      </p:sp>
-      <p:sp>
-        <p:nvSpPr>
-          <p:cNvPr id="17" name="TextBox 16"/>
-          <p:cNvSpPr txBox="1"/>
-          <p:nvPr/>
-        </p:nvSpPr>
-        <p:spPr>
-          <a:xfrm>
-            <a:off x="4145176" y="4023360"/>
-            <a:ext cx="8046519" cy="548640"/>
-          </a:xfrm>
-          <a:prstGeom prst="rect">
-            <a:avLst/>
-          </a:prstGeom>
-          <a:noFill/>
-        </p:spPr>
-        <p:txBody>
-          <a:bodyPr wrap="square" anchor="t" lIns="0" rIns="0">
-            <a:spAutoFit/>
-          </a:bodyPr>
-          <a:lstStyle/>
-          <a:p>
-            <a:pPr algn="ctr">
-              <a:lnSpc>
-                <a:spcPct val="100000"/>
-              </a:lnSpc>
-            </a:pPr>
-            <a:r>
-              <a:rPr sz="1900" b="1">
-                <a:solidFill>
-                  <a:srgbClr val="1A1A1A"/>
-                </a:solidFill>
-                <a:latin typeface="Space Grotesk"/>
-              </a:rPr>
-              <a:t>Build a career in the trades, </a:t>
-            </a:r>
-            <a:r>
-              <a:rPr sz="1900" b="1">
-                <a:solidFill>
-                  <a:srgbClr val="F15C2C"/>
-                </a:solidFill>
-                <a:latin typeface="Space Grotesk"/>
-              </a:rPr>
-              <a:t>before you graduate.</a:t>
+              <a:t>KIT</a:t>
             </a:r>
           </a:p>
         </p:txBody>
@@ -7264,7 +6187,7 @@
                 </a:solidFill>
                 <a:latin typeface="Space Grotesk"/>
               </a:rPr>
-              <a:t>The</a:t>
+              <a:t>Primary Logo</a:t>
             </a:r>
           </a:p>
           <a:p>
@@ -7280,7 +6203,7 @@
                 </a:solidFill>
                 <a:latin typeface="Space Grotesk"/>
               </a:rPr>
-              <a:t>Logo</a:t>
+              <a:t>Reproduction</a:t>
             </a:r>
           </a:p>
         </p:txBody>
@@ -7319,7 +6242,7 @@
                 </a:solidFill>
                 <a:latin typeface="Schibsted Grotesk"/>
               </a:rPr>
-              <a:t>A construction crane lifting the "VA" cube — building Richmond's future, brick by brick.</a:t>
+              <a:t>The primary logo is full color on a white background. Use this version wherever possible.</a:t>
             </a:r>
           </a:p>
         </p:txBody>
@@ -7425,6 +6348,227 @@
             <a:avLst/>
           </a:prstGeom>
           <a:solidFill>
+            <a:srgbClr val="F6F6F6"/>
+          </a:solidFill>
+          <a:ln>
+            <a:noFill/>
+          </a:ln>
+          <a:effectLst/>
+        </p:spPr>
+        <p:style>
+          <a:lnRef idx="1">
+            <a:schemeClr val="accent1"/>
+          </a:lnRef>
+          <a:fillRef idx="3">
+            <a:schemeClr val="accent1"/>
+          </a:fillRef>
+          <a:effectRef idx="2">
+            <a:schemeClr val="accent1"/>
+          </a:effectRef>
+          <a:fontRef idx="minor">
+            <a:schemeClr val="lt1"/>
+          </a:fontRef>
+        </p:style>
+        <p:txBody>
+          <a:bodyPr rtlCol="0" anchor="ctr"/>
+          <a:lstStyle/>
+          <a:p>
+            <a:pPr algn="ctr"/>
+          </a:p>
+        </p:txBody>
+      </p:sp>
+      <p:sp>
+        <p:nvSpPr>
+          <p:cNvPr id="4" name="TextBox 3"/>
+          <p:cNvSpPr txBox="1"/>
+          <p:nvPr/>
+        </p:nvSpPr>
+        <p:spPr>
+          <a:xfrm>
+            <a:off x="411480" y="2331720"/>
+            <a:ext cx="3322216" cy="274320"/>
+          </a:xfrm>
+          <a:prstGeom prst="rect">
+            <a:avLst/>
+          </a:prstGeom>
+          <a:noFill/>
+        </p:spPr>
+        <p:txBody>
+          <a:bodyPr wrap="square" anchor="t" lIns="0" rIns="0" tIns="0" bIns="0">
+            <a:spAutoFit/>
+          </a:bodyPr>
+          <a:lstStyle/>
+          <a:p>
+            <a:pPr algn="ctr">
+              <a:lnSpc>
+                <a:spcPct val="100000"/>
+              </a:lnSpc>
+            </a:pPr>
+            <a:r>
+              <a:rPr sz="1200" b="1">
+                <a:solidFill>
+                  <a:srgbClr val="F15C2C"/>
+                </a:solidFill>
+                <a:latin typeface="Space Grotesk"/>
+              </a:rPr>
+              <a:t>02</a:t>
+            </a:r>
+          </a:p>
+        </p:txBody>
+      </p:sp>
+      <p:sp>
+        <p:nvSpPr>
+          <p:cNvPr id="5" name="TextBox 4"/>
+          <p:cNvSpPr txBox="1"/>
+          <p:nvPr/>
+        </p:nvSpPr>
+        <p:spPr>
+          <a:xfrm>
+            <a:off x="411480" y="2651760"/>
+            <a:ext cx="3322216" cy="1005840"/>
+          </a:xfrm>
+          <a:prstGeom prst="rect">
+            <a:avLst/>
+          </a:prstGeom>
+          <a:noFill/>
+        </p:spPr>
+        <p:txBody>
+          <a:bodyPr wrap="square" anchor="t" lIns="0" rIns="0" tIns="0" bIns="0">
+            <a:spAutoFit/>
+          </a:bodyPr>
+          <a:lstStyle/>
+          <a:p>
+            <a:pPr algn="ctr">
+              <a:lnSpc>
+                <a:spcPct val="105000"/>
+              </a:lnSpc>
+            </a:pPr>
+            <a:r>
+              <a:rPr sz="2600" b="1">
+                <a:solidFill>
+                  <a:srgbClr val="1A1A1A"/>
+                </a:solidFill>
+                <a:latin typeface="Space Grotesk"/>
+              </a:rPr>
+              <a:t>Logo</a:t>
+            </a:r>
+          </a:p>
+          <a:p>
+            <a:pPr algn="ctr">
+              <a:lnSpc>
+                <a:spcPct val="105000"/>
+              </a:lnSpc>
+            </a:pPr>
+            <a:r>
+              <a:rPr sz="2600" b="1">
+                <a:solidFill>
+                  <a:srgbClr val="1A1A1A"/>
+                </a:solidFill>
+                <a:latin typeface="Space Grotesk"/>
+              </a:rPr>
+              <a:t>Variations</a:t>
+            </a:r>
+          </a:p>
+        </p:txBody>
+      </p:sp>
+      <p:sp>
+        <p:nvSpPr>
+          <p:cNvPr id="6" name="TextBox 5"/>
+          <p:cNvSpPr txBox="1"/>
+          <p:nvPr/>
+        </p:nvSpPr>
+        <p:spPr>
+          <a:xfrm>
+            <a:off x="411480" y="3703320"/>
+            <a:ext cx="3322216" cy="1280160"/>
+          </a:xfrm>
+          <a:prstGeom prst="rect">
+            <a:avLst/>
+          </a:prstGeom>
+          <a:noFill/>
+        </p:spPr>
+        <p:txBody>
+          <a:bodyPr wrap="square" anchor="t" lIns="0" rIns="0" tIns="0" bIns="0">
+            <a:spAutoFit/>
+          </a:bodyPr>
+          <a:lstStyle/>
+          <a:p>
+            <a:pPr algn="ctr">
+              <a:lnSpc>
+                <a:spcPct val="135000"/>
+              </a:lnSpc>
+            </a:pPr>
+            <a:r>
+              <a:rPr sz="1300" b="0">
+                <a:solidFill>
+                  <a:srgbClr val="5A5A5A"/>
+                </a:solidFill>
+                <a:latin typeface="Schibsted Grotesk"/>
+              </a:rPr>
+              <a:t>The logo can also be used on a contextually colored background, as long as there's contrast.</a:t>
+            </a:r>
+          </a:p>
+        </p:txBody>
+      </p:sp>
+      <p:sp>
+        <p:nvSpPr>
+          <p:cNvPr id="7" name="Rectangle 6"/>
+          <p:cNvSpPr/>
+          <p:nvPr/>
+        </p:nvSpPr>
+        <p:spPr>
+          <a:xfrm>
+            <a:off x="4145176" y="0"/>
+            <a:ext cx="8046519" cy="3429000"/>
+          </a:xfrm>
+          <a:prstGeom prst="rect">
+            <a:avLst/>
+          </a:prstGeom>
+          <a:solidFill>
+            <a:srgbClr val="F15C2C"/>
+          </a:solidFill>
+          <a:ln>
+            <a:noFill/>
+          </a:ln>
+          <a:effectLst/>
+        </p:spPr>
+        <p:style>
+          <a:lnRef idx="1">
+            <a:schemeClr val="accent1"/>
+          </a:lnRef>
+          <a:fillRef idx="3">
+            <a:schemeClr val="accent1"/>
+          </a:fillRef>
+          <a:effectRef idx="2">
+            <a:schemeClr val="accent1"/>
+          </a:effectRef>
+          <a:fontRef idx="minor">
+            <a:schemeClr val="lt1"/>
+          </a:fontRef>
+        </p:style>
+        <p:txBody>
+          <a:bodyPr rtlCol="0" anchor="ctr"/>
+          <a:lstStyle/>
+          <a:p>
+            <a:pPr algn="ctr"/>
+          </a:p>
+        </p:txBody>
+      </p:sp>
+      <p:sp>
+        <p:nvSpPr>
+          <p:cNvPr id="8" name="Rectangle 7"/>
+          <p:cNvSpPr/>
+          <p:nvPr/>
+        </p:nvSpPr>
+        <p:spPr>
+          <a:xfrm>
+            <a:off x="4145176" y="3429000"/>
+            <a:ext cx="8046519" cy="3429000"/>
+          </a:xfrm>
+          <a:prstGeom prst="rect">
+            <a:avLst/>
+          </a:prstGeom>
+          <a:solidFill>
             <a:srgbClr val="1A1A1A"/>
           </a:solidFill>
           <a:ln>
@@ -7454,142 +6598,9 @@
           </a:p>
         </p:txBody>
       </p:sp>
-      <p:sp>
-        <p:nvSpPr>
-          <p:cNvPr id="4" name="TextBox 3"/>
-          <p:cNvSpPr txBox="1"/>
-          <p:nvPr/>
-        </p:nvSpPr>
-        <p:spPr>
-          <a:xfrm>
-            <a:off x="411480" y="2331720"/>
-            <a:ext cx="3322216" cy="274320"/>
-          </a:xfrm>
-          <a:prstGeom prst="rect">
-            <a:avLst/>
-          </a:prstGeom>
-          <a:noFill/>
-        </p:spPr>
-        <p:txBody>
-          <a:bodyPr wrap="square" anchor="t" lIns="0" rIns="0" tIns="0" bIns="0">
-            <a:spAutoFit/>
-          </a:bodyPr>
-          <a:lstStyle/>
-          <a:p>
-            <a:pPr algn="ctr">
-              <a:lnSpc>
-                <a:spcPct val="100000"/>
-              </a:lnSpc>
-            </a:pPr>
-            <a:r>
-              <a:rPr sz="1200" b="1">
-                <a:solidFill>
-                  <a:srgbClr val="F15C2C"/>
-                </a:solidFill>
-                <a:latin typeface="Space Grotesk"/>
-              </a:rPr>
-              <a:t>02</a:t>
-            </a:r>
-          </a:p>
-        </p:txBody>
-      </p:sp>
-      <p:sp>
-        <p:nvSpPr>
-          <p:cNvPr id="5" name="TextBox 4"/>
-          <p:cNvSpPr txBox="1"/>
-          <p:nvPr/>
-        </p:nvSpPr>
-        <p:spPr>
-          <a:xfrm>
-            <a:off x="411480" y="2651760"/>
-            <a:ext cx="3322216" cy="1005840"/>
-          </a:xfrm>
-          <a:prstGeom prst="rect">
-            <a:avLst/>
-          </a:prstGeom>
-          <a:noFill/>
-        </p:spPr>
-        <p:txBody>
-          <a:bodyPr wrap="square" anchor="t" lIns="0" rIns="0" tIns="0" bIns="0">
-            <a:spAutoFit/>
-          </a:bodyPr>
-          <a:lstStyle/>
-          <a:p>
-            <a:pPr algn="ctr">
-              <a:lnSpc>
-                <a:spcPct val="105000"/>
-              </a:lnSpc>
-            </a:pPr>
-            <a:r>
-              <a:rPr sz="2600" b="1">
-                <a:solidFill>
-                  <a:srgbClr val="FFFFFF"/>
-                </a:solidFill>
-                <a:latin typeface="Space Grotesk"/>
-              </a:rPr>
-              <a:t>Primary Logo</a:t>
-            </a:r>
-          </a:p>
-          <a:p>
-            <a:pPr algn="ctr">
-              <a:lnSpc>
-                <a:spcPct val="105000"/>
-              </a:lnSpc>
-            </a:pPr>
-            <a:r>
-              <a:rPr sz="2600" b="1">
-                <a:solidFill>
-                  <a:srgbClr val="FFFFFF"/>
-                </a:solidFill>
-                <a:latin typeface="Space Grotesk"/>
-              </a:rPr>
-              <a:t>Reproduction</a:t>
-            </a:r>
-          </a:p>
-        </p:txBody>
-      </p:sp>
-      <p:sp>
-        <p:nvSpPr>
-          <p:cNvPr id="6" name="TextBox 5"/>
-          <p:cNvSpPr txBox="1"/>
-          <p:nvPr/>
-        </p:nvSpPr>
-        <p:spPr>
-          <a:xfrm>
-            <a:off x="411480" y="3703320"/>
-            <a:ext cx="3322216" cy="1280160"/>
-          </a:xfrm>
-          <a:prstGeom prst="rect">
-            <a:avLst/>
-          </a:prstGeom>
-          <a:noFill/>
-        </p:spPr>
-        <p:txBody>
-          <a:bodyPr wrap="square" anchor="t" lIns="0" rIns="0" tIns="0" bIns="0">
-            <a:spAutoFit/>
-          </a:bodyPr>
-          <a:lstStyle/>
-          <a:p>
-            <a:pPr algn="ctr">
-              <a:lnSpc>
-                <a:spcPct val="135000"/>
-              </a:lnSpc>
-            </a:pPr>
-            <a:r>
-              <a:rPr sz="1300" b="0">
-                <a:solidFill>
-                  <a:srgbClr val="CCCCCC"/>
-                </a:solidFill>
-                <a:latin typeface="Schibsted Grotesk"/>
-              </a:rPr>
-              <a:t>The primary logo is full color on a white background. Use this version wherever possible.</a:t>
-            </a:r>
-          </a:p>
-        </p:txBody>
-      </p:sp>
       <p:pic>
         <p:nvPicPr>
-          <p:cNvPr id="7" name="Picture 6" descr="rva-builds-logo-dark-color.png"/>
+          <p:cNvPr id="9" name="Picture 8" descr="rva-builds-logo-light.png"/>
           <p:cNvPicPr>
             <a:picLocks noChangeAspect="1"/>
           </p:cNvPicPr>
@@ -7603,7 +6614,31 @@
         </p:blipFill>
         <p:spPr>
           <a:xfrm>
-            <a:off x="4145176" y="2273737"/>
+            <a:off x="4145176" y="946457"/>
+            <a:ext cx="8046519" cy="1536085"/>
+          </a:xfrm>
+          <a:prstGeom prst="rect">
+            <a:avLst/>
+          </a:prstGeom>
+        </p:spPr>
+      </p:pic>
+      <p:pic>
+        <p:nvPicPr>
+          <p:cNvPr id="10" name="Picture 9" descr="rva-builds-logo-light-color.png"/>
+          <p:cNvPicPr>
+            <a:picLocks noChangeAspect="1"/>
+          </p:cNvPicPr>
+          <p:nvPr/>
+        </p:nvPicPr>
+        <p:blipFill>
+          <a:blip r:embed="rId3"/>
+          <a:stretch>
+            <a:fillRect/>
+          </a:stretch>
+        </p:blipFill>
+        <p:spPr>
+          <a:xfrm>
+            <a:off x="4145176" y="3988237"/>
             <a:ext cx="8046519" cy="2310525"/>
           </a:xfrm>
           <a:prstGeom prst="rect">
@@ -7688,6 +6723,319 @@
             <a:avLst/>
           </a:prstGeom>
           <a:solidFill>
+            <a:srgbClr val="1A1A1A"/>
+          </a:solidFill>
+          <a:ln>
+            <a:noFill/>
+          </a:ln>
+          <a:effectLst/>
+        </p:spPr>
+        <p:style>
+          <a:lnRef idx="1">
+            <a:schemeClr val="accent1"/>
+          </a:lnRef>
+          <a:fillRef idx="3">
+            <a:schemeClr val="accent1"/>
+          </a:fillRef>
+          <a:effectRef idx="2">
+            <a:schemeClr val="accent1"/>
+          </a:effectRef>
+          <a:fontRef idx="minor">
+            <a:schemeClr val="lt1"/>
+          </a:fontRef>
+        </p:style>
+        <p:txBody>
+          <a:bodyPr rtlCol="0" anchor="ctr"/>
+          <a:lstStyle/>
+          <a:p>
+            <a:pPr algn="ctr"/>
+          </a:p>
+        </p:txBody>
+      </p:sp>
+      <p:sp>
+        <p:nvSpPr>
+          <p:cNvPr id="4" name="TextBox 3"/>
+          <p:cNvSpPr txBox="1"/>
+          <p:nvPr/>
+        </p:nvSpPr>
+        <p:spPr>
+          <a:xfrm>
+            <a:off x="411480" y="2331720"/>
+            <a:ext cx="3322216" cy="274320"/>
+          </a:xfrm>
+          <a:prstGeom prst="rect">
+            <a:avLst/>
+          </a:prstGeom>
+          <a:noFill/>
+        </p:spPr>
+        <p:txBody>
+          <a:bodyPr wrap="square" anchor="t" lIns="0" rIns="0" tIns="0" bIns="0">
+            <a:spAutoFit/>
+          </a:bodyPr>
+          <a:lstStyle/>
+          <a:p>
+            <a:pPr algn="ctr">
+              <a:lnSpc>
+                <a:spcPct val="100000"/>
+              </a:lnSpc>
+            </a:pPr>
+            <a:r>
+              <a:rPr sz="1200" b="1">
+                <a:solidFill>
+                  <a:srgbClr val="F15C2C"/>
+                </a:solidFill>
+                <a:latin typeface="Space Grotesk"/>
+              </a:rPr>
+              <a:t>02</a:t>
+            </a:r>
+          </a:p>
+        </p:txBody>
+      </p:sp>
+      <p:sp>
+        <p:nvSpPr>
+          <p:cNvPr id="5" name="TextBox 4"/>
+          <p:cNvSpPr txBox="1"/>
+          <p:nvPr/>
+        </p:nvSpPr>
+        <p:spPr>
+          <a:xfrm>
+            <a:off x="411480" y="2651760"/>
+            <a:ext cx="3322216" cy="1005840"/>
+          </a:xfrm>
+          <a:prstGeom prst="rect">
+            <a:avLst/>
+          </a:prstGeom>
+          <a:noFill/>
+        </p:spPr>
+        <p:txBody>
+          <a:bodyPr wrap="square" anchor="t" lIns="0" rIns="0" tIns="0" bIns="0">
+            <a:spAutoFit/>
+          </a:bodyPr>
+          <a:lstStyle/>
+          <a:p>
+            <a:pPr algn="ctr">
+              <a:lnSpc>
+                <a:spcPct val="105000"/>
+              </a:lnSpc>
+            </a:pPr>
+            <a:r>
+              <a:rPr sz="2600" b="1">
+                <a:solidFill>
+                  <a:srgbClr val="FFFFFF"/>
+                </a:solidFill>
+                <a:latin typeface="Space Grotesk"/>
+              </a:rPr>
+              <a:t>Stacked</a:t>
+            </a:r>
+          </a:p>
+          <a:p>
+            <a:pPr algn="ctr">
+              <a:lnSpc>
+                <a:spcPct val="105000"/>
+              </a:lnSpc>
+            </a:pPr>
+            <a:r>
+              <a:rPr sz="2600" b="1">
+                <a:solidFill>
+                  <a:srgbClr val="FFFFFF"/>
+                </a:solidFill>
+                <a:latin typeface="Space Grotesk"/>
+              </a:rPr>
+              <a:t>Lockup</a:t>
+            </a:r>
+          </a:p>
+        </p:txBody>
+      </p:sp>
+      <p:sp>
+        <p:nvSpPr>
+          <p:cNvPr id="6" name="TextBox 5"/>
+          <p:cNvSpPr txBox="1"/>
+          <p:nvPr/>
+        </p:nvSpPr>
+        <p:spPr>
+          <a:xfrm>
+            <a:off x="411480" y="3703320"/>
+            <a:ext cx="3322216" cy="1280160"/>
+          </a:xfrm>
+          <a:prstGeom prst="rect">
+            <a:avLst/>
+          </a:prstGeom>
+          <a:noFill/>
+        </p:spPr>
+        <p:txBody>
+          <a:bodyPr wrap="square" anchor="t" lIns="0" rIns="0" tIns="0" bIns="0">
+            <a:spAutoFit/>
+          </a:bodyPr>
+          <a:lstStyle/>
+          <a:p>
+            <a:pPr algn="ctr">
+              <a:lnSpc>
+                <a:spcPct val="135000"/>
+              </a:lnSpc>
+            </a:pPr>
+            <a:r>
+              <a:rPr sz="1300" b="0">
+                <a:solidFill>
+                  <a:srgbClr val="CCCCCC"/>
+                </a:solidFill>
+                <a:latin typeface="Schibsted Grotesk"/>
+              </a:rPr>
+              <a:t>For square or vertical placements — social avatars, signage, mobile headers.</a:t>
+            </a:r>
+          </a:p>
+        </p:txBody>
+      </p:sp>
+      <p:sp>
+        <p:nvSpPr>
+          <p:cNvPr id="7" name="Rectangle 6"/>
+          <p:cNvSpPr/>
+          <p:nvPr/>
+        </p:nvSpPr>
+        <p:spPr>
+          <a:xfrm>
+            <a:off x="4145176" y="0"/>
+            <a:ext cx="4023259" cy="3429000"/>
+          </a:xfrm>
+          <a:prstGeom prst="rect">
+            <a:avLst/>
+          </a:prstGeom>
+          <a:solidFill>
+            <a:srgbClr val="FFFFFF"/>
+          </a:solidFill>
+          <a:ln>
+            <a:noFill/>
+          </a:ln>
+          <a:effectLst/>
+        </p:spPr>
+        <p:style>
+          <a:lnRef idx="1">
+            <a:schemeClr val="accent1"/>
+          </a:lnRef>
+          <a:fillRef idx="3">
+            <a:schemeClr val="accent1"/>
+          </a:fillRef>
+          <a:effectRef idx="2">
+            <a:schemeClr val="accent1"/>
+          </a:effectRef>
+          <a:fontRef idx="minor">
+            <a:schemeClr val="lt1"/>
+          </a:fontRef>
+        </p:style>
+        <p:txBody>
+          <a:bodyPr rtlCol="0" anchor="ctr"/>
+          <a:lstStyle/>
+          <a:p>
+            <a:pPr algn="ctr"/>
+          </a:p>
+        </p:txBody>
+      </p:sp>
+      <p:pic>
+        <p:nvPicPr>
+          <p:cNvPr id="8" name="Picture 7" descr="rva-builds-logo-stacked-dark-color.png"/>
+          <p:cNvPicPr>
+            <a:picLocks noChangeAspect="1"/>
+          </p:cNvPicPr>
+          <p:nvPr/>
+        </p:nvPicPr>
+        <p:blipFill>
+          <a:blip r:embed="rId2"/>
+          <a:stretch>
+            <a:fillRect/>
+          </a:stretch>
+        </p:blipFill>
+        <p:spPr>
+          <a:xfrm>
+            <a:off x="4145176" y="617248"/>
+            <a:ext cx="4023259" cy="2194504"/>
+          </a:xfrm>
+          <a:prstGeom prst="rect">
+            <a:avLst/>
+          </a:prstGeom>
+        </p:spPr>
+      </p:pic>
+      <p:sp>
+        <p:nvSpPr>
+          <p:cNvPr id="9" name="Rectangle 8"/>
+          <p:cNvSpPr/>
+          <p:nvPr/>
+        </p:nvSpPr>
+        <p:spPr>
+          <a:xfrm>
+            <a:off x="8168435" y="0"/>
+            <a:ext cx="4023259" cy="3429000"/>
+          </a:xfrm>
+          <a:prstGeom prst="rect">
+            <a:avLst/>
+          </a:prstGeom>
+          <a:solidFill>
+            <a:srgbClr val="1A1A1A"/>
+          </a:solidFill>
+          <a:ln>
+            <a:noFill/>
+          </a:ln>
+          <a:effectLst/>
+        </p:spPr>
+        <p:style>
+          <a:lnRef idx="1">
+            <a:schemeClr val="accent1"/>
+          </a:lnRef>
+          <a:fillRef idx="3">
+            <a:schemeClr val="accent1"/>
+          </a:fillRef>
+          <a:effectRef idx="2">
+            <a:schemeClr val="accent1"/>
+          </a:effectRef>
+          <a:fontRef idx="minor">
+            <a:schemeClr val="lt1"/>
+          </a:fontRef>
+        </p:style>
+        <p:txBody>
+          <a:bodyPr rtlCol="0" anchor="ctr"/>
+          <a:lstStyle/>
+          <a:p>
+            <a:pPr algn="ctr"/>
+          </a:p>
+        </p:txBody>
+      </p:sp>
+      <p:pic>
+        <p:nvPicPr>
+          <p:cNvPr id="10" name="Picture 9" descr="rva-builds-logo-stacked-light-color.png"/>
+          <p:cNvPicPr>
+            <a:picLocks noChangeAspect="1"/>
+          </p:cNvPicPr>
+          <p:nvPr/>
+        </p:nvPicPr>
+        <p:blipFill>
+          <a:blip r:embed="rId3"/>
+          <a:stretch>
+            <a:fillRect/>
+          </a:stretch>
+        </p:blipFill>
+        <p:spPr>
+          <a:xfrm>
+            <a:off x="8168435" y="617248"/>
+            <a:ext cx="4023259" cy="2194504"/>
+          </a:xfrm>
+          <a:prstGeom prst="rect">
+            <a:avLst/>
+          </a:prstGeom>
+        </p:spPr>
+      </p:pic>
+      <p:sp>
+        <p:nvSpPr>
+          <p:cNvPr id="11" name="Rectangle 10"/>
+          <p:cNvSpPr/>
+          <p:nvPr/>
+        </p:nvSpPr>
+        <p:spPr>
+          <a:xfrm>
+            <a:off x="4145176" y="3429000"/>
+            <a:ext cx="4023259" cy="3429000"/>
+          </a:xfrm>
+          <a:prstGeom prst="rect">
+            <a:avLst/>
+          </a:prstGeom>
+          <a:solidFill>
             <a:srgbClr val="F6F6F6"/>
           </a:solidFill>
           <a:ln>
@@ -7717,149 +7065,40 @@
           </a:p>
         </p:txBody>
       </p:sp>
-      <p:sp>
-        <p:nvSpPr>
-          <p:cNvPr id="4" name="TextBox 3"/>
-          <p:cNvSpPr txBox="1"/>
-          <p:nvPr/>
-        </p:nvSpPr>
-        <p:spPr>
-          <a:xfrm>
-            <a:off x="411480" y="2331720"/>
-            <a:ext cx="3322216" cy="274320"/>
-          </a:xfrm>
-          <a:prstGeom prst="rect">
-            <a:avLst/>
-          </a:prstGeom>
-          <a:noFill/>
-        </p:spPr>
-        <p:txBody>
-          <a:bodyPr wrap="square" anchor="t" lIns="0" rIns="0" tIns="0" bIns="0">
-            <a:spAutoFit/>
-          </a:bodyPr>
-          <a:lstStyle/>
-          <a:p>
-            <a:pPr algn="ctr">
-              <a:lnSpc>
-                <a:spcPct val="100000"/>
-              </a:lnSpc>
-            </a:pPr>
-            <a:r>
-              <a:rPr sz="1200" b="1">
-                <a:solidFill>
-                  <a:srgbClr val="F15C2C"/>
-                </a:solidFill>
-                <a:latin typeface="Space Grotesk"/>
-              </a:rPr>
-              <a:t>02</a:t>
-            </a:r>
-          </a:p>
-        </p:txBody>
-      </p:sp>
-      <p:sp>
-        <p:nvSpPr>
-          <p:cNvPr id="5" name="TextBox 4"/>
-          <p:cNvSpPr txBox="1"/>
-          <p:nvPr/>
-        </p:nvSpPr>
-        <p:spPr>
-          <a:xfrm>
-            <a:off x="411480" y="2651760"/>
-            <a:ext cx="3322216" cy="1005840"/>
-          </a:xfrm>
-          <a:prstGeom prst="rect">
-            <a:avLst/>
-          </a:prstGeom>
-          <a:noFill/>
-        </p:spPr>
-        <p:txBody>
-          <a:bodyPr wrap="square" anchor="t" lIns="0" rIns="0" tIns="0" bIns="0">
-            <a:spAutoFit/>
-          </a:bodyPr>
-          <a:lstStyle/>
-          <a:p>
-            <a:pPr algn="ctr">
-              <a:lnSpc>
-                <a:spcPct val="105000"/>
-              </a:lnSpc>
-            </a:pPr>
-            <a:r>
-              <a:rPr sz="2600" b="1">
-                <a:solidFill>
-                  <a:srgbClr val="1A1A1A"/>
-                </a:solidFill>
-                <a:latin typeface="Space Grotesk"/>
-              </a:rPr>
-              <a:t>Logo</a:t>
-            </a:r>
-          </a:p>
-          <a:p>
-            <a:pPr algn="ctr">
-              <a:lnSpc>
-                <a:spcPct val="105000"/>
-              </a:lnSpc>
-            </a:pPr>
-            <a:r>
-              <a:rPr sz="2600" b="1">
-                <a:solidFill>
-                  <a:srgbClr val="1A1A1A"/>
-                </a:solidFill>
-                <a:latin typeface="Space Grotesk"/>
-              </a:rPr>
-              <a:t>Variations</a:t>
-            </a:r>
-          </a:p>
-        </p:txBody>
-      </p:sp>
-      <p:sp>
-        <p:nvSpPr>
-          <p:cNvPr id="6" name="TextBox 5"/>
-          <p:cNvSpPr txBox="1"/>
-          <p:nvPr/>
-        </p:nvSpPr>
-        <p:spPr>
-          <a:xfrm>
-            <a:off x="411480" y="3703320"/>
-            <a:ext cx="3322216" cy="1280160"/>
-          </a:xfrm>
-          <a:prstGeom prst="rect">
-            <a:avLst/>
-          </a:prstGeom>
-          <a:noFill/>
-        </p:spPr>
-        <p:txBody>
-          <a:bodyPr wrap="square" anchor="t" lIns="0" rIns="0" tIns="0" bIns="0">
-            <a:spAutoFit/>
-          </a:bodyPr>
-          <a:lstStyle/>
-          <a:p>
-            <a:pPr algn="ctr">
-              <a:lnSpc>
-                <a:spcPct val="135000"/>
-              </a:lnSpc>
-            </a:pPr>
-            <a:r>
-              <a:rPr sz="1300" b="0">
-                <a:solidFill>
-                  <a:srgbClr val="5A5A5A"/>
-                </a:solidFill>
-                <a:latin typeface="Schibsted Grotesk"/>
-              </a:rPr>
-              <a:t>The logo can also be used on a contextually colored background, as long as there's contrast.</a:t>
-            </a:r>
-          </a:p>
-        </p:txBody>
-      </p:sp>
-      <p:sp>
-        <p:nvSpPr>
-          <p:cNvPr id="7" name="Rectangle 6"/>
+      <p:pic>
+        <p:nvPicPr>
+          <p:cNvPr id="12" name="Picture 11" descr="rva-builds-logo-stacked-dark.png"/>
+          <p:cNvPicPr>
+            <a:picLocks noChangeAspect="1"/>
+          </p:cNvPicPr>
+          <p:nvPr/>
+        </p:nvPicPr>
+        <p:blipFill>
+          <a:blip r:embed="rId4"/>
+          <a:stretch>
+            <a:fillRect/>
+          </a:stretch>
+        </p:blipFill>
+        <p:spPr>
+          <a:xfrm>
+            <a:off x="4145176" y="4147049"/>
+            <a:ext cx="4023259" cy="1992901"/>
+          </a:xfrm>
+          <a:prstGeom prst="rect">
+            <a:avLst/>
+          </a:prstGeom>
+        </p:spPr>
+      </p:pic>
+      <p:sp>
+        <p:nvSpPr>
+          <p:cNvPr id="13" name="Rectangle 12"/>
           <p:cNvSpPr/>
           <p:nvPr/>
         </p:nvSpPr>
         <p:spPr>
           <a:xfrm>
-            <a:off x="4145176" y="0"/>
-            <a:ext cx="8046519" cy="3429000"/>
+            <a:off x="8168435" y="3429000"/>
+            <a:ext cx="4023259" cy="3429000"/>
           </a:xfrm>
           <a:prstGeom prst="rect">
             <a:avLst/>
@@ -7894,92 +7133,24 @@
           </a:p>
         </p:txBody>
       </p:sp>
-      <p:sp>
-        <p:nvSpPr>
-          <p:cNvPr id="8" name="Rectangle 7"/>
-          <p:cNvSpPr/>
-          <p:nvPr/>
-        </p:nvSpPr>
-        <p:spPr>
-          <a:xfrm>
-            <a:off x="4145176" y="3429000"/>
-            <a:ext cx="8046519" cy="3429000"/>
-          </a:xfrm>
-          <a:prstGeom prst="rect">
-            <a:avLst/>
-          </a:prstGeom>
-          <a:solidFill>
-            <a:srgbClr val="1A1A1A"/>
-          </a:solidFill>
-          <a:ln>
-            <a:noFill/>
-          </a:ln>
-          <a:effectLst/>
-        </p:spPr>
-        <p:style>
-          <a:lnRef idx="1">
-            <a:schemeClr val="accent1"/>
-          </a:lnRef>
-          <a:fillRef idx="3">
-            <a:schemeClr val="accent1"/>
-          </a:fillRef>
-          <a:effectRef idx="2">
-            <a:schemeClr val="accent1"/>
-          </a:effectRef>
-          <a:fontRef idx="minor">
-            <a:schemeClr val="lt1"/>
-          </a:fontRef>
-        </p:style>
-        <p:txBody>
-          <a:bodyPr rtlCol="0" anchor="ctr"/>
-          <a:lstStyle/>
-          <a:p>
-            <a:pPr algn="ctr"/>
-          </a:p>
-        </p:txBody>
-      </p:sp>
       <p:pic>
         <p:nvPicPr>
-          <p:cNvPr id="9" name="Picture 8" descr="rva-builds-logo-light.png"/>
+          <p:cNvPr id="14" name="Picture 13" descr="rva-builds-logo-stacked-light.png"/>
           <p:cNvPicPr>
             <a:picLocks noChangeAspect="1"/>
           </p:cNvPicPr>
           <p:nvPr/>
         </p:nvPicPr>
         <p:blipFill>
-          <a:blip r:embed="rId2"/>
+          <a:blip r:embed="rId5"/>
           <a:stretch>
             <a:fillRect/>
           </a:stretch>
         </p:blipFill>
         <p:spPr>
           <a:xfrm>
-            <a:off x="4145176" y="946457"/>
-            <a:ext cx="8046519" cy="1536085"/>
-          </a:xfrm>
-          <a:prstGeom prst="rect">
-            <a:avLst/>
-          </a:prstGeom>
-        </p:spPr>
-      </p:pic>
-      <p:pic>
-        <p:nvPicPr>
-          <p:cNvPr id="10" name="Picture 9" descr="rva-builds-logo-light-color.png"/>
-          <p:cNvPicPr>
-            <a:picLocks noChangeAspect="1"/>
-          </p:cNvPicPr>
-          <p:nvPr/>
-        </p:nvPicPr>
-        <p:blipFill>
-          <a:blip r:embed="rId3"/>
-          <a:stretch>
-            <a:fillRect/>
-          </a:stretch>
-        </p:blipFill>
-        <p:spPr>
-          <a:xfrm>
-            <a:off x="4145176" y="3988237"/>
-            <a:ext cx="8046519" cy="2310525"/>
+            <a:off x="8168435" y="4147049"/>
+            <a:ext cx="4023259" cy="1992901"/>
           </a:xfrm>
           <a:prstGeom prst="rect">
             <a:avLst/>
@@ -8165,7 +7336,7 @@
                 </a:solidFill>
                 <a:latin typeface="Space Grotesk"/>
               </a:rPr>
-              <a:t>Stacked</a:t>
+              <a:t>Usage</a:t>
             </a:r>
           </a:p>
           <a:p>
@@ -8181,7 +7352,7 @@
                 </a:solidFill>
                 <a:latin typeface="Space Grotesk"/>
               </a:rPr>
-              <a:t>Lockup</a:t>
+              <a:t>Rules</a:t>
             </a:r>
           </a:p>
         </p:txBody>
@@ -8220,283 +7391,263 @@
                 </a:solidFill>
                 <a:latin typeface="Schibsted Grotesk"/>
               </a:rPr>
-              <a:t>For square or vertical placements — social avatars, signage, mobile headers.</a:t>
-            </a:r>
-          </a:p>
-        </p:txBody>
-      </p:sp>
-      <p:sp>
-        <p:nvSpPr>
-          <p:cNvPr id="7" name="Rectangle 6"/>
-          <p:cNvSpPr/>
-          <p:nvPr/>
-        </p:nvSpPr>
-        <p:spPr>
-          <a:xfrm>
-            <a:off x="4145176" y="0"/>
-            <a:ext cx="4023259" cy="3429000"/>
-          </a:xfrm>
-          <a:prstGeom prst="rect">
-            <a:avLst/>
-          </a:prstGeom>
-          <a:solidFill>
-            <a:srgbClr val="FFFFFF"/>
-          </a:solidFill>
-          <a:ln>
-            <a:noFill/>
-          </a:ln>
-          <a:effectLst/>
-        </p:spPr>
-        <p:style>
-          <a:lnRef idx="1">
-            <a:schemeClr val="accent1"/>
-          </a:lnRef>
-          <a:fillRef idx="3">
-            <a:schemeClr val="accent1"/>
-          </a:fillRef>
-          <a:effectRef idx="2">
-            <a:schemeClr val="accent1"/>
-          </a:effectRef>
-          <a:fontRef idx="minor">
-            <a:schemeClr val="lt1"/>
-          </a:fontRef>
-        </p:style>
-        <p:txBody>
-          <a:bodyPr rtlCol="0" anchor="ctr"/>
-          <a:lstStyle/>
-          <a:p>
-            <a:pPr algn="ctr"/>
-          </a:p>
-        </p:txBody>
-      </p:sp>
-      <p:pic>
-        <p:nvPicPr>
-          <p:cNvPr id="8" name="Picture 7" descr="rva-builds-logo-stacked-dark-color.png"/>
-          <p:cNvPicPr>
-            <a:picLocks noChangeAspect="1"/>
-          </p:cNvPicPr>
-          <p:nvPr/>
-        </p:nvPicPr>
-        <p:blipFill>
-          <a:blip r:embed="rId2"/>
-          <a:stretch>
-            <a:fillRect/>
-          </a:stretch>
-        </p:blipFill>
-        <p:spPr>
-          <a:xfrm>
-            <a:off x="4145176" y="617248"/>
-            <a:ext cx="4023259" cy="2194504"/>
-          </a:xfrm>
-          <a:prstGeom prst="rect">
-            <a:avLst/>
-          </a:prstGeom>
-        </p:spPr>
-      </p:pic>
-      <p:sp>
-        <p:nvSpPr>
-          <p:cNvPr id="9" name="Rectangle 8"/>
-          <p:cNvSpPr/>
-          <p:nvPr/>
-        </p:nvSpPr>
-        <p:spPr>
-          <a:xfrm>
-            <a:off x="8168435" y="0"/>
-            <a:ext cx="4023259" cy="3429000"/>
-          </a:xfrm>
-          <a:prstGeom prst="rect">
-            <a:avLst/>
-          </a:prstGeom>
-          <a:solidFill>
-            <a:srgbClr val="1A1A1A"/>
-          </a:solidFill>
-          <a:ln>
-            <a:noFill/>
-          </a:ln>
-          <a:effectLst/>
-        </p:spPr>
-        <p:style>
-          <a:lnRef idx="1">
-            <a:schemeClr val="accent1"/>
-          </a:lnRef>
-          <a:fillRef idx="3">
-            <a:schemeClr val="accent1"/>
-          </a:fillRef>
-          <a:effectRef idx="2">
-            <a:schemeClr val="accent1"/>
-          </a:effectRef>
-          <a:fontRef idx="minor">
-            <a:schemeClr val="lt1"/>
-          </a:fontRef>
-        </p:style>
-        <p:txBody>
-          <a:bodyPr rtlCol="0" anchor="ctr"/>
-          <a:lstStyle/>
-          <a:p>
-            <a:pPr algn="ctr"/>
-          </a:p>
-        </p:txBody>
-      </p:sp>
-      <p:pic>
-        <p:nvPicPr>
-          <p:cNvPr id="10" name="Picture 9" descr="rva-builds-logo-stacked-light-color.png"/>
-          <p:cNvPicPr>
-            <a:picLocks noChangeAspect="1"/>
-          </p:cNvPicPr>
-          <p:nvPr/>
-        </p:nvPicPr>
-        <p:blipFill>
-          <a:blip r:embed="rId3"/>
-          <a:stretch>
-            <a:fillRect/>
-          </a:stretch>
-        </p:blipFill>
-        <p:spPr>
-          <a:xfrm>
-            <a:off x="8168435" y="617248"/>
-            <a:ext cx="4023259" cy="2194504"/>
-          </a:xfrm>
-          <a:prstGeom prst="rect">
-            <a:avLst/>
-          </a:prstGeom>
-        </p:spPr>
-      </p:pic>
-      <p:sp>
-        <p:nvSpPr>
-          <p:cNvPr id="11" name="Rectangle 10"/>
-          <p:cNvSpPr/>
-          <p:nvPr/>
-        </p:nvSpPr>
-        <p:spPr>
-          <a:xfrm>
-            <a:off x="4145176" y="3429000"/>
-            <a:ext cx="4023259" cy="3429000"/>
-          </a:xfrm>
-          <a:prstGeom prst="rect">
-            <a:avLst/>
-          </a:prstGeom>
-          <a:solidFill>
-            <a:srgbClr val="F6F6F6"/>
-          </a:solidFill>
-          <a:ln>
-            <a:noFill/>
-          </a:ln>
-          <a:effectLst/>
-        </p:spPr>
-        <p:style>
-          <a:lnRef idx="1">
-            <a:schemeClr val="accent1"/>
-          </a:lnRef>
-          <a:fillRef idx="3">
-            <a:schemeClr val="accent1"/>
-          </a:fillRef>
-          <a:effectRef idx="2">
-            <a:schemeClr val="accent1"/>
-          </a:effectRef>
-          <a:fontRef idx="minor">
-            <a:schemeClr val="lt1"/>
-          </a:fontRef>
-        </p:style>
-        <p:txBody>
-          <a:bodyPr rtlCol="0" anchor="ctr"/>
-          <a:lstStyle/>
-          <a:p>
-            <a:pPr algn="ctr"/>
-          </a:p>
-        </p:txBody>
-      </p:sp>
-      <p:pic>
-        <p:nvPicPr>
-          <p:cNvPr id="12" name="Picture 11" descr="rva-builds-logo-stacked-dark.png"/>
-          <p:cNvPicPr>
-            <a:picLocks noChangeAspect="1"/>
-          </p:cNvPicPr>
-          <p:nvPr/>
-        </p:nvPicPr>
-        <p:blipFill>
-          <a:blip r:embed="rId4"/>
-          <a:stretch>
-            <a:fillRect/>
-          </a:stretch>
-        </p:blipFill>
-        <p:spPr>
-          <a:xfrm>
-            <a:off x="4145176" y="4147049"/>
-            <a:ext cx="4023259" cy="1992901"/>
-          </a:xfrm>
-          <a:prstGeom prst="rect">
-            <a:avLst/>
-          </a:prstGeom>
-        </p:spPr>
-      </p:pic>
-      <p:sp>
-        <p:nvSpPr>
-          <p:cNvPr id="13" name="Rectangle 12"/>
-          <p:cNvSpPr/>
-          <p:nvPr/>
-        </p:nvSpPr>
-        <p:spPr>
-          <a:xfrm>
-            <a:off x="8168435" y="3429000"/>
-            <a:ext cx="4023259" cy="3429000"/>
-          </a:xfrm>
-          <a:prstGeom prst="rect">
-            <a:avLst/>
-          </a:prstGeom>
-          <a:solidFill>
-            <a:srgbClr val="F15C2C"/>
-          </a:solidFill>
-          <a:ln>
-            <a:noFill/>
-          </a:ln>
-          <a:effectLst/>
-        </p:spPr>
-        <p:style>
-          <a:lnRef idx="1">
-            <a:schemeClr val="accent1"/>
-          </a:lnRef>
-          <a:fillRef idx="3">
-            <a:schemeClr val="accent1"/>
-          </a:fillRef>
-          <a:effectRef idx="2">
-            <a:schemeClr val="accent1"/>
-          </a:effectRef>
-          <a:fontRef idx="minor">
-            <a:schemeClr val="lt1"/>
-          </a:fontRef>
-        </p:style>
-        <p:txBody>
-          <a:bodyPr rtlCol="0" anchor="ctr"/>
-          <a:lstStyle/>
-          <a:p>
-            <a:pPr algn="ctr"/>
-          </a:p>
-        </p:txBody>
-      </p:sp>
-      <p:pic>
-        <p:nvPicPr>
-          <p:cNvPr id="14" name="Picture 13" descr="rva-builds-logo-stacked-light.png"/>
-          <p:cNvPicPr>
-            <a:picLocks noChangeAspect="1"/>
-          </p:cNvPicPr>
-          <p:nvPr/>
-        </p:nvPicPr>
-        <p:blipFill>
-          <a:blip r:embed="rId5"/>
-          <a:stretch>
-            <a:fillRect/>
-          </a:stretch>
-        </p:blipFill>
-        <p:spPr>
-          <a:xfrm>
-            <a:off x="8168435" y="4147049"/>
-            <a:ext cx="4023259" cy="1992901"/>
-          </a:xfrm>
-          <a:prstGeom prst="rect">
-            <a:avLst/>
-          </a:prstGeom>
-        </p:spPr>
-      </p:pic>
+              <a:t>No image or background should ever compete with the mark's clarity, and it must always appear in an approved color combination.</a:t>
+            </a:r>
+          </a:p>
+        </p:txBody>
+      </p:sp>
+      <p:sp>
+        <p:nvSpPr>
+          <p:cNvPr id="7" name="TextBox 6"/>
+          <p:cNvSpPr txBox="1"/>
+          <p:nvPr/>
+        </p:nvSpPr>
+        <p:spPr>
+          <a:xfrm>
+            <a:off x="4693816" y="2377440"/>
+            <a:ext cx="3566059" cy="365760"/>
+          </a:xfrm>
+          <a:prstGeom prst="rect">
+            <a:avLst/>
+          </a:prstGeom>
+          <a:noFill/>
+        </p:spPr>
+        <p:txBody>
+          <a:bodyPr wrap="square" anchor="t" lIns="0" rIns="0" tIns="0" bIns="0">
+            <a:spAutoFit/>
+          </a:bodyPr>
+          <a:lstStyle/>
+          <a:p>
+            <a:pPr algn="l">
+              <a:lnSpc>
+                <a:spcPct val="100000"/>
+              </a:lnSpc>
+            </a:pPr>
+            <a:r>
+              <a:rPr sz="1600" b="1">
+                <a:solidFill>
+                  <a:srgbClr val="1F8A4C"/>
+                </a:solidFill>
+                <a:latin typeface="Space Grotesk"/>
+              </a:rPr>
+              <a:t>Do</a:t>
+            </a:r>
+          </a:p>
+        </p:txBody>
+      </p:sp>
+      <p:sp>
+        <p:nvSpPr>
+          <p:cNvPr id="8" name="TextBox 7"/>
+          <p:cNvSpPr txBox="1"/>
+          <p:nvPr/>
+        </p:nvSpPr>
+        <p:spPr>
+          <a:xfrm>
+            <a:off x="4693816" y="2834640"/>
+            <a:ext cx="3566059" cy="1828800"/>
+          </a:xfrm>
+          <a:prstGeom prst="rect">
+            <a:avLst/>
+          </a:prstGeom>
+          <a:noFill/>
+        </p:spPr>
+        <p:txBody>
+          <a:bodyPr wrap="square" anchor="t" lIns="0" rIns="0" tIns="0" bIns="0">
+            <a:spAutoFit/>
+          </a:bodyPr>
+          <a:lstStyle/>
+          <a:p>
+            <a:pPr algn="l">
+              <a:lnSpc>
+                <a:spcPct val="140000"/>
+              </a:lnSpc>
+            </a:pPr>
+            <a:r>
+              <a:rPr sz="1250" b="0">
+                <a:solidFill>
+                  <a:srgbClr val="5A5A5A"/>
+                </a:solidFill>
+                <a:latin typeface="Schibsted Grotesk"/>
+              </a:rPr>
+              <a:t>✓  Keep clear space equal to the height of the cube icon.</a:t>
+            </a:r>
+          </a:p>
+          <a:p>
+            <a:pPr algn="l">
+              <a:lnSpc>
+                <a:spcPct val="140000"/>
+              </a:lnSpc>
+            </a:pPr>
+            <a:r>
+              <a:rPr sz="1250" b="0">
+                <a:solidFill>
+                  <a:srgbClr val="5A5A5A"/>
+                </a:solidFill>
+                <a:latin typeface="Schibsted Grotesk"/>
+              </a:rPr>
+              <a:t>✓  Use full color on white or photography with a dark overlay.</a:t>
+            </a:r>
+          </a:p>
+          <a:p>
+            <a:pPr algn="l">
+              <a:lnSpc>
+                <a:spcPct val="140000"/>
+              </a:lnSpc>
+            </a:pPr>
+            <a:r>
+              <a:rPr sz="1250" b="0">
+                <a:solidFill>
+                  <a:srgbClr val="5A5A5A"/>
+                </a:solidFill>
+                <a:latin typeface="Schibsted Grotesk"/>
+              </a:rPr>
+              <a:t>✓  Use the white mono mark on coral, purple, blue, or busy photos.</a:t>
+            </a:r>
+          </a:p>
+          <a:p>
+            <a:pPr algn="l">
+              <a:lnSpc>
+                <a:spcPct val="140000"/>
+              </a:lnSpc>
+            </a:pPr>
+            <a:r>
+              <a:rPr sz="1250" b="0">
+                <a:solidFill>
+                  <a:srgbClr val="5A5A5A"/>
+                </a:solidFill>
+                <a:latin typeface="Schibsted Grotesk"/>
+              </a:rPr>
+              <a:t>✓  Scale proportionally — never stretch.</a:t>
+            </a:r>
+          </a:p>
+        </p:txBody>
+      </p:sp>
+      <p:sp>
+        <p:nvSpPr>
+          <p:cNvPr id="9" name="TextBox 8"/>
+          <p:cNvSpPr txBox="1"/>
+          <p:nvPr/>
+        </p:nvSpPr>
+        <p:spPr>
+          <a:xfrm>
+            <a:off x="8625635" y="2377440"/>
+            <a:ext cx="3566059" cy="365760"/>
+          </a:xfrm>
+          <a:prstGeom prst="rect">
+            <a:avLst/>
+          </a:prstGeom>
+          <a:noFill/>
+        </p:spPr>
+        <p:txBody>
+          <a:bodyPr wrap="square" anchor="t" lIns="0" rIns="0" tIns="0" bIns="0">
+            <a:spAutoFit/>
+          </a:bodyPr>
+          <a:lstStyle/>
+          <a:p>
+            <a:pPr algn="l">
+              <a:lnSpc>
+                <a:spcPct val="100000"/>
+              </a:lnSpc>
+            </a:pPr>
+            <a:r>
+              <a:rPr sz="1600" b="1">
+                <a:solidFill>
+                  <a:srgbClr val="C0392B"/>
+                </a:solidFill>
+                <a:latin typeface="Space Grotesk"/>
+              </a:rPr>
+              <a:t>Don't</a:t>
+            </a:r>
+          </a:p>
+        </p:txBody>
+      </p:sp>
+      <p:sp>
+        <p:nvSpPr>
+          <p:cNvPr id="10" name="TextBox 9"/>
+          <p:cNvSpPr txBox="1"/>
+          <p:nvPr/>
+        </p:nvSpPr>
+        <p:spPr>
+          <a:xfrm>
+            <a:off x="8625635" y="2834640"/>
+            <a:ext cx="3566059" cy="1828800"/>
+          </a:xfrm>
+          <a:prstGeom prst="rect">
+            <a:avLst/>
+          </a:prstGeom>
+          <a:noFill/>
+        </p:spPr>
+        <p:txBody>
+          <a:bodyPr wrap="square" anchor="t" lIns="0" rIns="0" tIns="0" bIns="0">
+            <a:spAutoFit/>
+          </a:bodyPr>
+          <a:lstStyle/>
+          <a:p>
+            <a:pPr algn="l">
+              <a:lnSpc>
+                <a:spcPct val="140000"/>
+              </a:lnSpc>
+            </a:pPr>
+            <a:r>
+              <a:rPr sz="1250" b="0">
+                <a:solidFill>
+                  <a:srgbClr val="5A5A5A"/>
+                </a:solidFill>
+                <a:latin typeface="Schibsted Grotesk"/>
+              </a:rPr>
+              <a:t>✕  Don't recolor the cube or crane outside the brand palette.</a:t>
+            </a:r>
+          </a:p>
+          <a:p>
+            <a:pPr algn="l">
+              <a:lnSpc>
+                <a:spcPct val="140000"/>
+              </a:lnSpc>
+            </a:pPr>
+            <a:r>
+              <a:rPr sz="1250" b="0">
+                <a:solidFill>
+                  <a:srgbClr val="5A5A5A"/>
+                </a:solidFill>
+                <a:latin typeface="Schibsted Grotesk"/>
+              </a:rPr>
+              <a:t>✕  Don't place the full-color mark on low-contrast backgrounds.</a:t>
+            </a:r>
+          </a:p>
+          <a:p>
+            <a:pPr algn="l">
+              <a:lnSpc>
+                <a:spcPct val="140000"/>
+              </a:lnSpc>
+            </a:pPr>
+            <a:r>
+              <a:rPr sz="1250" b="0">
+                <a:solidFill>
+                  <a:srgbClr val="5A5A5A"/>
+                </a:solidFill>
+                <a:latin typeface="Schibsted Grotesk"/>
+              </a:rPr>
+              <a:t>✕  Don't add shadows, outlines, or effects to the mark.</a:t>
+            </a:r>
+          </a:p>
+          <a:p>
+            <a:pPr algn="l">
+              <a:lnSpc>
+                <a:spcPct val="140000"/>
+              </a:lnSpc>
+            </a:pPr>
+            <a:r>
+              <a:rPr sz="1250" b="0">
+                <a:solidFill>
+                  <a:srgbClr val="5A5A5A"/>
+                </a:solidFill>
+                <a:latin typeface="Schibsted Grotesk"/>
+              </a:rPr>
+              <a:t>✕  Don't rotate, skew, or crowd the logo.</a:t>
+            </a:r>
+          </a:p>
+        </p:txBody>
+      </p:sp>
     </p:spTree>
   </p:cSld>
   <p:clrMapOvr>
@@ -8637,7 +7788,7 @@
                 </a:solidFill>
                 <a:latin typeface="Space Grotesk"/>
               </a:rPr>
-              <a:t>02</a:t>
+              <a:t>03</a:t>
             </a:r>
           </a:p>
         </p:txBody>
@@ -8676,7 +7827,7 @@
                 </a:solidFill>
                 <a:latin typeface="Space Grotesk"/>
               </a:rPr>
-              <a:t>Usage</a:t>
+              <a:t>Main</a:t>
             </a:r>
           </a:p>
           <a:p>
@@ -8692,7 +7843,7 @@
                 </a:solidFill>
                 <a:latin typeface="Space Grotesk"/>
               </a:rPr>
-              <a:t>Rules</a:t>
+              <a:t>Colors</a:t>
             </a:r>
           </a:p>
         </p:txBody>
@@ -8731,21 +7882,65 @@
                 </a:solidFill>
                 <a:latin typeface="Schibsted Grotesk"/>
               </a:rPr>
-              <a:t>No image or background should ever compete with the mark's clarity, and it must always appear in an approved color combination.</a:t>
-            </a:r>
-          </a:p>
-        </p:txBody>
-      </p:sp>
-      <p:sp>
-        <p:nvSpPr>
-          <p:cNvPr id="7" name="TextBox 6"/>
+              <a:t>These colors represent the identity of RVA Builds — meant to build trust between candidates and employers.</a:t>
+            </a:r>
+          </a:p>
+        </p:txBody>
+      </p:sp>
+      <p:sp>
+        <p:nvSpPr>
+          <p:cNvPr id="7" name="Rectangle 6"/>
+          <p:cNvSpPr/>
+          <p:nvPr/>
+        </p:nvSpPr>
+        <p:spPr>
+          <a:xfrm>
+            <a:off x="5151016" y="1965960"/>
+            <a:ext cx="1371600" cy="822960"/>
+          </a:xfrm>
+          <a:prstGeom prst="rect">
+            <a:avLst/>
+          </a:prstGeom>
+          <a:solidFill>
+            <a:srgbClr val="F15C2C"/>
+          </a:solidFill>
+          <a:ln>
+            <a:noFill/>
+          </a:ln>
+          <a:effectLst/>
+        </p:spPr>
+        <p:style>
+          <a:lnRef idx="1">
+            <a:schemeClr val="accent1"/>
+          </a:lnRef>
+          <a:fillRef idx="3">
+            <a:schemeClr val="accent1"/>
+          </a:fillRef>
+          <a:effectRef idx="2">
+            <a:schemeClr val="accent1"/>
+          </a:effectRef>
+          <a:fontRef idx="minor">
+            <a:schemeClr val="lt1"/>
+          </a:fontRef>
+        </p:style>
+        <p:txBody>
+          <a:bodyPr rtlCol="0" anchor="ctr"/>
+          <a:lstStyle/>
+          <a:p>
+            <a:pPr algn="ctr"/>
+          </a:p>
+        </p:txBody>
+      </p:sp>
+      <p:sp>
+        <p:nvSpPr>
+          <p:cNvPr id="8" name="TextBox 7"/>
           <p:cNvSpPr txBox="1"/>
           <p:nvPr/>
         </p:nvSpPr>
         <p:spPr>
           <a:xfrm>
-            <a:off x="4693816" y="2377440"/>
-            <a:ext cx="3566059" cy="365760"/>
+            <a:off x="6751216" y="1984248"/>
+            <a:ext cx="1463040" cy="320040"/>
           </a:xfrm>
           <a:prstGeom prst="rect">
             <a:avLst/>
@@ -8764,27 +7959,27 @@
               </a:lnSpc>
             </a:pPr>
             <a:r>
-              <a:rPr sz="1600" b="1">
-                <a:solidFill>
-                  <a:srgbClr val="1F8A4C"/>
+              <a:rPr sz="1700" b="1">
+                <a:solidFill>
+                  <a:srgbClr val="1A1A1A"/>
                 </a:solidFill>
                 <a:latin typeface="Space Grotesk"/>
               </a:rPr>
-              <a:t>Do</a:t>
-            </a:r>
-          </a:p>
-        </p:txBody>
-      </p:sp>
-      <p:sp>
-        <p:nvSpPr>
-          <p:cNvPr id="8" name="TextBox 7"/>
+              <a:t>#F15C2C</a:t>
+            </a:r>
+          </a:p>
+        </p:txBody>
+      </p:sp>
+      <p:sp>
+        <p:nvSpPr>
+          <p:cNvPr id="9" name="TextBox 8"/>
           <p:cNvSpPr txBox="1"/>
           <p:nvPr/>
         </p:nvSpPr>
         <p:spPr>
           <a:xfrm>
-            <a:off x="4693816" y="2834640"/>
-            <a:ext cx="3566059" cy="1828800"/>
+            <a:off x="8351416" y="1965960"/>
+            <a:ext cx="1463040" cy="777240"/>
           </a:xfrm>
           <a:prstGeom prst="rect">
             <a:avLst/>
@@ -8799,79 +7994,63 @@
           <a:p>
             <a:pPr algn="l">
               <a:lnSpc>
-                <a:spcPct val="140000"/>
-              </a:lnSpc>
-            </a:pPr>
-            <a:r>
-              <a:rPr sz="1250" b="0">
+                <a:spcPct val="130000"/>
+              </a:lnSpc>
+            </a:pPr>
+            <a:r>
+              <a:rPr sz="1100" b="0">
                 <a:solidFill>
                   <a:srgbClr val="5A5A5A"/>
                 </a:solidFill>
-                <a:latin typeface="Schibsted Grotesk"/>
-              </a:rPr>
-              <a:t>✓  Keep clear space equal to the height of the cube icon.</a:t>
+                <a:latin typeface="Consolas"/>
+              </a:rPr>
+              <a:t>R: 241</a:t>
             </a:r>
           </a:p>
           <a:p>
             <a:pPr algn="l">
               <a:lnSpc>
-                <a:spcPct val="140000"/>
-              </a:lnSpc>
-            </a:pPr>
-            <a:r>
-              <a:rPr sz="1250" b="0">
+                <a:spcPct val="130000"/>
+              </a:lnSpc>
+            </a:pPr>
+            <a:r>
+              <a:rPr sz="1100" b="0">
                 <a:solidFill>
                   <a:srgbClr val="5A5A5A"/>
                 </a:solidFill>
-                <a:latin typeface="Schibsted Grotesk"/>
-              </a:rPr>
-              <a:t>✓  Use full color on white or photography with a dark overlay.</a:t>
+                <a:latin typeface="Consolas"/>
+              </a:rPr>
+              <a:t>G: 92</a:t>
             </a:r>
           </a:p>
           <a:p>
             <a:pPr algn="l">
               <a:lnSpc>
-                <a:spcPct val="140000"/>
-              </a:lnSpc>
-            </a:pPr>
-            <a:r>
-              <a:rPr sz="1250" b="0">
+                <a:spcPct val="130000"/>
+              </a:lnSpc>
+            </a:pPr>
+            <a:r>
+              <a:rPr sz="1100" b="0">
                 <a:solidFill>
                   <a:srgbClr val="5A5A5A"/>
                 </a:solidFill>
-                <a:latin typeface="Schibsted Grotesk"/>
-              </a:rPr>
-              <a:t>✓  Use the white mono mark on coral, purple, blue, or busy photos.</a:t>
-            </a:r>
-          </a:p>
-          <a:p>
-            <a:pPr algn="l">
-              <a:lnSpc>
-                <a:spcPct val="140000"/>
-              </a:lnSpc>
-            </a:pPr>
-            <a:r>
-              <a:rPr sz="1250" b="0">
-                <a:solidFill>
-                  <a:srgbClr val="5A5A5A"/>
-                </a:solidFill>
-                <a:latin typeface="Schibsted Grotesk"/>
-              </a:rPr>
-              <a:t>✓  Scale proportionally — never stretch.</a:t>
-            </a:r>
-          </a:p>
-        </p:txBody>
-      </p:sp>
-      <p:sp>
-        <p:nvSpPr>
-          <p:cNvPr id="9" name="TextBox 8"/>
+                <a:latin typeface="Consolas"/>
+              </a:rPr>
+              <a:t>B: 44</a:t>
+            </a:r>
+          </a:p>
+        </p:txBody>
+      </p:sp>
+      <p:sp>
+        <p:nvSpPr>
+          <p:cNvPr id="10" name="TextBox 9"/>
           <p:cNvSpPr txBox="1"/>
           <p:nvPr/>
         </p:nvSpPr>
         <p:spPr>
           <a:xfrm>
-            <a:off x="8625635" y="2377440"/>
-            <a:ext cx="3566059" cy="365760"/>
+            <a:off x="6751216" y="2331720"/>
+            <a:ext cx="2926080" cy="365760"/>
           </a:xfrm>
           <a:prstGeom prst="rect">
             <a:avLst/>
@@ -8890,27 +8069,71 @@
               </a:lnSpc>
             </a:pPr>
             <a:r>
-              <a:rPr sz="1600" b="1">
-                <a:solidFill>
-                  <a:srgbClr val="C0392B"/>
-                </a:solidFill>
-                <a:latin typeface="Space Grotesk"/>
-              </a:rPr>
-              <a:t>Don't</a:t>
-            </a:r>
-          </a:p>
-        </p:txBody>
-      </p:sp>
-      <p:sp>
-        <p:nvSpPr>
-          <p:cNvPr id="10" name="TextBox 9"/>
+              <a:rPr sz="1150" b="0">
+                <a:solidFill>
+                  <a:srgbClr val="5A5A5A"/>
+                </a:solidFill>
+                <a:latin typeface="Schibsted Grotesk"/>
+              </a:rPr>
+              <a:t>Coral — primary / action</a:t>
+            </a:r>
+          </a:p>
+        </p:txBody>
+      </p:sp>
+      <p:sp>
+        <p:nvSpPr>
+          <p:cNvPr id="11" name="Rectangle 10"/>
+          <p:cNvSpPr/>
+          <p:nvPr/>
+        </p:nvSpPr>
+        <p:spPr>
+          <a:xfrm>
+            <a:off x="5151016" y="3200400"/>
+            <a:ext cx="1371600" cy="822960"/>
+          </a:xfrm>
+          <a:prstGeom prst="rect">
+            <a:avLst/>
+          </a:prstGeom>
+          <a:solidFill>
+            <a:srgbClr val="329FE6"/>
+          </a:solidFill>
+          <a:ln>
+            <a:noFill/>
+          </a:ln>
+          <a:effectLst/>
+        </p:spPr>
+        <p:style>
+          <a:lnRef idx="1">
+            <a:schemeClr val="accent1"/>
+          </a:lnRef>
+          <a:fillRef idx="3">
+            <a:schemeClr val="accent1"/>
+          </a:fillRef>
+          <a:effectRef idx="2">
+            <a:schemeClr val="accent1"/>
+          </a:effectRef>
+          <a:fontRef idx="minor">
+            <a:schemeClr val="lt1"/>
+          </a:fontRef>
+        </p:style>
+        <p:txBody>
+          <a:bodyPr rtlCol="0" anchor="ctr"/>
+          <a:lstStyle/>
+          <a:p>
+            <a:pPr algn="ctr"/>
+          </a:p>
+        </p:txBody>
+      </p:sp>
+      <p:sp>
+        <p:nvSpPr>
+          <p:cNvPr id="12" name="TextBox 11"/>
           <p:cNvSpPr txBox="1"/>
           <p:nvPr/>
         </p:nvSpPr>
         <p:spPr>
           <a:xfrm>
-            <a:off x="8625635" y="2834640"/>
-            <a:ext cx="3566059" cy="1828800"/>
+            <a:off x="6751216" y="3218688"/>
+            <a:ext cx="1463040" cy="320040"/>
           </a:xfrm>
           <a:prstGeom prst="rect">
             <a:avLst/>
@@ -8925,65 +8148,320 @@
           <a:p>
             <a:pPr algn="l">
               <a:lnSpc>
-                <a:spcPct val="140000"/>
-              </a:lnSpc>
-            </a:pPr>
-            <a:r>
-              <a:rPr sz="1250" b="0">
+                <a:spcPct val="100000"/>
+              </a:lnSpc>
+            </a:pPr>
+            <a:r>
+              <a:rPr sz="1700" b="1">
+                <a:solidFill>
+                  <a:srgbClr val="1A1A1A"/>
+                </a:solidFill>
+                <a:latin typeface="Space Grotesk"/>
+              </a:rPr>
+              <a:t>#329FE6</a:t>
+            </a:r>
+          </a:p>
+        </p:txBody>
+      </p:sp>
+      <p:sp>
+        <p:nvSpPr>
+          <p:cNvPr id="13" name="TextBox 12"/>
+          <p:cNvSpPr txBox="1"/>
+          <p:nvPr/>
+        </p:nvSpPr>
+        <p:spPr>
+          <a:xfrm>
+            <a:off x="8351416" y="3200400"/>
+            <a:ext cx="1463040" cy="777240"/>
+          </a:xfrm>
+          <a:prstGeom prst="rect">
+            <a:avLst/>
+          </a:prstGeom>
+          <a:noFill/>
+        </p:spPr>
+        <p:txBody>
+          <a:bodyPr wrap="square" anchor="t" lIns="0" rIns="0" tIns="0" bIns="0">
+            <a:spAutoFit/>
+          </a:bodyPr>
+          <a:lstStyle/>
+          <a:p>
+            <a:pPr algn="l">
+              <a:lnSpc>
+                <a:spcPct val="130000"/>
+              </a:lnSpc>
+            </a:pPr>
+            <a:r>
+              <a:rPr sz="1100" b="0">
                 <a:solidFill>
                   <a:srgbClr val="5A5A5A"/>
                 </a:solidFill>
+                <a:latin typeface="Consolas"/>
+              </a:rPr>
+              <a:t>R: 50</a:t>
+            </a:r>
+          </a:p>
+          <a:p>
+            <a:pPr algn="l">
+              <a:lnSpc>
+                <a:spcPct val="130000"/>
+              </a:lnSpc>
+            </a:pPr>
+            <a:r>
+              <a:rPr sz="1100" b="0">
+                <a:solidFill>
+                  <a:srgbClr val="5A5A5A"/>
+                </a:solidFill>
+                <a:latin typeface="Consolas"/>
+              </a:rPr>
+              <a:t>G: 159</a:t>
+            </a:r>
+          </a:p>
+          <a:p>
+            <a:pPr algn="l">
+              <a:lnSpc>
+                <a:spcPct val="130000"/>
+              </a:lnSpc>
+            </a:pPr>
+            <a:r>
+              <a:rPr sz="1100" b="0">
+                <a:solidFill>
+                  <a:srgbClr val="5A5A5A"/>
+                </a:solidFill>
+                <a:latin typeface="Consolas"/>
+              </a:rPr>
+              <a:t>B: 230</a:t>
+            </a:r>
+          </a:p>
+        </p:txBody>
+      </p:sp>
+      <p:sp>
+        <p:nvSpPr>
+          <p:cNvPr id="14" name="TextBox 13"/>
+          <p:cNvSpPr txBox="1"/>
+          <p:nvPr/>
+        </p:nvSpPr>
+        <p:spPr>
+          <a:xfrm>
+            <a:off x="6751216" y="3566160"/>
+            <a:ext cx="2926080" cy="365760"/>
+          </a:xfrm>
+          <a:prstGeom prst="rect">
+            <a:avLst/>
+          </a:prstGeom>
+          <a:noFill/>
+        </p:spPr>
+        <p:txBody>
+          <a:bodyPr wrap="square" anchor="t" lIns="0" rIns="0" tIns="0" bIns="0">
+            <a:spAutoFit/>
+          </a:bodyPr>
+          <a:lstStyle/>
+          <a:p>
+            <a:pPr algn="l">
+              <a:lnSpc>
+                <a:spcPct val="100000"/>
+              </a:lnSpc>
+            </a:pPr>
+            <a:r>
+              <a:rPr sz="1150" b="0">
+                <a:solidFill>
+                  <a:srgbClr val="5A5A5A"/>
+                </a:solidFill>
                 <a:latin typeface="Schibsted Grotesk"/>
               </a:rPr>
-              <a:t>✕  Don't recolor the cube or crane outside the brand palette.</a:t>
-            </a:r>
-          </a:p>
+              <a:t>Blue — employer path</a:t>
+            </a:r>
+          </a:p>
+        </p:txBody>
+      </p:sp>
+      <p:sp>
+        <p:nvSpPr>
+          <p:cNvPr id="15" name="Rectangle 14"/>
+          <p:cNvSpPr/>
+          <p:nvPr/>
+        </p:nvSpPr>
+        <p:spPr>
+          <a:xfrm>
+            <a:off x="5151016" y="4434840"/>
+            <a:ext cx="1371600" cy="822960"/>
+          </a:xfrm>
+          <a:prstGeom prst="rect">
+            <a:avLst/>
+          </a:prstGeom>
+          <a:solidFill>
+            <a:srgbClr val="7A35AE"/>
+          </a:solidFill>
+          <a:ln>
+            <a:noFill/>
+          </a:ln>
+          <a:effectLst/>
+        </p:spPr>
+        <p:style>
+          <a:lnRef idx="1">
+            <a:schemeClr val="accent1"/>
+          </a:lnRef>
+          <a:fillRef idx="3">
+            <a:schemeClr val="accent1"/>
+          </a:fillRef>
+          <a:effectRef idx="2">
+            <a:schemeClr val="accent1"/>
+          </a:effectRef>
+          <a:fontRef idx="minor">
+            <a:schemeClr val="lt1"/>
+          </a:fontRef>
+        </p:style>
+        <p:txBody>
+          <a:bodyPr rtlCol="0" anchor="ctr"/>
+          <a:lstStyle/>
+          <a:p>
+            <a:pPr algn="ctr"/>
+          </a:p>
+        </p:txBody>
+      </p:sp>
+      <p:sp>
+        <p:nvSpPr>
+          <p:cNvPr id="16" name="TextBox 15"/>
+          <p:cNvSpPr txBox="1"/>
+          <p:nvPr/>
+        </p:nvSpPr>
+        <p:spPr>
+          <a:xfrm>
+            <a:off x="6751216" y="4453128"/>
+            <a:ext cx="1463040" cy="320040"/>
+          </a:xfrm>
+          <a:prstGeom prst="rect">
+            <a:avLst/>
+          </a:prstGeom>
+          <a:noFill/>
+        </p:spPr>
+        <p:txBody>
+          <a:bodyPr wrap="square" anchor="t" lIns="0" rIns="0" tIns="0" bIns="0">
+            <a:spAutoFit/>
+          </a:bodyPr>
+          <a:lstStyle/>
           <a:p>
             <a:pPr algn="l">
               <a:lnSpc>
-                <a:spcPct val="140000"/>
-              </a:lnSpc>
-            </a:pPr>
-            <a:r>
-              <a:rPr sz="1250" b="0">
+                <a:spcPct val="100000"/>
+              </a:lnSpc>
+            </a:pPr>
+            <a:r>
+              <a:rPr sz="1700" b="1">
+                <a:solidFill>
+                  <a:srgbClr val="1A1A1A"/>
+                </a:solidFill>
+                <a:latin typeface="Space Grotesk"/>
+              </a:rPr>
+              <a:t>#7A35AE</a:t>
+            </a:r>
+          </a:p>
+        </p:txBody>
+      </p:sp>
+      <p:sp>
+        <p:nvSpPr>
+          <p:cNvPr id="17" name="TextBox 16"/>
+          <p:cNvSpPr txBox="1"/>
+          <p:nvPr/>
+        </p:nvSpPr>
+        <p:spPr>
+          <a:xfrm>
+            <a:off x="8351416" y="4434840"/>
+            <a:ext cx="1463040" cy="777240"/>
+          </a:xfrm>
+          <a:prstGeom prst="rect">
+            <a:avLst/>
+          </a:prstGeom>
+          <a:noFill/>
+        </p:spPr>
+        <p:txBody>
+          <a:bodyPr wrap="square" anchor="t" lIns="0" rIns="0" tIns="0" bIns="0">
+            <a:spAutoFit/>
+          </a:bodyPr>
+          <a:lstStyle/>
+          <a:p>
+            <a:pPr algn="l">
+              <a:lnSpc>
+                <a:spcPct val="130000"/>
+              </a:lnSpc>
+            </a:pPr>
+            <a:r>
+              <a:rPr sz="1100" b="0">
                 <a:solidFill>
                   <a:srgbClr val="5A5A5A"/>
                 </a:solidFill>
+                <a:latin typeface="Consolas"/>
+              </a:rPr>
+              <a:t>R: 122</a:t>
+            </a:r>
+          </a:p>
+          <a:p>
+            <a:pPr algn="l">
+              <a:lnSpc>
+                <a:spcPct val="130000"/>
+              </a:lnSpc>
+            </a:pPr>
+            <a:r>
+              <a:rPr sz="1100" b="0">
+                <a:solidFill>
+                  <a:srgbClr val="5A5A5A"/>
+                </a:solidFill>
+                <a:latin typeface="Consolas"/>
+              </a:rPr>
+              <a:t>G: 53</a:t>
+            </a:r>
+          </a:p>
+          <a:p>
+            <a:pPr algn="l">
+              <a:lnSpc>
+                <a:spcPct val="130000"/>
+              </a:lnSpc>
+            </a:pPr>
+            <a:r>
+              <a:rPr sz="1100" b="0">
+                <a:solidFill>
+                  <a:srgbClr val="5A5A5A"/>
+                </a:solidFill>
+                <a:latin typeface="Consolas"/>
+              </a:rPr>
+              <a:t>B: 174</a:t>
+            </a:r>
+          </a:p>
+        </p:txBody>
+      </p:sp>
+      <p:sp>
+        <p:nvSpPr>
+          <p:cNvPr id="18" name="TextBox 17"/>
+          <p:cNvSpPr txBox="1"/>
+          <p:nvPr/>
+        </p:nvSpPr>
+        <p:spPr>
+          <a:xfrm>
+            <a:off x="6751216" y="4800600"/>
+            <a:ext cx="2926080" cy="365760"/>
+          </a:xfrm>
+          <a:prstGeom prst="rect">
+            <a:avLst/>
+          </a:prstGeom>
+          <a:noFill/>
+        </p:spPr>
+        <p:txBody>
+          <a:bodyPr wrap="square" anchor="t" lIns="0" rIns="0" tIns="0" bIns="0">
+            <a:spAutoFit/>
+          </a:bodyPr>
+          <a:lstStyle/>
+          <a:p>
+            <a:pPr algn="l">
+              <a:lnSpc>
+                <a:spcPct val="100000"/>
+              </a:lnSpc>
+            </a:pPr>
+            <a:r>
+              <a:rPr sz="1150" b="0">
+                <a:solidFill>
+                  <a:srgbClr val="5A5A5A"/>
+                </a:solidFill>
                 <a:latin typeface="Schibsted Grotesk"/>
               </a:rPr>
-              <a:t>✕  Don't place the full-color mark on low-contrast backgrounds.</a:t>
-            </a:r>
-          </a:p>
-          <a:p>
-            <a:pPr algn="l">
-              <a:lnSpc>
-                <a:spcPct val="140000"/>
-              </a:lnSpc>
-            </a:pPr>
-            <a:r>
-              <a:rPr sz="1250" b="0">
-                <a:solidFill>
-                  <a:srgbClr val="5A5A5A"/>
-                </a:solidFill>
-                <a:latin typeface="Schibsted Grotesk"/>
-              </a:rPr>
-              <a:t>✕  Don't add shadows, outlines, or effects to the mark.</a:t>
-            </a:r>
-          </a:p>
-          <a:p>
-            <a:pPr algn="l">
-              <a:lnSpc>
-                <a:spcPct val="140000"/>
-              </a:lnSpc>
-            </a:pPr>
-            <a:r>
-              <a:rPr sz="1250" b="0">
-                <a:solidFill>
-                  <a:srgbClr val="5A5A5A"/>
-                </a:solidFill>
-                <a:latin typeface="Schibsted Grotesk"/>
-              </a:rPr>
-              <a:t>✕  Don't rotate, skew, or crowd the logo.</a:t>
+              <a:t>Purple — candidate path</a:t>
             </a:r>
           </a:p>
         </p:txBody>
@@ -9167,7 +8645,7 @@
                 </a:solidFill>
                 <a:latin typeface="Space Grotesk"/>
               </a:rPr>
-              <a:t>Main</a:t>
+              <a:t>Secondary</a:t>
             </a:r>
           </a:p>
           <a:p>
@@ -9222,7 +8700,7 @@
                 </a:solidFill>
                 <a:latin typeface="Schibsted Grotesk"/>
               </a:rPr>
-              <a:t>These colors represent the identity of RVA Builds — meant to build trust between candidates and employers.</a:t>
+              <a:t>These create contrast against the main palette and should be used sparingly, for text, surfaces, and system states.</a:t>
             </a:r>
           </a:p>
         </p:txBody>
@@ -9235,14 +8713,14 @@
         </p:nvSpPr>
         <p:spPr>
           <a:xfrm>
-            <a:off x="5151016" y="1965960"/>
-            <a:ext cx="1371600" cy="822960"/>
+            <a:off x="5151016" y="1691640"/>
+            <a:ext cx="1371600" cy="685800"/>
           </a:xfrm>
           <a:prstGeom prst="rect">
             <a:avLst/>
           </a:prstGeom>
           <a:solidFill>
-            <a:srgbClr val="F15C2C"/>
+            <a:srgbClr val="1A1A1A"/>
           </a:solidFill>
           <a:ln>
             <a:noFill/>
@@ -9279,8 +8757,8 @@
         </p:nvSpPr>
         <p:spPr>
           <a:xfrm>
-            <a:off x="6751216" y="1984248"/>
-            <a:ext cx="1463040" cy="320040"/>
+            <a:off x="6751216" y="1737360"/>
+            <a:ext cx="1828800" cy="320040"/>
           </a:xfrm>
           <a:prstGeom prst="rect">
             <a:avLst/>
@@ -9305,7 +8783,7 @@
                 </a:solidFill>
                 <a:latin typeface="Space Grotesk"/>
               </a:rPr>
-              <a:t>#F15C2C</a:t>
+              <a:t>#1A1A1A</a:t>
             </a:r>
           </a:p>
         </p:txBody>
@@ -9318,8 +8796,8 @@
         </p:nvSpPr>
         <p:spPr>
           <a:xfrm>
-            <a:off x="8351416" y="1965960"/>
-            <a:ext cx="1463040" cy="777240"/>
+            <a:off x="6751216" y="2057400"/>
+            <a:ext cx="2926080" cy="320040"/>
           </a:xfrm>
           <a:prstGeom prst="rect">
             <a:avLst/>
@@ -9334,63 +8812,77 @@
           <a:p>
             <a:pPr algn="l">
               <a:lnSpc>
-                <a:spcPct val="130000"/>
-              </a:lnSpc>
-            </a:pPr>
-            <a:r>
-              <a:rPr sz="1100" b="0">
+                <a:spcPct val="100000"/>
+              </a:lnSpc>
+            </a:pPr>
+            <a:r>
+              <a:rPr sz="1150" b="0">
                 <a:solidFill>
                   <a:srgbClr val="5A5A5A"/>
                 </a:solidFill>
-                <a:latin typeface="Consolas"/>
-              </a:rPr>
-              <a:t>R: 241</a:t>
-            </a:r>
-          </a:p>
-          <a:p>
-            <a:pPr algn="l">
-              <a:lnSpc>
-                <a:spcPct val="130000"/>
-              </a:lnSpc>
-            </a:pPr>
-            <a:r>
-              <a:rPr sz="1100" b="0">
-                <a:solidFill>
-                  <a:srgbClr val="5A5A5A"/>
-                </a:solidFill>
-                <a:latin typeface="Consolas"/>
-              </a:rPr>
-              <a:t>G: 92</a:t>
-            </a:r>
-          </a:p>
-          <a:p>
-            <a:pPr algn="l">
-              <a:lnSpc>
-                <a:spcPct val="130000"/>
-              </a:lnSpc>
-            </a:pPr>
-            <a:r>
-              <a:rPr sz="1100" b="0">
-                <a:solidFill>
-                  <a:srgbClr val="5A5A5A"/>
-                </a:solidFill>
-                <a:latin typeface="Consolas"/>
-              </a:rPr>
-              <a:t>B: 44</a:t>
-            </a:r>
-          </a:p>
-        </p:txBody>
-      </p:sp>
-      <p:sp>
-        <p:nvSpPr>
-          <p:cNvPr id="10" name="TextBox 9"/>
+                <a:latin typeface="Schibsted Grotesk"/>
+              </a:rPr>
+              <a:t>Ink — body text</a:t>
+            </a:r>
+          </a:p>
+        </p:txBody>
+      </p:sp>
+      <p:sp>
+        <p:nvSpPr>
+          <p:cNvPr id="10" name="Rectangle 9"/>
+          <p:cNvSpPr/>
+          <p:nvPr/>
+        </p:nvSpPr>
+        <p:spPr>
+          <a:xfrm>
+            <a:off x="5151016" y="2697480"/>
+            <a:ext cx="1371600" cy="685800"/>
+          </a:xfrm>
+          <a:prstGeom prst="rect">
+            <a:avLst/>
+          </a:prstGeom>
+          <a:solidFill>
+            <a:srgbClr val="F6F6F6"/>
+          </a:solidFill>
+          <a:ln w="12700">
+            <a:solidFill>
+              <a:srgbClr val="E4E4E4"/>
+            </a:solidFill>
+          </a:ln>
+          <a:effectLst/>
+        </p:spPr>
+        <p:style>
+          <a:lnRef idx="1">
+            <a:schemeClr val="accent1"/>
+          </a:lnRef>
+          <a:fillRef idx="3">
+            <a:schemeClr val="accent1"/>
+          </a:fillRef>
+          <a:effectRef idx="2">
+            <a:schemeClr val="accent1"/>
+          </a:effectRef>
+          <a:fontRef idx="minor">
+            <a:schemeClr val="lt1"/>
+          </a:fontRef>
+        </p:style>
+        <p:txBody>
+          <a:bodyPr rtlCol="0" anchor="ctr"/>
+          <a:lstStyle/>
+          <a:p>
+            <a:pPr algn="ctr"/>
+          </a:p>
+        </p:txBody>
+      </p:sp>
+      <p:sp>
+        <p:nvSpPr>
+          <p:cNvPr id="11" name="TextBox 10"/>
           <p:cNvSpPr txBox="1"/>
           <p:nvPr/>
         </p:nvSpPr>
         <p:spPr>
           <a:xfrm>
-            <a:off x="6751216" y="2331720"/>
-            <a:ext cx="2926080" cy="365760"/>
+            <a:off x="6751216" y="2743200"/>
+            <a:ext cx="1828800" cy="320040"/>
           </a:xfrm>
           <a:prstGeom prst="rect">
             <a:avLst/>
@@ -9409,33 +8901,72 @@
               </a:lnSpc>
             </a:pPr>
             <a:r>
+              <a:rPr sz="1700" b="1">
+                <a:solidFill>
+                  <a:srgbClr val="1A1A1A"/>
+                </a:solidFill>
+                <a:latin typeface="Space Grotesk"/>
+              </a:rPr>
+              <a:t>#F6F6F6</a:t>
+            </a:r>
+          </a:p>
+        </p:txBody>
+      </p:sp>
+      <p:sp>
+        <p:nvSpPr>
+          <p:cNvPr id="12" name="TextBox 11"/>
+          <p:cNvSpPr txBox="1"/>
+          <p:nvPr/>
+        </p:nvSpPr>
+        <p:spPr>
+          <a:xfrm>
+            <a:off x="6751216" y="3063240"/>
+            <a:ext cx="2926080" cy="320040"/>
+          </a:xfrm>
+          <a:prstGeom prst="rect">
+            <a:avLst/>
+          </a:prstGeom>
+          <a:noFill/>
+        </p:spPr>
+        <p:txBody>
+          <a:bodyPr wrap="square" anchor="t" lIns="0" rIns="0" tIns="0" bIns="0">
+            <a:spAutoFit/>
+          </a:bodyPr>
+          <a:lstStyle/>
+          <a:p>
+            <a:pPr algn="l">
+              <a:lnSpc>
+                <a:spcPct val="100000"/>
+              </a:lnSpc>
+            </a:pPr>
+            <a:r>
               <a:rPr sz="1150" b="0">
                 <a:solidFill>
                   <a:srgbClr val="5A5A5A"/>
                 </a:solidFill>
                 <a:latin typeface="Schibsted Grotesk"/>
               </a:rPr>
-              <a:t>Coral — primary / action</a:t>
-            </a:r>
-          </a:p>
-        </p:txBody>
-      </p:sp>
-      <p:sp>
-        <p:nvSpPr>
-          <p:cNvPr id="11" name="Rectangle 10"/>
+              <a:t>Surface Soft — alt sections</a:t>
+            </a:r>
+          </a:p>
+        </p:txBody>
+      </p:sp>
+      <p:sp>
+        <p:nvSpPr>
+          <p:cNvPr id="13" name="Rectangle 12"/>
           <p:cNvSpPr/>
           <p:nvPr/>
         </p:nvSpPr>
         <p:spPr>
           <a:xfrm>
-            <a:off x="5151016" y="3200400"/>
-            <a:ext cx="1371600" cy="822960"/>
+            <a:off x="5151016" y="3703320"/>
+            <a:ext cx="1371600" cy="685800"/>
           </a:xfrm>
           <a:prstGeom prst="rect">
             <a:avLst/>
           </a:prstGeom>
           <a:solidFill>
-            <a:srgbClr val="329FE6"/>
+            <a:srgbClr val="1F8A4C"/>
           </a:solidFill>
           <a:ln>
             <a:noFill/>
@@ -9466,14 +8997,14 @@
       </p:sp>
       <p:sp>
         <p:nvSpPr>
-          <p:cNvPr id="12" name="TextBox 11"/>
+          <p:cNvPr id="14" name="TextBox 13"/>
           <p:cNvSpPr txBox="1"/>
           <p:nvPr/>
         </p:nvSpPr>
         <p:spPr>
           <a:xfrm>
-            <a:off x="6751216" y="3218688"/>
-            <a:ext cx="1463040" cy="320040"/>
+            <a:off x="6751216" y="3749040"/>
+            <a:ext cx="1828800" cy="320040"/>
           </a:xfrm>
           <a:prstGeom prst="rect">
             <a:avLst/>
@@ -9498,21 +9029,21 @@
                 </a:solidFill>
                 <a:latin typeface="Space Grotesk"/>
               </a:rPr>
-              <a:t>#329FE6</a:t>
-            </a:r>
-          </a:p>
-        </p:txBody>
-      </p:sp>
-      <p:sp>
-        <p:nvSpPr>
-          <p:cNvPr id="13" name="TextBox 12"/>
+              <a:t>#1F8A4C</a:t>
+            </a:r>
+          </a:p>
+        </p:txBody>
+      </p:sp>
+      <p:sp>
+        <p:nvSpPr>
+          <p:cNvPr id="15" name="TextBox 14"/>
           <p:cNvSpPr txBox="1"/>
           <p:nvPr/>
         </p:nvSpPr>
         <p:spPr>
           <a:xfrm>
-            <a:off x="8351416" y="3200400"/>
-            <a:ext cx="1463040" cy="777240"/>
+            <a:off x="6751216" y="4069080"/>
+            <a:ext cx="2926080" cy="320040"/>
           </a:xfrm>
           <a:prstGeom prst="rect">
             <a:avLst/>
@@ -9527,108 +9058,37 @@
           <a:p>
             <a:pPr algn="l">
               <a:lnSpc>
-                <a:spcPct val="130000"/>
-              </a:lnSpc>
-            </a:pPr>
-            <a:r>
-              <a:rPr sz="1100" b="0">
+                <a:spcPct val="100000"/>
+              </a:lnSpc>
+            </a:pPr>
+            <a:r>
+              <a:rPr sz="1150" b="0">
                 <a:solidFill>
                   <a:srgbClr val="5A5A5A"/>
                 </a:solidFill>
-                <a:latin typeface="Consolas"/>
-              </a:rPr>
-              <a:t>R: 50</a:t>
-            </a:r>
-          </a:p>
-          <a:p>
-            <a:pPr algn="l">
-              <a:lnSpc>
-                <a:spcPct val="130000"/>
-              </a:lnSpc>
-            </a:pPr>
-            <a:r>
-              <a:rPr sz="1100" b="0">
-                <a:solidFill>
-                  <a:srgbClr val="5A5A5A"/>
-                </a:solidFill>
-                <a:latin typeface="Consolas"/>
-              </a:rPr>
-              <a:t>G: 159</a:t>
-            </a:r>
-          </a:p>
-          <a:p>
-            <a:pPr algn="l">
-              <a:lnSpc>
-                <a:spcPct val="130000"/>
-              </a:lnSpc>
-            </a:pPr>
-            <a:r>
-              <a:rPr sz="1100" b="0">
-                <a:solidFill>
-                  <a:srgbClr val="5A5A5A"/>
-                </a:solidFill>
-                <a:latin typeface="Consolas"/>
-              </a:rPr>
-              <a:t>B: 230</a:t>
-            </a:r>
-          </a:p>
-        </p:txBody>
-      </p:sp>
-      <p:sp>
-        <p:nvSpPr>
-          <p:cNvPr id="14" name="TextBox 13"/>
-          <p:cNvSpPr txBox="1"/>
-          <p:nvPr/>
-        </p:nvSpPr>
-        <p:spPr>
-          <a:xfrm>
-            <a:off x="6751216" y="3566160"/>
-            <a:ext cx="2926080" cy="365760"/>
-          </a:xfrm>
-          <a:prstGeom prst="rect">
-            <a:avLst/>
-          </a:prstGeom>
-          <a:noFill/>
-        </p:spPr>
-        <p:txBody>
-          <a:bodyPr wrap="square" anchor="t" lIns="0" rIns="0" tIns="0" bIns="0">
-            <a:spAutoFit/>
-          </a:bodyPr>
-          <a:lstStyle/>
-          <a:p>
-            <a:pPr algn="l">
-              <a:lnSpc>
-                <a:spcPct val="100000"/>
-              </a:lnSpc>
-            </a:pPr>
-            <a:r>
-              <a:rPr sz="1150" b="0">
-                <a:solidFill>
-                  <a:srgbClr val="5A5A5A"/>
-                </a:solidFill>
                 <a:latin typeface="Schibsted Grotesk"/>
               </a:rPr>
-              <a:t>Blue — employer path</a:t>
-            </a:r>
-          </a:p>
-        </p:txBody>
-      </p:sp>
-      <p:sp>
-        <p:nvSpPr>
-          <p:cNvPr id="15" name="Rectangle 14"/>
+              <a:t>Success</a:t>
+            </a:r>
+          </a:p>
+        </p:txBody>
+      </p:sp>
+      <p:sp>
+        <p:nvSpPr>
+          <p:cNvPr id="16" name="Rectangle 15"/>
           <p:cNvSpPr/>
           <p:nvPr/>
         </p:nvSpPr>
         <p:spPr>
           <a:xfrm>
-            <a:off x="5151016" y="4434840"/>
-            <a:ext cx="1371600" cy="822960"/>
+            <a:off x="5151016" y="4709160"/>
+            <a:ext cx="1371600" cy="685800"/>
           </a:xfrm>
           <a:prstGeom prst="rect">
             <a:avLst/>
           </a:prstGeom>
           <a:solidFill>
-            <a:srgbClr val="7A35AE"/>
+            <a:srgbClr val="C0392B"/>
           </a:solidFill>
           <a:ln>
             <a:noFill/>
@@ -9659,14 +9119,14 @@
       </p:sp>
       <p:sp>
         <p:nvSpPr>
-          <p:cNvPr id="16" name="TextBox 15"/>
+          <p:cNvPr id="17" name="TextBox 16"/>
           <p:cNvSpPr txBox="1"/>
           <p:nvPr/>
         </p:nvSpPr>
         <p:spPr>
           <a:xfrm>
-            <a:off x="6751216" y="4453128"/>
-            <a:ext cx="1463040" cy="320040"/>
+            <a:off x="6751216" y="4754880"/>
+            <a:ext cx="1828800" cy="320040"/>
           </a:xfrm>
           <a:prstGeom prst="rect">
             <a:avLst/>
@@ -9691,21 +9151,21 @@
                 </a:solidFill>
                 <a:latin typeface="Space Grotesk"/>
               </a:rPr>
-              <a:t>#7A35AE</a:t>
-            </a:r>
-          </a:p>
-        </p:txBody>
-      </p:sp>
-      <p:sp>
-        <p:nvSpPr>
-          <p:cNvPr id="17" name="TextBox 16"/>
+              <a:t>#C0392B</a:t>
+            </a:r>
+          </a:p>
+        </p:txBody>
+      </p:sp>
+      <p:sp>
+        <p:nvSpPr>
+          <p:cNvPr id="18" name="TextBox 17"/>
           <p:cNvSpPr txBox="1"/>
           <p:nvPr/>
         </p:nvSpPr>
         <p:spPr>
           <a:xfrm>
-            <a:off x="8351416" y="4434840"/>
-            <a:ext cx="1463040" cy="777240"/>
+            <a:off x="6751216" y="5074920"/>
+            <a:ext cx="2926080" cy="320040"/>
           </a:xfrm>
           <a:prstGeom prst="rect">
             <a:avLst/>
@@ -9720,88 +9180,17 @@
           <a:p>
             <a:pPr algn="l">
               <a:lnSpc>
-                <a:spcPct val="130000"/>
-              </a:lnSpc>
-            </a:pPr>
-            <a:r>
-              <a:rPr sz="1100" b="0">
+                <a:spcPct val="100000"/>
+              </a:lnSpc>
+            </a:pPr>
+            <a:r>
+              <a:rPr sz="1150" b="0">
                 <a:solidFill>
                   <a:srgbClr val="5A5A5A"/>
                 </a:solidFill>
-                <a:latin typeface="Consolas"/>
-              </a:rPr>
-              <a:t>R: 122</a:t>
-            </a:r>
-          </a:p>
-          <a:p>
-            <a:pPr algn="l">
-              <a:lnSpc>
-                <a:spcPct val="130000"/>
-              </a:lnSpc>
-            </a:pPr>
-            <a:r>
-              <a:rPr sz="1100" b="0">
-                <a:solidFill>
-                  <a:srgbClr val="5A5A5A"/>
-                </a:solidFill>
-                <a:latin typeface="Consolas"/>
-              </a:rPr>
-              <a:t>G: 53</a:t>
-            </a:r>
-          </a:p>
-          <a:p>
-            <a:pPr algn="l">
-              <a:lnSpc>
-                <a:spcPct val="130000"/>
-              </a:lnSpc>
-            </a:pPr>
-            <a:r>
-              <a:rPr sz="1100" b="0">
-                <a:solidFill>
-                  <a:srgbClr val="5A5A5A"/>
-                </a:solidFill>
-                <a:latin typeface="Consolas"/>
-              </a:rPr>
-              <a:t>B: 174</a:t>
-            </a:r>
-          </a:p>
-        </p:txBody>
-      </p:sp>
-      <p:sp>
-        <p:nvSpPr>
-          <p:cNvPr id="18" name="TextBox 17"/>
-          <p:cNvSpPr txBox="1"/>
-          <p:nvPr/>
-        </p:nvSpPr>
-        <p:spPr>
-          <a:xfrm>
-            <a:off x="6751216" y="4800600"/>
-            <a:ext cx="2926080" cy="365760"/>
-          </a:xfrm>
-          <a:prstGeom prst="rect">
-            <a:avLst/>
-          </a:prstGeom>
-          <a:noFill/>
-        </p:spPr>
-        <p:txBody>
-          <a:bodyPr wrap="square" anchor="t" lIns="0" rIns="0" tIns="0" bIns="0">
-            <a:spAutoFit/>
-          </a:bodyPr>
-          <a:lstStyle/>
-          <a:p>
-            <a:pPr algn="l">
-              <a:lnSpc>
-                <a:spcPct val="100000"/>
-              </a:lnSpc>
-            </a:pPr>
-            <a:r>
-              <a:rPr sz="1150" b="0">
-                <a:solidFill>
-                  <a:srgbClr val="5A5A5A"/>
-                </a:solidFill>
                 <a:latin typeface="Schibsted Grotesk"/>
               </a:rPr>
-              <a:t>Purple — candidate path</a:t>
+              <a:t>Danger</a:t>
             </a:r>
           </a:p>
         </p:txBody>
@@ -9946,7 +9335,7 @@
                 </a:solidFill>
                 <a:latin typeface="Space Grotesk"/>
               </a:rPr>
-              <a:t>03</a:t>
+              <a:t>04</a:t>
             </a:r>
           </a:p>
         </p:txBody>
@@ -9985,23 +9374,7 @@
                 </a:solidFill>
                 <a:latin typeface="Space Grotesk"/>
               </a:rPr>
-              <a:t>Secondary</a:t>
-            </a:r>
-          </a:p>
-          <a:p>
-            <a:pPr algn="ctr">
-              <a:lnSpc>
-                <a:spcPct val="105000"/>
-              </a:lnSpc>
-            </a:pPr>
-            <a:r>
-              <a:rPr sz="2600" b="1">
-                <a:solidFill>
-                  <a:srgbClr val="FFFFFF"/>
-                </a:solidFill>
-                <a:latin typeface="Space Grotesk"/>
-              </a:rPr>
-              <a:t>Colors</a:t>
+              <a:t>Typography</a:t>
             </a:r>
           </a:p>
         </p:txBody>
@@ -10040,65 +9413,21 @@
                 </a:solidFill>
                 <a:latin typeface="Schibsted Grotesk"/>
               </a:rPr>
-              <a:t>These create contrast against the main palette and should be used sparingly, for text, surfaces, and system states.</a:t>
-            </a:r>
-          </a:p>
-        </p:txBody>
-      </p:sp>
-      <p:sp>
-        <p:nvSpPr>
-          <p:cNvPr id="7" name="Rectangle 6"/>
-          <p:cNvSpPr/>
-          <p:nvPr/>
-        </p:nvSpPr>
-        <p:spPr>
-          <a:xfrm>
-            <a:off x="5151016" y="1691640"/>
-            <a:ext cx="1371600" cy="685800"/>
-          </a:xfrm>
-          <a:prstGeom prst="rect">
-            <a:avLst/>
-          </a:prstGeom>
-          <a:solidFill>
-            <a:srgbClr val="1A1A1A"/>
-          </a:solidFill>
-          <a:ln>
-            <a:noFill/>
-          </a:ln>
-          <a:effectLst/>
-        </p:spPr>
-        <p:style>
-          <a:lnRef idx="1">
-            <a:schemeClr val="accent1"/>
-          </a:lnRef>
-          <a:fillRef idx="3">
-            <a:schemeClr val="accent1"/>
-          </a:fillRef>
-          <a:effectRef idx="2">
-            <a:schemeClr val="accent1"/>
-          </a:effectRef>
-          <a:fontRef idx="minor">
-            <a:schemeClr val="lt1"/>
-          </a:fontRef>
-        </p:style>
-        <p:txBody>
-          <a:bodyPr rtlCol="0" anchor="ctr"/>
-          <a:lstStyle/>
-          <a:p>
-            <a:pPr algn="ctr"/>
-          </a:p>
-        </p:txBody>
-      </p:sp>
-      <p:sp>
-        <p:nvSpPr>
-          <p:cNvPr id="8" name="TextBox 7"/>
+              <a:t>Two contrasting typefaces: Space Grotesk for headlines, Schibsted Grotesk for body. Weights can vary, as long as the text stays legible.</a:t>
+            </a:r>
+          </a:p>
+        </p:txBody>
+      </p:sp>
+      <p:sp>
+        <p:nvSpPr>
+          <p:cNvPr id="7" name="TextBox 6"/>
           <p:cNvSpPr txBox="1"/>
           <p:nvPr/>
         </p:nvSpPr>
         <p:spPr>
           <a:xfrm>
-            <a:off x="6751216" y="1737360"/>
-            <a:ext cx="1828800" cy="320040"/>
+            <a:off x="5151016" y="1554480"/>
+            <a:ext cx="4572000" cy="457200"/>
           </a:xfrm>
           <a:prstGeom prst="rect">
             <a:avLst/>
@@ -10117,27 +9446,27 @@
               </a:lnSpc>
             </a:pPr>
             <a:r>
-              <a:rPr sz="1700" b="1">
+              <a:rPr sz="2400" b="1">
                 <a:solidFill>
                   <a:srgbClr val="1A1A1A"/>
                 </a:solidFill>
                 <a:latin typeface="Space Grotesk"/>
               </a:rPr>
-              <a:t>#1A1A1A</a:t>
-            </a:r>
-          </a:p>
-        </p:txBody>
-      </p:sp>
-      <p:sp>
-        <p:nvSpPr>
-          <p:cNvPr id="9" name="TextBox 8"/>
+              <a:t>Space Grotesk</a:t>
+            </a:r>
+          </a:p>
+        </p:txBody>
+      </p:sp>
+      <p:sp>
+        <p:nvSpPr>
+          <p:cNvPr id="8" name="TextBox 7"/>
           <p:cNvSpPr txBox="1"/>
           <p:nvPr/>
         </p:nvSpPr>
         <p:spPr>
           <a:xfrm>
-            <a:off x="6751216" y="2057400"/>
-            <a:ext cx="2926080" cy="320040"/>
+            <a:off x="5151016" y="2103120"/>
+            <a:ext cx="1097280" cy="548640"/>
           </a:xfrm>
           <a:prstGeom prst="rect">
             <a:avLst/>
@@ -10156,73 +9485,257 @@
               </a:lnSpc>
             </a:pPr>
             <a:r>
-              <a:rPr sz="1150" b="0">
+              <a:rPr sz="3000" b="0">
+                <a:solidFill>
+                  <a:srgbClr val="1A1A1A"/>
+                </a:solidFill>
+                <a:latin typeface="Space Grotesk"/>
+              </a:rPr>
+              <a:t>Aa</a:t>
+            </a:r>
+          </a:p>
+        </p:txBody>
+      </p:sp>
+      <p:sp>
+        <p:nvSpPr>
+          <p:cNvPr id="9" name="TextBox 8"/>
+          <p:cNvSpPr txBox="1"/>
+          <p:nvPr/>
+        </p:nvSpPr>
+        <p:spPr>
+          <a:xfrm>
+            <a:off x="5151016" y="2743200"/>
+            <a:ext cx="1097280" cy="274320"/>
+          </a:xfrm>
+          <a:prstGeom prst="rect">
+            <a:avLst/>
+          </a:prstGeom>
+          <a:noFill/>
+        </p:spPr>
+        <p:txBody>
+          <a:bodyPr wrap="square" anchor="t" lIns="0" rIns="0" tIns="0" bIns="0">
+            <a:spAutoFit/>
+          </a:bodyPr>
+          <a:lstStyle/>
+          <a:p>
+            <a:pPr algn="l">
+              <a:lnSpc>
+                <a:spcPct val="100000"/>
+              </a:lnSpc>
+            </a:pPr>
+            <a:r>
+              <a:rPr sz="1050" b="0">
                 <a:solidFill>
                   <a:srgbClr val="5A5A5A"/>
                 </a:solidFill>
                 <a:latin typeface="Schibsted Grotesk"/>
               </a:rPr>
-              <a:t>Ink — body text</a:t>
-            </a:r>
-          </a:p>
-        </p:txBody>
-      </p:sp>
-      <p:sp>
-        <p:nvSpPr>
-          <p:cNvPr id="10" name="Rectangle 9"/>
-          <p:cNvSpPr/>
-          <p:nvPr/>
-        </p:nvSpPr>
-        <p:spPr>
-          <a:xfrm>
-            <a:off x="5151016" y="2697480"/>
-            <a:ext cx="1371600" cy="685800"/>
-          </a:xfrm>
-          <a:prstGeom prst="rect">
-            <a:avLst/>
-          </a:prstGeom>
-          <a:solidFill>
-            <a:srgbClr val="F6F6F6"/>
-          </a:solidFill>
+              <a:t>Medium</a:t>
+            </a:r>
+          </a:p>
+        </p:txBody>
+      </p:sp>
+      <p:sp>
+        <p:nvSpPr>
+          <p:cNvPr id="10" name="TextBox 9"/>
+          <p:cNvSpPr txBox="1"/>
+          <p:nvPr/>
+        </p:nvSpPr>
+        <p:spPr>
+          <a:xfrm>
+            <a:off x="6431176" y="2103120"/>
+            <a:ext cx="1097280" cy="548640"/>
+          </a:xfrm>
+          <a:prstGeom prst="rect">
+            <a:avLst/>
+          </a:prstGeom>
+          <a:noFill/>
+        </p:spPr>
+        <p:txBody>
+          <a:bodyPr wrap="square" anchor="t" lIns="0" rIns="0" tIns="0" bIns="0">
+            <a:spAutoFit/>
+          </a:bodyPr>
+          <a:lstStyle/>
+          <a:p>
+            <a:pPr algn="l">
+              <a:lnSpc>
+                <a:spcPct val="100000"/>
+              </a:lnSpc>
+            </a:pPr>
+            <a:r>
+              <a:rPr sz="3000" b="1">
+                <a:solidFill>
+                  <a:srgbClr val="1A1A1A"/>
+                </a:solidFill>
+                <a:latin typeface="Space Grotesk"/>
+              </a:rPr>
+              <a:t>Aa</a:t>
+            </a:r>
+          </a:p>
+        </p:txBody>
+      </p:sp>
+      <p:sp>
+        <p:nvSpPr>
+          <p:cNvPr id="11" name="TextBox 10"/>
+          <p:cNvSpPr txBox="1"/>
+          <p:nvPr/>
+        </p:nvSpPr>
+        <p:spPr>
+          <a:xfrm>
+            <a:off x="6431176" y="2743200"/>
+            <a:ext cx="1097280" cy="274320"/>
+          </a:xfrm>
+          <a:prstGeom prst="rect">
+            <a:avLst/>
+          </a:prstGeom>
+          <a:noFill/>
+        </p:spPr>
+        <p:txBody>
+          <a:bodyPr wrap="square" anchor="t" lIns="0" rIns="0" tIns="0" bIns="0">
+            <a:spAutoFit/>
+          </a:bodyPr>
+          <a:lstStyle/>
+          <a:p>
+            <a:pPr algn="l">
+              <a:lnSpc>
+                <a:spcPct val="100000"/>
+              </a:lnSpc>
+            </a:pPr>
+            <a:r>
+              <a:rPr sz="1050" b="0">
+                <a:solidFill>
+                  <a:srgbClr val="5A5A5A"/>
+                </a:solidFill>
+                <a:latin typeface="Schibsted Grotesk"/>
+              </a:rPr>
+              <a:t>SemiBold</a:t>
+            </a:r>
+          </a:p>
+        </p:txBody>
+      </p:sp>
+      <p:sp>
+        <p:nvSpPr>
+          <p:cNvPr id="12" name="TextBox 11"/>
+          <p:cNvSpPr txBox="1"/>
+          <p:nvPr/>
+        </p:nvSpPr>
+        <p:spPr>
+          <a:xfrm>
+            <a:off x="7711336" y="2103120"/>
+            <a:ext cx="1097280" cy="548640"/>
+          </a:xfrm>
+          <a:prstGeom prst="rect">
+            <a:avLst/>
+          </a:prstGeom>
+          <a:noFill/>
+        </p:spPr>
+        <p:txBody>
+          <a:bodyPr wrap="square" anchor="t" lIns="0" rIns="0" tIns="0" bIns="0">
+            <a:spAutoFit/>
+          </a:bodyPr>
+          <a:lstStyle/>
+          <a:p>
+            <a:pPr algn="l">
+              <a:lnSpc>
+                <a:spcPct val="100000"/>
+              </a:lnSpc>
+            </a:pPr>
+            <a:r>
+              <a:rPr sz="3000" b="1">
+                <a:solidFill>
+                  <a:srgbClr val="1A1A1A"/>
+                </a:solidFill>
+                <a:latin typeface="Space Grotesk"/>
+              </a:rPr>
+              <a:t>Aa</a:t>
+            </a:r>
+          </a:p>
+        </p:txBody>
+      </p:sp>
+      <p:sp>
+        <p:nvSpPr>
+          <p:cNvPr id="13" name="TextBox 12"/>
+          <p:cNvSpPr txBox="1"/>
+          <p:nvPr/>
+        </p:nvSpPr>
+        <p:spPr>
+          <a:xfrm>
+            <a:off x="7711336" y="2743200"/>
+            <a:ext cx="1097280" cy="274320"/>
+          </a:xfrm>
+          <a:prstGeom prst="rect">
+            <a:avLst/>
+          </a:prstGeom>
+          <a:noFill/>
+        </p:spPr>
+        <p:txBody>
+          <a:bodyPr wrap="square" anchor="t" lIns="0" rIns="0" tIns="0" bIns="0">
+            <a:spAutoFit/>
+          </a:bodyPr>
+          <a:lstStyle/>
+          <a:p>
+            <a:pPr algn="l">
+              <a:lnSpc>
+                <a:spcPct val="100000"/>
+              </a:lnSpc>
+            </a:pPr>
+            <a:r>
+              <a:rPr sz="1050" b="0">
+                <a:solidFill>
+                  <a:srgbClr val="5A5A5A"/>
+                </a:solidFill>
+                <a:latin typeface="Schibsted Grotesk"/>
+              </a:rPr>
+              <a:t>Bold</a:t>
+            </a:r>
+          </a:p>
+        </p:txBody>
+      </p:sp>
+      <p:cxnSp>
+        <p:nvCxnSpPr>
+          <p:cNvPr id="14" name="Connector 13"/>
+          <p:cNvCxnSpPr/>
+          <p:nvPr/>
+        </p:nvCxnSpPr>
+        <p:spPr>
+          <a:xfrm>
+            <a:off x="5151016" y="3246120"/>
+            <a:ext cx="6035040" cy="0"/>
+          </a:xfrm>
+          <a:prstGeom prst="line">
+            <a:avLst/>
+          </a:prstGeom>
           <a:ln w="12700">
             <a:solidFill>
               <a:srgbClr val="E4E4E4"/>
             </a:solidFill>
           </a:ln>
-          <a:effectLst/>
         </p:spPr>
         <p:style>
-          <a:lnRef idx="1">
+          <a:lnRef idx="2">
             <a:schemeClr val="accent1"/>
           </a:lnRef>
-          <a:fillRef idx="3">
+          <a:fillRef idx="0">
             <a:schemeClr val="accent1"/>
           </a:fillRef>
-          <a:effectRef idx="2">
+          <a:effectRef idx="1">
             <a:schemeClr val="accent1"/>
           </a:effectRef>
           <a:fontRef idx="minor">
-            <a:schemeClr val="lt1"/>
+            <a:schemeClr val="tx1"/>
           </a:fontRef>
         </p:style>
-        <p:txBody>
-          <a:bodyPr rtlCol="0" anchor="ctr"/>
-          <a:lstStyle/>
-          <a:p>
-            <a:pPr algn="ctr"/>
-          </a:p>
-        </p:txBody>
-      </p:sp>
-      <p:sp>
-        <p:nvSpPr>
-          <p:cNvPr id="11" name="TextBox 10"/>
+      </p:cxnSp>
+      <p:sp>
+        <p:nvSpPr>
+          <p:cNvPr id="15" name="TextBox 14"/>
           <p:cNvSpPr txBox="1"/>
           <p:nvPr/>
         </p:nvSpPr>
         <p:spPr>
           <a:xfrm>
-            <a:off x="6751216" y="2743200"/>
-            <a:ext cx="1828800" cy="320040"/>
+            <a:off x="5151016" y="3429000"/>
+            <a:ext cx="4572000" cy="457200"/>
           </a:xfrm>
           <a:prstGeom prst="rect">
             <a:avLst/>
@@ -10241,27 +9754,27 @@
               </a:lnSpc>
             </a:pPr>
             <a:r>
-              <a:rPr sz="1700" b="1">
+              <a:rPr sz="2400" b="1">
                 <a:solidFill>
                   <a:srgbClr val="1A1A1A"/>
                 </a:solidFill>
-                <a:latin typeface="Space Grotesk"/>
-              </a:rPr>
-              <a:t>#F6F6F6</a:t>
-            </a:r>
-          </a:p>
-        </p:txBody>
-      </p:sp>
-      <p:sp>
-        <p:nvSpPr>
-          <p:cNvPr id="12" name="TextBox 11"/>
+                <a:latin typeface="Schibsted Grotesk"/>
+              </a:rPr>
+              <a:t>Schibsted Grotesk</a:t>
+            </a:r>
+          </a:p>
+        </p:txBody>
+      </p:sp>
+      <p:sp>
+        <p:nvSpPr>
+          <p:cNvPr id="16" name="TextBox 15"/>
           <p:cNvSpPr txBox="1"/>
           <p:nvPr/>
         </p:nvSpPr>
         <p:spPr>
           <a:xfrm>
-            <a:off x="6751216" y="3063240"/>
-            <a:ext cx="2926080" cy="320040"/>
+            <a:off x="5151016" y="3977639"/>
+            <a:ext cx="1097280" cy="548640"/>
           </a:xfrm>
           <a:prstGeom prst="rect">
             <a:avLst/>
@@ -10280,71 +9793,27 @@
               </a:lnSpc>
             </a:pPr>
             <a:r>
-              <a:rPr sz="1150" b="0">
-                <a:solidFill>
-                  <a:srgbClr val="5A5A5A"/>
+              <a:rPr sz="3000" b="0">
+                <a:solidFill>
+                  <a:srgbClr val="1A1A1A"/>
                 </a:solidFill>
                 <a:latin typeface="Schibsted Grotesk"/>
               </a:rPr>
-              <a:t>Surface Soft — alt sections</a:t>
-            </a:r>
-          </a:p>
-        </p:txBody>
-      </p:sp>
-      <p:sp>
-        <p:nvSpPr>
-          <p:cNvPr id="13" name="Rectangle 12"/>
-          <p:cNvSpPr/>
-          <p:nvPr/>
-        </p:nvSpPr>
-        <p:spPr>
-          <a:xfrm>
-            <a:off x="5151016" y="3703320"/>
-            <a:ext cx="1371600" cy="685800"/>
-          </a:xfrm>
-          <a:prstGeom prst="rect">
-            <a:avLst/>
-          </a:prstGeom>
-          <a:solidFill>
-            <a:srgbClr val="1F8A4C"/>
-          </a:solidFill>
-          <a:ln>
-            <a:noFill/>
-          </a:ln>
-          <a:effectLst/>
-        </p:spPr>
-        <p:style>
-          <a:lnRef idx="1">
-            <a:schemeClr val="accent1"/>
-          </a:lnRef>
-          <a:fillRef idx="3">
-            <a:schemeClr val="accent1"/>
-          </a:fillRef>
-          <a:effectRef idx="2">
-            <a:schemeClr val="accent1"/>
-          </a:effectRef>
-          <a:fontRef idx="minor">
-            <a:schemeClr val="lt1"/>
-          </a:fontRef>
-        </p:style>
-        <p:txBody>
-          <a:bodyPr rtlCol="0" anchor="ctr"/>
-          <a:lstStyle/>
-          <a:p>
-            <a:pPr algn="ctr"/>
-          </a:p>
-        </p:txBody>
-      </p:sp>
-      <p:sp>
-        <p:nvSpPr>
-          <p:cNvPr id="14" name="TextBox 13"/>
+              <a:t>Aa</a:t>
+            </a:r>
+          </a:p>
+        </p:txBody>
+      </p:sp>
+      <p:sp>
+        <p:nvSpPr>
+          <p:cNvPr id="17" name="TextBox 16"/>
           <p:cNvSpPr txBox="1"/>
           <p:nvPr/>
         </p:nvSpPr>
         <p:spPr>
           <a:xfrm>
-            <a:off x="6751216" y="3749040"/>
-            <a:ext cx="1828800" cy="320040"/>
+            <a:off x="5151016" y="4617720"/>
+            <a:ext cx="1097280" cy="274320"/>
           </a:xfrm>
           <a:prstGeom prst="rect">
             <a:avLst/>
@@ -10363,27 +9832,27 @@
               </a:lnSpc>
             </a:pPr>
             <a:r>
-              <a:rPr sz="1700" b="1">
-                <a:solidFill>
-                  <a:srgbClr val="1A1A1A"/>
-                </a:solidFill>
-                <a:latin typeface="Space Grotesk"/>
-              </a:rPr>
-              <a:t>#1F8A4C</a:t>
-            </a:r>
-          </a:p>
-        </p:txBody>
-      </p:sp>
-      <p:sp>
-        <p:nvSpPr>
-          <p:cNvPr id="15" name="TextBox 14"/>
+              <a:rPr sz="1050" b="0">
+                <a:solidFill>
+                  <a:srgbClr val="5A5A5A"/>
+                </a:solidFill>
+                <a:latin typeface="Schibsted Grotesk"/>
+              </a:rPr>
+              <a:t>Regular</a:t>
+            </a:r>
+          </a:p>
+        </p:txBody>
+      </p:sp>
+      <p:sp>
+        <p:nvSpPr>
+          <p:cNvPr id="18" name="TextBox 17"/>
           <p:cNvSpPr txBox="1"/>
           <p:nvPr/>
         </p:nvSpPr>
         <p:spPr>
           <a:xfrm>
-            <a:off x="6751216" y="4069080"/>
-            <a:ext cx="2926080" cy="320040"/>
+            <a:off x="6431176" y="3977639"/>
+            <a:ext cx="1097280" cy="548640"/>
           </a:xfrm>
           <a:prstGeom prst="rect">
             <a:avLst/>
@@ -10402,71 +9871,27 @@
               </a:lnSpc>
             </a:pPr>
             <a:r>
-              <a:rPr sz="1150" b="0">
-                <a:solidFill>
-                  <a:srgbClr val="5A5A5A"/>
+              <a:rPr sz="3000" b="1">
+                <a:solidFill>
+                  <a:srgbClr val="1A1A1A"/>
                 </a:solidFill>
                 <a:latin typeface="Schibsted Grotesk"/>
               </a:rPr>
-              <a:t>Success</a:t>
-            </a:r>
-          </a:p>
-        </p:txBody>
-      </p:sp>
-      <p:sp>
-        <p:nvSpPr>
-          <p:cNvPr id="16" name="Rectangle 15"/>
-          <p:cNvSpPr/>
-          <p:nvPr/>
-        </p:nvSpPr>
-        <p:spPr>
-          <a:xfrm>
-            <a:off x="5151016" y="4709160"/>
-            <a:ext cx="1371600" cy="685800"/>
-          </a:xfrm>
-          <a:prstGeom prst="rect">
-            <a:avLst/>
-          </a:prstGeom>
-          <a:solidFill>
-            <a:srgbClr val="C0392B"/>
-          </a:solidFill>
-          <a:ln>
-            <a:noFill/>
-          </a:ln>
-          <a:effectLst/>
-        </p:spPr>
-        <p:style>
-          <a:lnRef idx="1">
-            <a:schemeClr val="accent1"/>
-          </a:lnRef>
-          <a:fillRef idx="3">
-            <a:schemeClr val="accent1"/>
-          </a:fillRef>
-          <a:effectRef idx="2">
-            <a:schemeClr val="accent1"/>
-          </a:effectRef>
-          <a:fontRef idx="minor">
-            <a:schemeClr val="lt1"/>
-          </a:fontRef>
-        </p:style>
-        <p:txBody>
-          <a:bodyPr rtlCol="0" anchor="ctr"/>
-          <a:lstStyle/>
-          <a:p>
-            <a:pPr algn="ctr"/>
-          </a:p>
-        </p:txBody>
-      </p:sp>
-      <p:sp>
-        <p:nvSpPr>
-          <p:cNvPr id="17" name="TextBox 16"/>
+              <a:t>Aa</a:t>
+            </a:r>
+          </a:p>
+        </p:txBody>
+      </p:sp>
+      <p:sp>
+        <p:nvSpPr>
+          <p:cNvPr id="19" name="TextBox 18"/>
           <p:cNvSpPr txBox="1"/>
           <p:nvPr/>
         </p:nvSpPr>
         <p:spPr>
           <a:xfrm>
-            <a:off x="6751216" y="4754880"/>
-            <a:ext cx="1828800" cy="320040"/>
+            <a:off x="6431176" y="4617720"/>
+            <a:ext cx="1097280" cy="274320"/>
           </a:xfrm>
           <a:prstGeom prst="rect">
             <a:avLst/>
@@ -10485,52 +9910,13 @@
               </a:lnSpc>
             </a:pPr>
             <a:r>
-              <a:rPr sz="1700" b="1">
-                <a:solidFill>
-                  <a:srgbClr val="1A1A1A"/>
-                </a:solidFill>
-                <a:latin typeface="Space Grotesk"/>
-              </a:rPr>
-              <a:t>#C0392B</a:t>
-            </a:r>
-          </a:p>
-        </p:txBody>
-      </p:sp>
-      <p:sp>
-        <p:nvSpPr>
-          <p:cNvPr id="18" name="TextBox 17"/>
-          <p:cNvSpPr txBox="1"/>
-          <p:nvPr/>
-        </p:nvSpPr>
-        <p:spPr>
-          <a:xfrm>
-            <a:off x="6751216" y="5074920"/>
-            <a:ext cx="2926080" cy="320040"/>
-          </a:xfrm>
-          <a:prstGeom prst="rect">
-            <a:avLst/>
-          </a:prstGeom>
-          <a:noFill/>
-        </p:spPr>
-        <p:txBody>
-          <a:bodyPr wrap="square" anchor="t" lIns="0" rIns="0" tIns="0" bIns="0">
-            <a:spAutoFit/>
-          </a:bodyPr>
-          <a:lstStyle/>
-          <a:p>
-            <a:pPr algn="l">
-              <a:lnSpc>
-                <a:spcPct val="100000"/>
-              </a:lnSpc>
-            </a:pPr>
-            <a:r>
-              <a:rPr sz="1150" b="0">
+              <a:rPr sz="1050" b="0">
                 <a:solidFill>
                   <a:srgbClr val="5A5A5A"/>
                 </a:solidFill>
                 <a:latin typeface="Schibsted Grotesk"/>
               </a:rPr>
-              <a:t>Danger</a:t>
+              <a:t>Bold</a:t>
             </a:r>
           </a:p>
         </p:txBody>

--- a/media-kit/RVA-Builds-Media-Kit.pptx
+++ b/media-kit/RVA-Builds-Media-Kit.pptx
@@ -3114,7 +3114,7 @@
             <a:avLst/>
           </a:prstGeom>
           <a:solidFill>
-            <a:srgbClr val="FFFFFF"/>
+            <a:srgbClr val="F15C2C"/>
           </a:solidFill>
           <a:ln>
             <a:noFill/>
@@ -3143,60 +3143,104 @@
           </a:p>
         </p:txBody>
       </p:sp>
-      <p:sp>
-        <p:nvSpPr>
-          <p:cNvPr id="3" name="Rectangle 2"/>
-          <p:cNvSpPr/>
-          <p:nvPr/>
-        </p:nvSpPr>
-        <p:spPr>
-          <a:xfrm>
-            <a:off x="0" y="0"/>
-            <a:ext cx="4145176" cy="6858000"/>
-          </a:xfrm>
-          <a:prstGeom prst="rect">
-            <a:avLst/>
-          </a:prstGeom>
-          <a:solidFill>
-            <a:srgbClr val="1A1A1A"/>
-          </a:solidFill>
-          <a:ln>
-            <a:noFill/>
-          </a:ln>
-          <a:effectLst/>
-        </p:spPr>
-        <p:style>
-          <a:lnRef idx="1">
-            <a:schemeClr val="accent1"/>
-          </a:lnRef>
-          <a:fillRef idx="3">
-            <a:schemeClr val="accent1"/>
-          </a:fillRef>
-          <a:effectRef idx="2">
-            <a:schemeClr val="accent1"/>
-          </a:effectRef>
-          <a:fontRef idx="minor">
-            <a:schemeClr val="lt1"/>
-          </a:fontRef>
-        </p:style>
-        <p:txBody>
-          <a:bodyPr rtlCol="0" anchor="ctr"/>
-          <a:lstStyle/>
-          <a:p>
-            <a:pPr algn="ctr"/>
-          </a:p>
-        </p:txBody>
-      </p:sp>
-      <p:sp>
-        <p:nvSpPr>
-          <p:cNvPr id="4" name="TextBox 3"/>
+      <p:pic>
+        <p:nvPicPr>
+          <p:cNvPr id="3" name="Picture 2" descr="hero-connection.jpg"/>
+          <p:cNvPicPr>
+            <a:picLocks noChangeAspect="1"/>
+          </p:cNvPicPr>
+          <p:nvPr/>
+        </p:nvPicPr>
+        <p:blipFill>
+          <a:blip r:embed="rId2"/>
+          <a:srcRect l="5561" r="5561"/>
+          <a:stretch>
+            <a:fillRect/>
+          </a:stretch>
+        </p:blipFill>
+        <p:spPr>
+          <a:xfrm>
+            <a:off x="4145176" y="0"/>
+            <a:ext cx="8046519" cy="6858000"/>
+          </a:xfrm>
+          <a:prstGeom prst="rect">
+            <a:avLst/>
+          </a:prstGeom>
+        </p:spPr>
+      </p:pic>
+      <p:pic>
+        <p:nvPicPr>
+          <p:cNvPr id="4" name="Picture 3" descr="rva-builds-icon.png"/>
+          <p:cNvPicPr>
+            <a:picLocks noChangeAspect="1"/>
+          </p:cNvPicPr>
+          <p:nvPr/>
+        </p:nvPicPr>
+        <p:blipFill>
+          <a:blip r:embed="rId3"/>
+          <a:stretch>
+            <a:fillRect/>
+          </a:stretch>
+        </p:blipFill>
+        <p:spPr>
+          <a:xfrm>
+            <a:off x="548640" y="4160520"/>
+            <a:ext cx="365760" cy="365760"/>
+          </a:xfrm>
+          <a:prstGeom prst="rect">
+            <a:avLst/>
+          </a:prstGeom>
+        </p:spPr>
+      </p:pic>
+      <p:sp>
+        <p:nvSpPr>
+          <p:cNvPr id="5" name="TextBox 4"/>
           <p:cNvSpPr txBox="1"/>
           <p:nvPr/>
         </p:nvSpPr>
         <p:spPr>
           <a:xfrm>
-            <a:off x="411480" y="2331720"/>
-            <a:ext cx="3322216" cy="274320"/>
+            <a:off x="960120" y="4160520"/>
+            <a:ext cx="3200400" cy="365760"/>
+          </a:xfrm>
+          <a:prstGeom prst="rect">
+            <a:avLst/>
+          </a:prstGeom>
+          <a:noFill/>
+        </p:spPr>
+        <p:txBody>
+          <a:bodyPr wrap="square" anchor="ctr" lIns="0" rIns="0" tIns="0" bIns="0">
+            <a:spAutoFit/>
+          </a:bodyPr>
+          <a:lstStyle/>
+          <a:p>
+            <a:pPr algn="l">
+              <a:lnSpc>
+                <a:spcPct val="100000"/>
+              </a:lnSpc>
+            </a:pPr>
+            <a:r>
+              <a:rPr sz="1500" b="0">
+                <a:solidFill>
+                  <a:srgbClr val="FFFFFF"/>
+                </a:solidFill>
+                <a:latin typeface="Space Grotesk"/>
+              </a:rPr>
+              <a:t>RVA Builds</a:t>
+            </a:r>
+          </a:p>
+        </p:txBody>
+      </p:sp>
+      <p:sp>
+        <p:nvSpPr>
+          <p:cNvPr id="6" name="TextBox 5"/>
+          <p:cNvSpPr txBox="1"/>
+          <p:nvPr/>
+        </p:nvSpPr>
+        <p:spPr>
+          <a:xfrm>
+            <a:off x="548640" y="4709160"/>
+            <a:ext cx="3657600" cy="457200"/>
           </a:xfrm>
           <a:prstGeom prst="rect">
             <a:avLst/>
@@ -3209,33 +3253,33 @@
           </a:bodyPr>
           <a:lstStyle/>
           <a:p>
-            <a:pPr algn="ctr">
+            <a:pPr algn="l">
               <a:lnSpc>
                 <a:spcPct val="100000"/>
               </a:lnSpc>
             </a:pPr>
             <a:r>
-              <a:rPr sz="1200" b="1">
-                <a:solidFill>
-                  <a:srgbClr val="F15C2C"/>
+              <a:rPr sz="1050" b="1">
+                <a:solidFill>
+                  <a:srgbClr val="FFE3D8"/>
                 </a:solidFill>
                 <a:latin typeface="Space Grotesk"/>
               </a:rPr>
-              <a:t>01</a:t>
-            </a:r>
-          </a:p>
-        </p:txBody>
-      </p:sp>
-      <p:sp>
-        <p:nvSpPr>
-          <p:cNvPr id="5" name="TextBox 4"/>
+              <a:t>RICHMOND ED FUND INITIATIVE</a:t>
+            </a:r>
+          </a:p>
+        </p:txBody>
+      </p:sp>
+      <p:sp>
+        <p:nvSpPr>
+          <p:cNvPr id="7" name="TextBox 6"/>
           <p:cNvSpPr txBox="1"/>
           <p:nvPr/>
         </p:nvSpPr>
         <p:spPr>
           <a:xfrm>
-            <a:off x="411480" y="2651760"/>
-            <a:ext cx="3322216" cy="1005840"/>
+            <a:off x="548640" y="5074920"/>
+            <a:ext cx="3657600" cy="1280160"/>
           </a:xfrm>
           <a:prstGeom prst="rect">
             <a:avLst/>
@@ -3248,568 +3292,35 @@
           </a:bodyPr>
           <a:lstStyle/>
           <a:p>
-            <a:pPr algn="ctr">
-              <a:lnSpc>
-                <a:spcPct val="105000"/>
-              </a:lnSpc>
-            </a:pPr>
-            <a:r>
-              <a:rPr sz="2600" b="1">
+            <a:pPr algn="l">
+              <a:lnSpc>
+                <a:spcPct val="100000"/>
+              </a:lnSpc>
+            </a:pPr>
+            <a:r>
+              <a:rPr sz="4400" b="1">
                 <a:solidFill>
                   <a:srgbClr val="FFFFFF"/>
                 </a:solidFill>
                 <a:latin typeface="Space Grotesk"/>
               </a:rPr>
-              <a:t>What is</a:t>
-            </a:r>
-          </a:p>
-          <a:p>
-            <a:pPr algn="ctr">
-              <a:lnSpc>
-                <a:spcPct val="105000"/>
-              </a:lnSpc>
-            </a:pPr>
-            <a:r>
-              <a:rPr sz="2600" b="1">
+              <a:t>MEDIA</a:t>
+            </a:r>
+          </a:p>
+          <a:p>
+            <a:pPr algn="l">
+              <a:lnSpc>
+                <a:spcPct val="100000"/>
+              </a:lnSpc>
+            </a:pPr>
+            <a:r>
+              <a:rPr sz="4400" b="1">
                 <a:solidFill>
                   <a:srgbClr val="FFFFFF"/>
                 </a:solidFill>
                 <a:latin typeface="Space Grotesk"/>
               </a:rPr>
-              <a:t>RVA Builds?</a:t>
-            </a:r>
-          </a:p>
-        </p:txBody>
-      </p:sp>
-      <p:sp>
-        <p:nvSpPr>
-          <p:cNvPr id="6" name="TextBox 5"/>
-          <p:cNvSpPr txBox="1"/>
-          <p:nvPr/>
-        </p:nvSpPr>
-        <p:spPr>
-          <a:xfrm>
-            <a:off x="411480" y="3703320"/>
-            <a:ext cx="3322216" cy="1280160"/>
-          </a:xfrm>
-          <a:prstGeom prst="rect">
-            <a:avLst/>
-          </a:prstGeom>
-          <a:noFill/>
-        </p:spPr>
-        <p:txBody>
-          <a:bodyPr wrap="square" anchor="t" lIns="0" rIns="0" tIns="0" bIns="0">
-            <a:spAutoFit/>
-          </a:bodyPr>
-          <a:lstStyle/>
-          <a:p>
-            <a:pPr algn="ctr">
-              <a:lnSpc>
-                <a:spcPct val="135000"/>
-              </a:lnSpc>
-            </a:pPr>
-            <a:r>
-              <a:rPr sz="1300" b="0">
-                <a:solidFill>
-                  <a:srgbClr val="CCCCCC"/>
-                </a:solidFill>
-                <a:latin typeface="Schibsted Grotesk"/>
-              </a:rPr>
-              <a:t>RVA Builds connects Richmond Public Schools students with paid, hands-on careers in construction and the skilled trades — before they even graduate. A Richmond Ed Fund initiative, backed by Bloomberg Philanthropies.</a:t>
-            </a:r>
-          </a:p>
-        </p:txBody>
-      </p:sp>
-      <p:cxnSp>
-        <p:nvCxnSpPr>
-          <p:cNvPr id="7" name="Connector 6"/>
-          <p:cNvCxnSpPr/>
-          <p:nvPr/>
-        </p:nvCxnSpPr>
-        <p:spPr>
-          <a:xfrm>
-            <a:off x="5150915.5" y="2331720"/>
-            <a:ext cx="6035040.0" cy="0"/>
-          </a:xfrm>
-          <a:prstGeom prst="line">
-            <a:avLst/>
-          </a:prstGeom>
-          <a:ln w="12700">
-            <a:solidFill>
-              <a:srgbClr val="E4E4E4"/>
-            </a:solidFill>
-          </a:ln>
-        </p:spPr>
-        <p:style>
-          <a:lnRef idx="2">
-            <a:schemeClr val="accent1"/>
-          </a:lnRef>
-          <a:fillRef idx="0">
-            <a:schemeClr val="accent1"/>
-          </a:fillRef>
-          <a:effectRef idx="1">
-            <a:schemeClr val="accent1"/>
-          </a:effectRef>
-          <a:fontRef idx="minor">
-            <a:schemeClr val="tx1"/>
-          </a:fontRef>
-        </p:style>
-      </p:cxnSp>
-      <p:cxnSp>
-        <p:nvCxnSpPr>
-          <p:cNvPr id="8" name="Connector 7"/>
-          <p:cNvCxnSpPr/>
-          <p:nvPr/>
-        </p:nvCxnSpPr>
-        <p:spPr>
-          <a:xfrm>
-            <a:off x="5150915.5" y="3566160"/>
-            <a:ext cx="6035040.0" cy="0"/>
-          </a:xfrm>
-          <a:prstGeom prst="line">
-            <a:avLst/>
-          </a:prstGeom>
-          <a:ln w="12700">
-            <a:solidFill>
-              <a:srgbClr val="E4E4E4"/>
-            </a:solidFill>
-          </a:ln>
-        </p:spPr>
-        <p:style>
-          <a:lnRef idx="2">
-            <a:schemeClr val="accent1"/>
-          </a:lnRef>
-          <a:fillRef idx="0">
-            <a:schemeClr val="accent1"/>
-          </a:fillRef>
-          <a:effectRef idx="1">
-            <a:schemeClr val="accent1"/>
-          </a:effectRef>
-          <a:fontRef idx="minor">
-            <a:schemeClr val="tx1"/>
-          </a:fontRef>
-        </p:style>
-      </p:cxnSp>
-      <p:sp>
-        <p:nvSpPr>
-          <p:cNvPr id="9" name="TextBox 8"/>
-          <p:cNvSpPr txBox="1"/>
-          <p:nvPr/>
-        </p:nvSpPr>
-        <p:spPr>
-          <a:xfrm>
-            <a:off x="5150915" y="2514600"/>
-            <a:ext cx="1371600" cy="548640"/>
-          </a:xfrm>
-          <a:prstGeom prst="rect">
-            <a:avLst/>
-          </a:prstGeom>
-          <a:noFill/>
-        </p:spPr>
-        <p:txBody>
-          <a:bodyPr wrap="square" anchor="t" lIns="0" rIns="0" tIns="0" bIns="0">
-            <a:spAutoFit/>
-          </a:bodyPr>
-          <a:lstStyle/>
-          <a:p>
-            <a:pPr algn="l">
-              <a:lnSpc>
-                <a:spcPct val="100000"/>
-              </a:lnSpc>
-            </a:pPr>
-            <a:r>
-              <a:rPr sz="3200" b="1">
-                <a:solidFill>
-                  <a:srgbClr val="1A1A1A"/>
-                </a:solidFill>
-                <a:latin typeface="Space Grotesk"/>
-              </a:rPr>
-              <a:t>150</a:t>
-            </a:r>
-          </a:p>
-        </p:txBody>
-      </p:sp>
-      <p:sp>
-        <p:nvSpPr>
-          <p:cNvPr id="10" name="TextBox 9"/>
-          <p:cNvSpPr txBox="1"/>
-          <p:nvPr/>
-        </p:nvSpPr>
-        <p:spPr>
-          <a:xfrm>
-            <a:off x="5150915" y="3108960"/>
-            <a:ext cx="1371600" cy="502920"/>
-          </a:xfrm>
-          <a:prstGeom prst="rect">
-            <a:avLst/>
-          </a:prstGeom>
-          <a:noFill/>
-        </p:spPr>
-        <p:txBody>
-          <a:bodyPr wrap="square" anchor="t" lIns="0" rIns="0" tIns="0" bIns="0">
-            <a:spAutoFit/>
-          </a:bodyPr>
-          <a:lstStyle/>
-          <a:p>
-            <a:pPr algn="l">
-              <a:lnSpc>
-                <a:spcPct val="115000"/>
-              </a:lnSpc>
-            </a:pPr>
-            <a:r>
-              <a:rPr sz="1050" b="0">
-                <a:solidFill>
-                  <a:srgbClr val="5A5A5A"/>
-                </a:solidFill>
-                <a:latin typeface="Schibsted Grotesk"/>
-              </a:rPr>
-              <a:t>RPS grads aimed at registered</a:t>
-            </a:r>
-          </a:p>
-          <a:p>
-            <a:pPr algn="l">
-              <a:lnSpc>
-                <a:spcPct val="115000"/>
-              </a:lnSpc>
-            </a:pPr>
-            <a:r>
-              <a:rPr sz="1050" b="0">
-                <a:solidFill>
-                  <a:srgbClr val="5A5A5A"/>
-                </a:solidFill>
-                <a:latin typeface="Schibsted Grotesk"/>
-              </a:rPr>
-              <a:t>apprenticeships in 3 years</a:t>
-            </a:r>
-          </a:p>
-        </p:txBody>
-      </p:sp>
-      <p:sp>
-        <p:nvSpPr>
-          <p:cNvPr id="11" name="TextBox 10"/>
-          <p:cNvSpPr txBox="1"/>
-          <p:nvPr/>
-        </p:nvSpPr>
-        <p:spPr>
-          <a:xfrm>
-            <a:off x="6659675" y="2514600"/>
-            <a:ext cx="1371600" cy="548640"/>
-          </a:xfrm>
-          <a:prstGeom prst="rect">
-            <a:avLst/>
-          </a:prstGeom>
-          <a:noFill/>
-        </p:spPr>
-        <p:txBody>
-          <a:bodyPr wrap="square" anchor="t" lIns="0" rIns="0" tIns="0" bIns="0">
-            <a:spAutoFit/>
-          </a:bodyPr>
-          <a:lstStyle/>
-          <a:p>
-            <a:pPr algn="l">
-              <a:lnSpc>
-                <a:spcPct val="100000"/>
-              </a:lnSpc>
-            </a:pPr>
-            <a:r>
-              <a:rPr sz="3200" b="1">
-                <a:solidFill>
-                  <a:srgbClr val="1A1A1A"/>
-                </a:solidFill>
-                <a:latin typeface="Space Grotesk"/>
-              </a:rPr>
-              <a:t>500</a:t>
-            </a:r>
-          </a:p>
-        </p:txBody>
-      </p:sp>
-      <p:sp>
-        <p:nvSpPr>
-          <p:cNvPr id="12" name="TextBox 11"/>
-          <p:cNvSpPr txBox="1"/>
-          <p:nvPr/>
-        </p:nvSpPr>
-        <p:spPr>
-          <a:xfrm>
-            <a:off x="6659675" y="3108960"/>
-            <a:ext cx="1371600" cy="502920"/>
-          </a:xfrm>
-          <a:prstGeom prst="rect">
-            <a:avLst/>
-          </a:prstGeom>
-          <a:noFill/>
-        </p:spPr>
-        <p:txBody>
-          <a:bodyPr wrap="square" anchor="t" lIns="0" rIns="0" tIns="0" bIns="0">
-            <a:spAutoFit/>
-          </a:bodyPr>
-          <a:lstStyle/>
-          <a:p>
-            <a:pPr algn="l">
-              <a:lnSpc>
-                <a:spcPct val="115000"/>
-              </a:lnSpc>
-            </a:pPr>
-            <a:r>
-              <a:rPr sz="1050" b="0">
-                <a:solidFill>
-                  <a:srgbClr val="5A5A5A"/>
-                </a:solidFill>
-                <a:latin typeface="Schibsted Grotesk"/>
-              </a:rPr>
-              <a:t>Students in paid trades</a:t>
-            </a:r>
-          </a:p>
-          <a:p>
-            <a:pPr algn="l">
-              <a:lnSpc>
-                <a:spcPct val="115000"/>
-              </a:lnSpc>
-            </a:pPr>
-            <a:r>
-              <a:rPr sz="1050" b="0">
-                <a:solidFill>
-                  <a:srgbClr val="5A5A5A"/>
-                </a:solidFill>
-                <a:latin typeface="Schibsted Grotesk"/>
-              </a:rPr>
-              <a:t>learning by 2028–29 (goal)</a:t>
-            </a:r>
-          </a:p>
-        </p:txBody>
-      </p:sp>
-      <p:sp>
-        <p:nvSpPr>
-          <p:cNvPr id="13" name="TextBox 12"/>
-          <p:cNvSpPr txBox="1"/>
-          <p:nvPr/>
-        </p:nvSpPr>
-        <p:spPr>
-          <a:xfrm>
-            <a:off x="8168435" y="2514600"/>
-            <a:ext cx="1371600" cy="548640"/>
-          </a:xfrm>
-          <a:prstGeom prst="rect">
-            <a:avLst/>
-          </a:prstGeom>
-          <a:noFill/>
-        </p:spPr>
-        <p:txBody>
-          <a:bodyPr wrap="square" anchor="t" lIns="0" rIns="0" tIns="0" bIns="0">
-            <a:spAutoFit/>
-          </a:bodyPr>
-          <a:lstStyle/>
-          <a:p>
-            <a:pPr algn="l">
-              <a:lnSpc>
-                <a:spcPct val="100000"/>
-              </a:lnSpc>
-            </a:pPr>
-            <a:r>
-              <a:rPr sz="3200" b="1">
-                <a:solidFill>
-                  <a:srgbClr val="1A1A1A"/>
-                </a:solidFill>
-                <a:latin typeface="Space Grotesk"/>
-              </a:rPr>
-              <a:t>17</a:t>
-            </a:r>
-          </a:p>
-        </p:txBody>
-      </p:sp>
-      <p:sp>
-        <p:nvSpPr>
-          <p:cNvPr id="14" name="TextBox 13"/>
-          <p:cNvSpPr txBox="1"/>
-          <p:nvPr/>
-        </p:nvSpPr>
-        <p:spPr>
-          <a:xfrm>
-            <a:off x="8168435" y="3108960"/>
-            <a:ext cx="1371600" cy="502920"/>
-          </a:xfrm>
-          <a:prstGeom prst="rect">
-            <a:avLst/>
-          </a:prstGeom>
-          <a:noFill/>
-        </p:spPr>
-        <p:txBody>
-          <a:bodyPr wrap="square" anchor="t" lIns="0" rIns="0" tIns="0" bIns="0">
-            <a:spAutoFit/>
-          </a:bodyPr>
-          <a:lstStyle/>
-          <a:p>
-            <a:pPr algn="l">
-              <a:lnSpc>
-                <a:spcPct val="115000"/>
-              </a:lnSpc>
-            </a:pPr>
-            <a:r>
-              <a:rPr sz="1050" b="0">
-                <a:solidFill>
-                  <a:srgbClr val="5A5A5A"/>
-                </a:solidFill>
-                <a:latin typeface="Schibsted Grotesk"/>
-              </a:rPr>
-              <a:t>Partners: schools, the city,</a:t>
-            </a:r>
-          </a:p>
-          <a:p>
-            <a:pPr algn="l">
-              <a:lnSpc>
-                <a:spcPct val="115000"/>
-              </a:lnSpc>
-            </a:pPr>
-            <a:r>
-              <a:rPr sz="1050" b="0">
-                <a:solidFill>
-                  <a:srgbClr val="5A5A5A"/>
-                </a:solidFill>
-                <a:latin typeface="Schibsted Grotesk"/>
-              </a:rPr>
-              <a:t>business &amp; unions</a:t>
-            </a:r>
-          </a:p>
-        </p:txBody>
-      </p:sp>
-      <p:sp>
-        <p:nvSpPr>
-          <p:cNvPr id="15" name="TextBox 14"/>
-          <p:cNvSpPr txBox="1"/>
-          <p:nvPr/>
-        </p:nvSpPr>
-        <p:spPr>
-          <a:xfrm>
-            <a:off x="9677195" y="2514600"/>
-            <a:ext cx="1371600" cy="548640"/>
-          </a:xfrm>
-          <a:prstGeom prst="rect">
-            <a:avLst/>
-          </a:prstGeom>
-          <a:noFill/>
-        </p:spPr>
-        <p:txBody>
-          <a:bodyPr wrap="square" anchor="t" lIns="0" rIns="0" tIns="0" bIns="0">
-            <a:spAutoFit/>
-          </a:bodyPr>
-          <a:lstStyle/>
-          <a:p>
-            <a:pPr algn="l">
-              <a:lnSpc>
-                <a:spcPct val="100000"/>
-              </a:lnSpc>
-            </a:pPr>
-            <a:r>
-              <a:rPr sz="3200" b="1">
-                <a:solidFill>
-                  <a:srgbClr val="1A1A1A"/>
-                </a:solidFill>
-                <a:latin typeface="Space Grotesk"/>
-              </a:rPr>
-              <a:t>120+</a:t>
-            </a:r>
-          </a:p>
-        </p:txBody>
-      </p:sp>
-      <p:sp>
-        <p:nvSpPr>
-          <p:cNvPr id="16" name="TextBox 15"/>
-          <p:cNvSpPr txBox="1"/>
-          <p:nvPr/>
-        </p:nvSpPr>
-        <p:spPr>
-          <a:xfrm>
-            <a:off x="9677195" y="3108960"/>
-            <a:ext cx="1371600" cy="502920"/>
-          </a:xfrm>
-          <a:prstGeom prst="rect">
-            <a:avLst/>
-          </a:prstGeom>
-          <a:noFill/>
-        </p:spPr>
-        <p:txBody>
-          <a:bodyPr wrap="square" anchor="t" lIns="0" rIns="0" tIns="0" bIns="0">
-            <a:spAutoFit/>
-          </a:bodyPr>
-          <a:lstStyle/>
-          <a:p>
-            <a:pPr algn="l">
-              <a:lnSpc>
-                <a:spcPct val="115000"/>
-              </a:lnSpc>
-            </a:pPr>
-            <a:r>
-              <a:rPr sz="1050" b="0">
-                <a:solidFill>
-                  <a:srgbClr val="5A5A5A"/>
-                </a:solidFill>
-                <a:latin typeface="Schibsted Grotesk"/>
-              </a:rPr>
-              <a:t>Paid work-based learning</a:t>
-            </a:r>
-          </a:p>
-          <a:p>
-            <a:pPr algn="l">
-              <a:lnSpc>
-                <a:spcPct val="115000"/>
-              </a:lnSpc>
-            </a:pPr>
-            <a:r>
-              <a:rPr sz="1050" b="0">
-                <a:solidFill>
-                  <a:srgbClr val="5A5A5A"/>
-                </a:solidFill>
-                <a:latin typeface="Schibsted Grotesk"/>
-              </a:rPr>
-              <a:t>hours per student</a:t>
-            </a:r>
-          </a:p>
-        </p:txBody>
-      </p:sp>
-      <p:sp>
-        <p:nvSpPr>
-          <p:cNvPr id="17" name="TextBox 16"/>
-          <p:cNvSpPr txBox="1"/>
-          <p:nvPr/>
-        </p:nvSpPr>
-        <p:spPr>
-          <a:xfrm>
-            <a:off x="4145176" y="4023360"/>
-            <a:ext cx="8046519" cy="548640"/>
-          </a:xfrm>
-          <a:prstGeom prst="rect">
-            <a:avLst/>
-          </a:prstGeom>
-          <a:noFill/>
-        </p:spPr>
-        <p:txBody>
-          <a:bodyPr wrap="square" anchor="t" lIns="0" rIns="0">
-            <a:spAutoFit/>
-          </a:bodyPr>
-          <a:lstStyle/>
-          <a:p>
-            <a:pPr algn="ctr">
-              <a:lnSpc>
-                <a:spcPct val="100000"/>
-              </a:lnSpc>
-            </a:pPr>
-            <a:r>
-              <a:rPr sz="1900" b="1">
-                <a:solidFill>
-                  <a:srgbClr val="1A1A1A"/>
-                </a:solidFill>
-                <a:latin typeface="Space Grotesk"/>
-              </a:rPr>
-              <a:t>Build a career in the trades, </a:t>
-            </a:r>
-            <a:r>
-              <a:rPr sz="1900" b="1">
-                <a:solidFill>
-                  <a:srgbClr val="F15C2C"/>
-                </a:solidFill>
-                <a:latin typeface="Space Grotesk"/>
-              </a:rPr>
-              <a:t>before you graduate.</a:t>
+              <a:t>KIT</a:t>
             </a:r>
           </a:p>
         </p:txBody>
@@ -5797,7 +5308,7 @@
             <a:avLst/>
           </a:prstGeom>
           <a:solidFill>
-            <a:srgbClr val="F15C2C"/>
+            <a:srgbClr val="FFFFFF"/>
           </a:solidFill>
           <a:ln>
             <a:noFill/>
@@ -5826,104 +5337,60 @@
           </a:p>
         </p:txBody>
       </p:sp>
-      <p:pic>
-        <p:nvPicPr>
-          <p:cNvPr id="3" name="Picture 2" descr="hero-connection.jpg"/>
-          <p:cNvPicPr>
-            <a:picLocks noChangeAspect="1"/>
-          </p:cNvPicPr>
-          <p:nvPr/>
-        </p:nvPicPr>
-        <p:blipFill>
-          <a:blip r:embed="rId2"/>
-          <a:srcRect l="5561" r="5561"/>
-          <a:stretch>
-            <a:fillRect/>
-          </a:stretch>
-        </p:blipFill>
-        <p:spPr>
-          <a:xfrm>
-            <a:off x="4145176" y="0"/>
-            <a:ext cx="8046519" cy="6858000"/>
-          </a:xfrm>
-          <a:prstGeom prst="rect">
-            <a:avLst/>
-          </a:prstGeom>
-        </p:spPr>
-      </p:pic>
-      <p:pic>
-        <p:nvPicPr>
-          <p:cNvPr id="4" name="Picture 3" descr="rva-builds-icon.png"/>
-          <p:cNvPicPr>
-            <a:picLocks noChangeAspect="1"/>
-          </p:cNvPicPr>
-          <p:nvPr/>
-        </p:nvPicPr>
-        <p:blipFill>
-          <a:blip r:embed="rId3"/>
-          <a:stretch>
-            <a:fillRect/>
-          </a:stretch>
-        </p:blipFill>
-        <p:spPr>
-          <a:xfrm>
-            <a:off x="548640" y="4160520"/>
-            <a:ext cx="365760" cy="365760"/>
-          </a:xfrm>
-          <a:prstGeom prst="rect">
-            <a:avLst/>
-          </a:prstGeom>
-        </p:spPr>
-      </p:pic>
-      <p:sp>
-        <p:nvSpPr>
-          <p:cNvPr id="5" name="TextBox 4"/>
+      <p:sp>
+        <p:nvSpPr>
+          <p:cNvPr id="3" name="Rectangle 2"/>
+          <p:cNvSpPr/>
+          <p:nvPr/>
+        </p:nvSpPr>
+        <p:spPr>
+          <a:xfrm>
+            <a:off x="0" y="0"/>
+            <a:ext cx="4145176" cy="6858000"/>
+          </a:xfrm>
+          <a:prstGeom prst="rect">
+            <a:avLst/>
+          </a:prstGeom>
+          <a:solidFill>
+            <a:srgbClr val="1A1A1A"/>
+          </a:solidFill>
+          <a:ln>
+            <a:noFill/>
+          </a:ln>
+          <a:effectLst/>
+        </p:spPr>
+        <p:style>
+          <a:lnRef idx="1">
+            <a:schemeClr val="accent1"/>
+          </a:lnRef>
+          <a:fillRef idx="3">
+            <a:schemeClr val="accent1"/>
+          </a:fillRef>
+          <a:effectRef idx="2">
+            <a:schemeClr val="accent1"/>
+          </a:effectRef>
+          <a:fontRef idx="minor">
+            <a:schemeClr val="lt1"/>
+          </a:fontRef>
+        </p:style>
+        <p:txBody>
+          <a:bodyPr rtlCol="0" anchor="ctr"/>
+          <a:lstStyle/>
+          <a:p>
+            <a:pPr algn="ctr"/>
+          </a:p>
+        </p:txBody>
+      </p:sp>
+      <p:sp>
+        <p:nvSpPr>
+          <p:cNvPr id="4" name="TextBox 3"/>
           <p:cNvSpPr txBox="1"/>
           <p:nvPr/>
         </p:nvSpPr>
         <p:spPr>
           <a:xfrm>
-            <a:off x="960120" y="4160520"/>
-            <a:ext cx="3200400" cy="365760"/>
-          </a:xfrm>
-          <a:prstGeom prst="rect">
-            <a:avLst/>
-          </a:prstGeom>
-          <a:noFill/>
-        </p:spPr>
-        <p:txBody>
-          <a:bodyPr wrap="square" anchor="ctr" lIns="0" rIns="0" tIns="0" bIns="0">
-            <a:spAutoFit/>
-          </a:bodyPr>
-          <a:lstStyle/>
-          <a:p>
-            <a:pPr algn="l">
-              <a:lnSpc>
-                <a:spcPct val="100000"/>
-              </a:lnSpc>
-            </a:pPr>
-            <a:r>
-              <a:rPr sz="1500" b="0">
-                <a:solidFill>
-                  <a:srgbClr val="FFFFFF"/>
-                </a:solidFill>
-                <a:latin typeface="Space Grotesk"/>
-              </a:rPr>
-              <a:t>RVA Builds</a:t>
-            </a:r>
-          </a:p>
-        </p:txBody>
-      </p:sp>
-      <p:sp>
-        <p:nvSpPr>
-          <p:cNvPr id="6" name="TextBox 5"/>
-          <p:cNvSpPr txBox="1"/>
-          <p:nvPr/>
-        </p:nvSpPr>
-        <p:spPr>
-          <a:xfrm>
-            <a:off x="548640" y="4709160"/>
-            <a:ext cx="3657600" cy="457200"/>
+            <a:off x="411480" y="2331720"/>
+            <a:ext cx="3322216" cy="274320"/>
           </a:xfrm>
           <a:prstGeom prst="rect">
             <a:avLst/>
@@ -5936,33 +5403,33 @@
           </a:bodyPr>
           <a:lstStyle/>
           <a:p>
-            <a:pPr algn="l">
+            <a:pPr algn="ctr">
               <a:lnSpc>
                 <a:spcPct val="100000"/>
               </a:lnSpc>
             </a:pPr>
             <a:r>
-              <a:rPr sz="1050" b="1">
-                <a:solidFill>
-                  <a:srgbClr val="FFE3D8"/>
+              <a:rPr sz="1200" b="1">
+                <a:solidFill>
+                  <a:srgbClr val="F15C2C"/>
                 </a:solidFill>
                 <a:latin typeface="Space Grotesk"/>
               </a:rPr>
-              <a:t>RICHMOND ED FUND INITIATIVE</a:t>
-            </a:r>
-          </a:p>
-        </p:txBody>
-      </p:sp>
-      <p:sp>
-        <p:nvSpPr>
-          <p:cNvPr id="7" name="TextBox 6"/>
+              <a:t>01</a:t>
+            </a:r>
+          </a:p>
+        </p:txBody>
+      </p:sp>
+      <p:sp>
+        <p:nvSpPr>
+          <p:cNvPr id="5" name="TextBox 4"/>
           <p:cNvSpPr txBox="1"/>
           <p:nvPr/>
         </p:nvSpPr>
         <p:spPr>
           <a:xfrm>
-            <a:off x="548640" y="5074920"/>
-            <a:ext cx="3657600" cy="1280160"/>
+            <a:off x="411480" y="2651760"/>
+            <a:ext cx="3322216" cy="1005840"/>
           </a:xfrm>
           <a:prstGeom prst="rect">
             <a:avLst/>
@@ -5975,35 +5442,568 @@
           </a:bodyPr>
           <a:lstStyle/>
           <a:p>
+            <a:pPr algn="ctr">
+              <a:lnSpc>
+                <a:spcPct val="105000"/>
+              </a:lnSpc>
+            </a:pPr>
+            <a:r>
+              <a:rPr sz="2600" b="1">
+                <a:solidFill>
+                  <a:srgbClr val="FFFFFF"/>
+                </a:solidFill>
+                <a:latin typeface="Space Grotesk"/>
+              </a:rPr>
+              <a:t>What is</a:t>
+            </a:r>
+          </a:p>
+          <a:p>
+            <a:pPr algn="ctr">
+              <a:lnSpc>
+                <a:spcPct val="105000"/>
+              </a:lnSpc>
+            </a:pPr>
+            <a:r>
+              <a:rPr sz="2600" b="1">
+                <a:solidFill>
+                  <a:srgbClr val="FFFFFF"/>
+                </a:solidFill>
+                <a:latin typeface="Space Grotesk"/>
+              </a:rPr>
+              <a:t>RVA Builds?</a:t>
+            </a:r>
+          </a:p>
+        </p:txBody>
+      </p:sp>
+      <p:sp>
+        <p:nvSpPr>
+          <p:cNvPr id="6" name="TextBox 5"/>
+          <p:cNvSpPr txBox="1"/>
+          <p:nvPr/>
+        </p:nvSpPr>
+        <p:spPr>
+          <a:xfrm>
+            <a:off x="411480" y="3703320"/>
+            <a:ext cx="3322216" cy="1280160"/>
+          </a:xfrm>
+          <a:prstGeom prst="rect">
+            <a:avLst/>
+          </a:prstGeom>
+          <a:noFill/>
+        </p:spPr>
+        <p:txBody>
+          <a:bodyPr wrap="square" anchor="t" lIns="0" rIns="0" tIns="0" bIns="0">
+            <a:spAutoFit/>
+          </a:bodyPr>
+          <a:lstStyle/>
+          <a:p>
+            <a:pPr algn="ctr">
+              <a:lnSpc>
+                <a:spcPct val="135000"/>
+              </a:lnSpc>
+            </a:pPr>
+            <a:r>
+              <a:rPr sz="1300" b="0">
+                <a:solidFill>
+                  <a:srgbClr val="CCCCCC"/>
+                </a:solidFill>
+                <a:latin typeface="Schibsted Grotesk"/>
+              </a:rPr>
+              <a:t>RVA Builds connects Richmond Public Schools students with paid, hands-on careers in construction and the skilled trades — before they even graduate. A Richmond Ed Fund initiative, backed by Bloomberg Philanthropies.</a:t>
+            </a:r>
+          </a:p>
+        </p:txBody>
+      </p:sp>
+      <p:cxnSp>
+        <p:nvCxnSpPr>
+          <p:cNvPr id="7" name="Connector 6"/>
+          <p:cNvCxnSpPr/>
+          <p:nvPr/>
+        </p:nvCxnSpPr>
+        <p:spPr>
+          <a:xfrm>
+            <a:off x="5150915.5" y="2331720"/>
+            <a:ext cx="6035040.0" cy="0"/>
+          </a:xfrm>
+          <a:prstGeom prst="line">
+            <a:avLst/>
+          </a:prstGeom>
+          <a:ln w="12700">
+            <a:solidFill>
+              <a:srgbClr val="E4E4E4"/>
+            </a:solidFill>
+          </a:ln>
+        </p:spPr>
+        <p:style>
+          <a:lnRef idx="2">
+            <a:schemeClr val="accent1"/>
+          </a:lnRef>
+          <a:fillRef idx="0">
+            <a:schemeClr val="accent1"/>
+          </a:fillRef>
+          <a:effectRef idx="1">
+            <a:schemeClr val="accent1"/>
+          </a:effectRef>
+          <a:fontRef idx="minor">
+            <a:schemeClr val="tx1"/>
+          </a:fontRef>
+        </p:style>
+      </p:cxnSp>
+      <p:cxnSp>
+        <p:nvCxnSpPr>
+          <p:cNvPr id="8" name="Connector 7"/>
+          <p:cNvCxnSpPr/>
+          <p:nvPr/>
+        </p:nvCxnSpPr>
+        <p:spPr>
+          <a:xfrm>
+            <a:off x="5150915.5" y="3566160"/>
+            <a:ext cx="6035040.0" cy="0"/>
+          </a:xfrm>
+          <a:prstGeom prst="line">
+            <a:avLst/>
+          </a:prstGeom>
+          <a:ln w="12700">
+            <a:solidFill>
+              <a:srgbClr val="E4E4E4"/>
+            </a:solidFill>
+          </a:ln>
+        </p:spPr>
+        <p:style>
+          <a:lnRef idx="2">
+            <a:schemeClr val="accent1"/>
+          </a:lnRef>
+          <a:fillRef idx="0">
+            <a:schemeClr val="accent1"/>
+          </a:fillRef>
+          <a:effectRef idx="1">
+            <a:schemeClr val="accent1"/>
+          </a:effectRef>
+          <a:fontRef idx="minor">
+            <a:schemeClr val="tx1"/>
+          </a:fontRef>
+        </p:style>
+      </p:cxnSp>
+      <p:sp>
+        <p:nvSpPr>
+          <p:cNvPr id="9" name="TextBox 8"/>
+          <p:cNvSpPr txBox="1"/>
+          <p:nvPr/>
+        </p:nvSpPr>
+        <p:spPr>
+          <a:xfrm>
+            <a:off x="5150915" y="2514600"/>
+            <a:ext cx="1371600" cy="548640"/>
+          </a:xfrm>
+          <a:prstGeom prst="rect">
+            <a:avLst/>
+          </a:prstGeom>
+          <a:noFill/>
+        </p:spPr>
+        <p:txBody>
+          <a:bodyPr wrap="square" anchor="t" lIns="0" rIns="0" tIns="0" bIns="0">
+            <a:spAutoFit/>
+          </a:bodyPr>
+          <a:lstStyle/>
+          <a:p>
             <a:pPr algn="l">
               <a:lnSpc>
                 <a:spcPct val="100000"/>
               </a:lnSpc>
             </a:pPr>
             <a:r>
-              <a:rPr sz="4400" b="1">
-                <a:solidFill>
-                  <a:srgbClr val="FFFFFF"/>
+              <a:rPr sz="3200" b="1">
+                <a:solidFill>
+                  <a:srgbClr val="1A1A1A"/>
                 </a:solidFill>
                 <a:latin typeface="Space Grotesk"/>
               </a:rPr>
-              <a:t>MEDIA</a:t>
-            </a:r>
-          </a:p>
+              <a:t>150</a:t>
+            </a:r>
+          </a:p>
+        </p:txBody>
+      </p:sp>
+      <p:sp>
+        <p:nvSpPr>
+          <p:cNvPr id="10" name="TextBox 9"/>
+          <p:cNvSpPr txBox="1"/>
+          <p:nvPr/>
+        </p:nvSpPr>
+        <p:spPr>
+          <a:xfrm>
+            <a:off x="5150915" y="3108960"/>
+            <a:ext cx="1371600" cy="502920"/>
+          </a:xfrm>
+          <a:prstGeom prst="rect">
+            <a:avLst/>
+          </a:prstGeom>
+          <a:noFill/>
+        </p:spPr>
+        <p:txBody>
+          <a:bodyPr wrap="square" anchor="t" lIns="0" rIns="0" tIns="0" bIns="0">
+            <a:spAutoFit/>
+          </a:bodyPr>
+          <a:lstStyle/>
           <a:p>
             <a:pPr algn="l">
               <a:lnSpc>
+                <a:spcPct val="115000"/>
+              </a:lnSpc>
+            </a:pPr>
+            <a:r>
+              <a:rPr sz="1050" b="0">
+                <a:solidFill>
+                  <a:srgbClr val="5A5A5A"/>
+                </a:solidFill>
+                <a:latin typeface="Schibsted Grotesk"/>
+              </a:rPr>
+              <a:t>RPS grads aimed at registered</a:t>
+            </a:r>
+          </a:p>
+          <a:p>
+            <a:pPr algn="l">
+              <a:lnSpc>
+                <a:spcPct val="115000"/>
+              </a:lnSpc>
+            </a:pPr>
+            <a:r>
+              <a:rPr sz="1050" b="0">
+                <a:solidFill>
+                  <a:srgbClr val="5A5A5A"/>
+                </a:solidFill>
+                <a:latin typeface="Schibsted Grotesk"/>
+              </a:rPr>
+              <a:t>apprenticeships in 3 years</a:t>
+            </a:r>
+          </a:p>
+        </p:txBody>
+      </p:sp>
+      <p:sp>
+        <p:nvSpPr>
+          <p:cNvPr id="11" name="TextBox 10"/>
+          <p:cNvSpPr txBox="1"/>
+          <p:nvPr/>
+        </p:nvSpPr>
+        <p:spPr>
+          <a:xfrm>
+            <a:off x="6659675" y="2514600"/>
+            <a:ext cx="1371600" cy="548640"/>
+          </a:xfrm>
+          <a:prstGeom prst="rect">
+            <a:avLst/>
+          </a:prstGeom>
+          <a:noFill/>
+        </p:spPr>
+        <p:txBody>
+          <a:bodyPr wrap="square" anchor="t" lIns="0" rIns="0" tIns="0" bIns="0">
+            <a:spAutoFit/>
+          </a:bodyPr>
+          <a:lstStyle/>
+          <a:p>
+            <a:pPr algn="l">
+              <a:lnSpc>
                 <a:spcPct val="100000"/>
               </a:lnSpc>
             </a:pPr>
             <a:r>
-              <a:rPr sz="4400" b="1">
-                <a:solidFill>
-                  <a:srgbClr val="FFFFFF"/>
+              <a:rPr sz="3200" b="1">
+                <a:solidFill>
+                  <a:srgbClr val="1A1A1A"/>
                 </a:solidFill>
                 <a:latin typeface="Space Grotesk"/>
               </a:rPr>
-              <a:t>KIT</a:t>
+              <a:t>500</a:t>
+            </a:r>
+          </a:p>
+        </p:txBody>
+      </p:sp>
+      <p:sp>
+        <p:nvSpPr>
+          <p:cNvPr id="12" name="TextBox 11"/>
+          <p:cNvSpPr txBox="1"/>
+          <p:nvPr/>
+        </p:nvSpPr>
+        <p:spPr>
+          <a:xfrm>
+            <a:off x="6659675" y="3108960"/>
+            <a:ext cx="1371600" cy="502920"/>
+          </a:xfrm>
+          <a:prstGeom prst="rect">
+            <a:avLst/>
+          </a:prstGeom>
+          <a:noFill/>
+        </p:spPr>
+        <p:txBody>
+          <a:bodyPr wrap="square" anchor="t" lIns="0" rIns="0" tIns="0" bIns="0">
+            <a:spAutoFit/>
+          </a:bodyPr>
+          <a:lstStyle/>
+          <a:p>
+            <a:pPr algn="l">
+              <a:lnSpc>
+                <a:spcPct val="115000"/>
+              </a:lnSpc>
+            </a:pPr>
+            <a:r>
+              <a:rPr sz="1050" b="0">
+                <a:solidFill>
+                  <a:srgbClr val="5A5A5A"/>
+                </a:solidFill>
+                <a:latin typeface="Schibsted Grotesk"/>
+              </a:rPr>
+              <a:t>Students in paid trades</a:t>
+            </a:r>
+          </a:p>
+          <a:p>
+            <a:pPr algn="l">
+              <a:lnSpc>
+                <a:spcPct val="115000"/>
+              </a:lnSpc>
+            </a:pPr>
+            <a:r>
+              <a:rPr sz="1050" b="0">
+                <a:solidFill>
+                  <a:srgbClr val="5A5A5A"/>
+                </a:solidFill>
+                <a:latin typeface="Schibsted Grotesk"/>
+              </a:rPr>
+              <a:t>learning by 2028–29 (goal)</a:t>
+            </a:r>
+          </a:p>
+        </p:txBody>
+      </p:sp>
+      <p:sp>
+        <p:nvSpPr>
+          <p:cNvPr id="13" name="TextBox 12"/>
+          <p:cNvSpPr txBox="1"/>
+          <p:nvPr/>
+        </p:nvSpPr>
+        <p:spPr>
+          <a:xfrm>
+            <a:off x="8168435" y="2514600"/>
+            <a:ext cx="1371600" cy="548640"/>
+          </a:xfrm>
+          <a:prstGeom prst="rect">
+            <a:avLst/>
+          </a:prstGeom>
+          <a:noFill/>
+        </p:spPr>
+        <p:txBody>
+          <a:bodyPr wrap="square" anchor="t" lIns="0" rIns="0" tIns="0" bIns="0">
+            <a:spAutoFit/>
+          </a:bodyPr>
+          <a:lstStyle/>
+          <a:p>
+            <a:pPr algn="l">
+              <a:lnSpc>
+                <a:spcPct val="100000"/>
+              </a:lnSpc>
+            </a:pPr>
+            <a:r>
+              <a:rPr sz="3200" b="1">
+                <a:solidFill>
+                  <a:srgbClr val="1A1A1A"/>
+                </a:solidFill>
+                <a:latin typeface="Space Grotesk"/>
+              </a:rPr>
+              <a:t>17</a:t>
+            </a:r>
+          </a:p>
+        </p:txBody>
+      </p:sp>
+      <p:sp>
+        <p:nvSpPr>
+          <p:cNvPr id="14" name="TextBox 13"/>
+          <p:cNvSpPr txBox="1"/>
+          <p:nvPr/>
+        </p:nvSpPr>
+        <p:spPr>
+          <a:xfrm>
+            <a:off x="8168435" y="3108960"/>
+            <a:ext cx="1371600" cy="502920"/>
+          </a:xfrm>
+          <a:prstGeom prst="rect">
+            <a:avLst/>
+          </a:prstGeom>
+          <a:noFill/>
+        </p:spPr>
+        <p:txBody>
+          <a:bodyPr wrap="square" anchor="t" lIns="0" rIns="0" tIns="0" bIns="0">
+            <a:spAutoFit/>
+          </a:bodyPr>
+          <a:lstStyle/>
+          <a:p>
+            <a:pPr algn="l">
+              <a:lnSpc>
+                <a:spcPct val="115000"/>
+              </a:lnSpc>
+            </a:pPr>
+            <a:r>
+              <a:rPr sz="1050" b="0">
+                <a:solidFill>
+                  <a:srgbClr val="5A5A5A"/>
+                </a:solidFill>
+                <a:latin typeface="Schibsted Grotesk"/>
+              </a:rPr>
+              <a:t>Partners: schools, the city,</a:t>
+            </a:r>
+          </a:p>
+          <a:p>
+            <a:pPr algn="l">
+              <a:lnSpc>
+                <a:spcPct val="115000"/>
+              </a:lnSpc>
+            </a:pPr>
+            <a:r>
+              <a:rPr sz="1050" b="0">
+                <a:solidFill>
+                  <a:srgbClr val="5A5A5A"/>
+                </a:solidFill>
+                <a:latin typeface="Schibsted Grotesk"/>
+              </a:rPr>
+              <a:t>business &amp; unions</a:t>
+            </a:r>
+          </a:p>
+        </p:txBody>
+      </p:sp>
+      <p:sp>
+        <p:nvSpPr>
+          <p:cNvPr id="15" name="TextBox 14"/>
+          <p:cNvSpPr txBox="1"/>
+          <p:nvPr/>
+        </p:nvSpPr>
+        <p:spPr>
+          <a:xfrm>
+            <a:off x="9677195" y="2514600"/>
+            <a:ext cx="1371600" cy="548640"/>
+          </a:xfrm>
+          <a:prstGeom prst="rect">
+            <a:avLst/>
+          </a:prstGeom>
+          <a:noFill/>
+        </p:spPr>
+        <p:txBody>
+          <a:bodyPr wrap="square" anchor="t" lIns="0" rIns="0" tIns="0" bIns="0">
+            <a:spAutoFit/>
+          </a:bodyPr>
+          <a:lstStyle/>
+          <a:p>
+            <a:pPr algn="l">
+              <a:lnSpc>
+                <a:spcPct val="100000"/>
+              </a:lnSpc>
+            </a:pPr>
+            <a:r>
+              <a:rPr sz="3200" b="1">
+                <a:solidFill>
+                  <a:srgbClr val="1A1A1A"/>
+                </a:solidFill>
+                <a:latin typeface="Space Grotesk"/>
+              </a:rPr>
+              <a:t>120+</a:t>
+            </a:r>
+          </a:p>
+        </p:txBody>
+      </p:sp>
+      <p:sp>
+        <p:nvSpPr>
+          <p:cNvPr id="16" name="TextBox 15"/>
+          <p:cNvSpPr txBox="1"/>
+          <p:nvPr/>
+        </p:nvSpPr>
+        <p:spPr>
+          <a:xfrm>
+            <a:off x="9677195" y="3108960"/>
+            <a:ext cx="1371600" cy="502920"/>
+          </a:xfrm>
+          <a:prstGeom prst="rect">
+            <a:avLst/>
+          </a:prstGeom>
+          <a:noFill/>
+        </p:spPr>
+        <p:txBody>
+          <a:bodyPr wrap="square" anchor="t" lIns="0" rIns="0" tIns="0" bIns="0">
+            <a:spAutoFit/>
+          </a:bodyPr>
+          <a:lstStyle/>
+          <a:p>
+            <a:pPr algn="l">
+              <a:lnSpc>
+                <a:spcPct val="115000"/>
+              </a:lnSpc>
+            </a:pPr>
+            <a:r>
+              <a:rPr sz="1050" b="0">
+                <a:solidFill>
+                  <a:srgbClr val="5A5A5A"/>
+                </a:solidFill>
+                <a:latin typeface="Schibsted Grotesk"/>
+              </a:rPr>
+              <a:t>Paid work-based learning</a:t>
+            </a:r>
+          </a:p>
+          <a:p>
+            <a:pPr algn="l">
+              <a:lnSpc>
+                <a:spcPct val="115000"/>
+              </a:lnSpc>
+            </a:pPr>
+            <a:r>
+              <a:rPr sz="1050" b="0">
+                <a:solidFill>
+                  <a:srgbClr val="5A5A5A"/>
+                </a:solidFill>
+                <a:latin typeface="Schibsted Grotesk"/>
+              </a:rPr>
+              <a:t>hours per student</a:t>
+            </a:r>
+          </a:p>
+        </p:txBody>
+      </p:sp>
+      <p:sp>
+        <p:nvSpPr>
+          <p:cNvPr id="17" name="TextBox 16"/>
+          <p:cNvSpPr txBox="1"/>
+          <p:nvPr/>
+        </p:nvSpPr>
+        <p:spPr>
+          <a:xfrm>
+            <a:off x="4145176" y="4023360"/>
+            <a:ext cx="8046519" cy="548640"/>
+          </a:xfrm>
+          <a:prstGeom prst="rect">
+            <a:avLst/>
+          </a:prstGeom>
+          <a:noFill/>
+        </p:spPr>
+        <p:txBody>
+          <a:bodyPr wrap="square" anchor="t" lIns="0" rIns="0">
+            <a:spAutoFit/>
+          </a:bodyPr>
+          <a:lstStyle/>
+          <a:p>
+            <a:pPr algn="ctr">
+              <a:lnSpc>
+                <a:spcPct val="100000"/>
+              </a:lnSpc>
+            </a:pPr>
+            <a:r>
+              <a:rPr sz="1900" b="1">
+                <a:solidFill>
+                  <a:srgbClr val="1A1A1A"/>
+                </a:solidFill>
+                <a:latin typeface="Space Grotesk"/>
+              </a:rPr>
+              <a:t>Build a career in the trades, </a:t>
+            </a:r>
+            <a:r>
+              <a:rPr sz="1900" b="1">
+                <a:solidFill>
+                  <a:srgbClr val="F15C2C"/>
+                </a:solidFill>
+                <a:latin typeface="Space Grotesk"/>
+              </a:rPr>
+              <a:t>before you graduate.</a:t>
             </a:r>
           </a:p>
         </p:txBody>
